--- a/3. [UI:UX] Hypercholesterolemia Risk Prediction Service.pptx
+++ b/3. [UI:UX] Hypercholesterolemia Risk Prediction Service.pptx
@@ -5,18 +5,17 @@
     <p:sldMasterId id="2147483648" r:id="rId1"/>
   </p:sldMasterIdLst>
   <p:notesMasterIdLst>
-    <p:notesMasterId r:id="rId11"/>
+    <p:notesMasterId r:id="rId10"/>
   </p:notesMasterIdLst>
   <p:sldIdLst>
     <p:sldId id="261" r:id="rId2"/>
-    <p:sldId id="292" r:id="rId3"/>
+    <p:sldId id="307" r:id="rId3"/>
     <p:sldId id="297" r:id="rId4"/>
     <p:sldId id="300" r:id="rId5"/>
     <p:sldId id="299" r:id="rId6"/>
     <p:sldId id="301" r:id="rId7"/>
-    <p:sldId id="302" r:id="rId8"/>
+    <p:sldId id="308" r:id="rId8"/>
     <p:sldId id="305" r:id="rId9"/>
-    <p:sldId id="306" r:id="rId10"/>
   </p:sldIdLst>
   <p:sldSz cx="12192000" cy="6858000"/>
   <p:notesSz cx="6858000" cy="9144000"/>
@@ -205,7 +204,7 @@
           <a:p>
             <a:fld id="{3DBE2839-6E82-524A-AF14-6F8B9A2A22FC}" type="datetimeFigureOut">
               <a:rPr kumimoji="1" lang="ko-KR" altLang="en-US" smtClean="0"/>
-              <a:t>2026. 3. 17.</a:t>
+              <a:t>2026. 3. 20.</a:t>
             </a:fld>
             <a:endParaRPr kumimoji="1" lang="ko-KR" altLang="en-US"/>
           </a:p>
@@ -480,7 +479,7 @@
         <p:cNvPr id="1" name="">
           <a:extLst>
             <a:ext uri="{FF2B5EF4-FFF2-40B4-BE49-F238E27FC236}">
-              <a16:creationId xmlns:a16="http://schemas.microsoft.com/office/drawing/2014/main" id="{46476783-4BBF-EF99-A767-0326BDC51270}"/>
+              <a16:creationId xmlns:a16="http://schemas.microsoft.com/office/drawing/2014/main" id="{0AFA9687-BC11-3822-86B6-11E6A6FE046E}"/>
             </a:ext>
           </a:extLst>
         </p:cNvPr>
@@ -500,7 +499,7 @@
           <p:cNvPr id="2" name="슬라이드 이미지 개체 틀 1">
             <a:extLst>
               <a:ext uri="{FF2B5EF4-FFF2-40B4-BE49-F238E27FC236}">
-                <a16:creationId xmlns:a16="http://schemas.microsoft.com/office/drawing/2014/main" id="{A5263F20-9F7F-EB19-3396-1989F7A6DE47}"/>
+                <a16:creationId xmlns:a16="http://schemas.microsoft.com/office/drawing/2014/main" id="{D21467CF-8562-E896-8DF6-26F6E56021F5}"/>
               </a:ext>
             </a:extLst>
           </p:cNvPr>
@@ -518,7 +517,7 @@
           <p:cNvPr id="3" name="슬라이드 노트 개체 틀 2">
             <a:extLst>
               <a:ext uri="{FF2B5EF4-FFF2-40B4-BE49-F238E27FC236}">
-                <a16:creationId xmlns:a16="http://schemas.microsoft.com/office/drawing/2014/main" id="{11F39478-378E-79F6-C290-75D415D6931D}"/>
+                <a16:creationId xmlns:a16="http://schemas.microsoft.com/office/drawing/2014/main" id="{46714EB4-7ABC-0D38-BB8F-F06D503E4D26}"/>
               </a:ext>
             </a:extLst>
           </p:cNvPr>
@@ -543,7 +542,7 @@
           <p:cNvPr id="4" name="슬라이드 번호 개체 틀 3">
             <a:extLst>
               <a:ext uri="{FF2B5EF4-FFF2-40B4-BE49-F238E27FC236}">
-                <a16:creationId xmlns:a16="http://schemas.microsoft.com/office/drawing/2014/main" id="{82B3B600-1AD3-7F7A-1A97-8F30EDF73FD3}"/>
+                <a16:creationId xmlns:a16="http://schemas.microsoft.com/office/drawing/2014/main" id="{7ACBBE50-CAA4-E991-CF47-6D1E9960A589}"/>
               </a:ext>
             </a:extLst>
           </p:cNvPr>
@@ -570,7 +569,7 @@
     </p:spTree>
     <p:extLst>
       <p:ext uri="{BB962C8B-B14F-4D97-AF65-F5344CB8AC3E}">
-        <p14:creationId xmlns:p14="http://schemas.microsoft.com/office/powerpoint/2010/main" val="2197117536"/>
+        <p14:creationId xmlns:p14="http://schemas.microsoft.com/office/powerpoint/2010/main" val="412618477"/>
       </p:ext>
     </p:extLst>
   </p:cSld>
@@ -1020,7 +1019,7 @@
         <p:cNvPr id="1" name="">
           <a:extLst>
             <a:ext uri="{FF2B5EF4-FFF2-40B4-BE49-F238E27FC236}">
-              <a16:creationId xmlns:a16="http://schemas.microsoft.com/office/drawing/2014/main" id="{CEE7D58D-4BF8-9170-73CD-AFE27C8E750A}"/>
+              <a16:creationId xmlns:a16="http://schemas.microsoft.com/office/drawing/2014/main" id="{1BF9FB0C-55C6-5302-AC10-3FC7EB59803C}"/>
             </a:ext>
           </a:extLst>
         </p:cNvPr>
@@ -1040,7 +1039,7 @@
           <p:cNvPr id="2" name="슬라이드 이미지 개체 틀 1">
             <a:extLst>
               <a:ext uri="{FF2B5EF4-FFF2-40B4-BE49-F238E27FC236}">
-                <a16:creationId xmlns:a16="http://schemas.microsoft.com/office/drawing/2014/main" id="{F98C2810-2E3B-B513-7012-134625FDDBC4}"/>
+                <a16:creationId xmlns:a16="http://schemas.microsoft.com/office/drawing/2014/main" id="{7F3DBD4C-D0A1-9B32-1BC9-ECA456C26D09}"/>
               </a:ext>
             </a:extLst>
           </p:cNvPr>
@@ -1058,7 +1057,7 @@
           <p:cNvPr id="3" name="슬라이드 노트 개체 틀 2">
             <a:extLst>
               <a:ext uri="{FF2B5EF4-FFF2-40B4-BE49-F238E27FC236}">
-                <a16:creationId xmlns:a16="http://schemas.microsoft.com/office/drawing/2014/main" id="{E923AD0A-135C-7358-6EB7-21A0A569BEEE}"/>
+                <a16:creationId xmlns:a16="http://schemas.microsoft.com/office/drawing/2014/main" id="{62B50CB2-1C27-03EA-A841-DA02AC0F1C56}"/>
               </a:ext>
             </a:extLst>
           </p:cNvPr>
@@ -1083,7 +1082,7 @@
           <p:cNvPr id="4" name="슬라이드 번호 개체 틀 3">
             <a:extLst>
               <a:ext uri="{FF2B5EF4-FFF2-40B4-BE49-F238E27FC236}">
-                <a16:creationId xmlns:a16="http://schemas.microsoft.com/office/drawing/2014/main" id="{CF20D925-46E6-F7A3-BD7D-1B0FA7271700}"/>
+                <a16:creationId xmlns:a16="http://schemas.microsoft.com/office/drawing/2014/main" id="{90AA5435-2B81-4483-A187-BDA0BB959ED2}"/>
               </a:ext>
             </a:extLst>
           </p:cNvPr>
@@ -1110,7 +1109,7 @@
     </p:spTree>
     <p:extLst>
       <p:ext uri="{BB962C8B-B14F-4D97-AF65-F5344CB8AC3E}">
-        <p14:creationId xmlns:p14="http://schemas.microsoft.com/office/powerpoint/2010/main" val="1063705026"/>
+        <p14:creationId xmlns:p14="http://schemas.microsoft.com/office/powerpoint/2010/main" val="3038802532"/>
       </p:ext>
     </p:extLst>
   </p:cSld>
@@ -1219,114 +1218,6 @@
     <p:extLst>
       <p:ext uri="{BB962C8B-B14F-4D97-AF65-F5344CB8AC3E}">
         <p14:creationId xmlns:p14="http://schemas.microsoft.com/office/powerpoint/2010/main" val="3873783058"/>
-      </p:ext>
-    </p:extLst>
-  </p:cSld>
-  <p:clrMapOvr>
-    <a:masterClrMapping/>
-  </p:clrMapOvr>
-</p:notes>
-</file>
-
-<file path=ppt/notesSlides/notesSlide8.xml><?xml version="1.0" encoding="utf-8"?>
-<p:notes xmlns:a="http://schemas.openxmlformats.org/drawingml/2006/main" xmlns:r="http://schemas.openxmlformats.org/officeDocument/2006/relationships" xmlns:p="http://schemas.openxmlformats.org/presentationml/2006/main">
-  <p:cSld>
-    <p:spTree>
-      <p:nvGrpSpPr>
-        <p:cNvPr id="1" name="">
-          <a:extLst>
-            <a:ext uri="{FF2B5EF4-FFF2-40B4-BE49-F238E27FC236}">
-              <a16:creationId xmlns:a16="http://schemas.microsoft.com/office/drawing/2014/main" id="{3B77BE70-441E-56F7-4E49-F6624D4BF7C4}"/>
-            </a:ext>
-          </a:extLst>
-        </p:cNvPr>
-        <p:cNvGrpSpPr/>
-        <p:nvPr/>
-      </p:nvGrpSpPr>
-      <p:grpSpPr>
-        <a:xfrm>
-          <a:off x="0" y="0"/>
-          <a:ext cx="0" cy="0"/>
-          <a:chOff x="0" y="0"/>
-          <a:chExt cx="0" cy="0"/>
-        </a:xfrm>
-      </p:grpSpPr>
-      <p:sp>
-        <p:nvSpPr>
-          <p:cNvPr id="2" name="슬라이드 이미지 개체 틀 1">
-            <a:extLst>
-              <a:ext uri="{FF2B5EF4-FFF2-40B4-BE49-F238E27FC236}">
-                <a16:creationId xmlns:a16="http://schemas.microsoft.com/office/drawing/2014/main" id="{FAB3E6D3-8ACB-59F8-DEB4-B0AA819F02DB}"/>
-              </a:ext>
-            </a:extLst>
-          </p:cNvPr>
-          <p:cNvSpPr>
-            <a:spLocks noGrp="1" noRot="1" noChangeAspect="1"/>
-          </p:cNvSpPr>
-          <p:nvPr>
-            <p:ph type="sldImg"/>
-          </p:nvPr>
-        </p:nvSpPr>
-        <p:spPr/>
-      </p:sp>
-      <p:sp>
-        <p:nvSpPr>
-          <p:cNvPr id="3" name="슬라이드 노트 개체 틀 2">
-            <a:extLst>
-              <a:ext uri="{FF2B5EF4-FFF2-40B4-BE49-F238E27FC236}">
-                <a16:creationId xmlns:a16="http://schemas.microsoft.com/office/drawing/2014/main" id="{46CF80EC-580E-5434-AF4C-B8FCA52C8758}"/>
-              </a:ext>
-            </a:extLst>
-          </p:cNvPr>
-          <p:cNvSpPr>
-            <a:spLocks noGrp="1"/>
-          </p:cNvSpPr>
-          <p:nvPr>
-            <p:ph type="body" idx="1"/>
-          </p:nvPr>
-        </p:nvSpPr>
-        <p:spPr/>
-        <p:txBody>
-          <a:bodyPr/>
-          <a:lstStyle/>
-          <a:p>
-            <a:endParaRPr kumimoji="1" lang="ko-KR" altLang="en-US" dirty="0"/>
-          </a:p>
-        </p:txBody>
-      </p:sp>
-      <p:sp>
-        <p:nvSpPr>
-          <p:cNvPr id="4" name="슬라이드 번호 개체 틀 3">
-            <a:extLst>
-              <a:ext uri="{FF2B5EF4-FFF2-40B4-BE49-F238E27FC236}">
-                <a16:creationId xmlns:a16="http://schemas.microsoft.com/office/drawing/2014/main" id="{1CF37F3C-1307-3AF6-FB02-4B9F66C314FE}"/>
-              </a:ext>
-            </a:extLst>
-          </p:cNvPr>
-          <p:cNvSpPr>
-            <a:spLocks noGrp="1"/>
-          </p:cNvSpPr>
-          <p:nvPr>
-            <p:ph type="sldNum" sz="quarter" idx="5"/>
-          </p:nvPr>
-        </p:nvSpPr>
-        <p:spPr/>
-        <p:txBody>
-          <a:bodyPr/>
-          <a:lstStyle/>
-          <a:p>
-            <a:fld id="{AC93543B-5911-8540-8F46-6D4FBCA13325}" type="slidenum">
-              <a:rPr kumimoji="1" lang="ko-KR" altLang="en-US" smtClean="0"/>
-              <a:t>9</a:t>
-            </a:fld>
-            <a:endParaRPr kumimoji="1" lang="ko-KR" altLang="en-US"/>
-          </a:p>
-        </p:txBody>
-      </p:sp>
-    </p:spTree>
-    <p:extLst>
-      <p:ext uri="{BB962C8B-B14F-4D97-AF65-F5344CB8AC3E}">
-        <p14:creationId xmlns:p14="http://schemas.microsoft.com/office/powerpoint/2010/main" val="438324931"/>
       </p:ext>
     </p:extLst>
   </p:cSld>
@@ -1483,7 +1374,7 @@
           <a:p>
             <a:fld id="{5A474E8E-AA64-0741-9F7E-7645C7D69728}" type="datetimeFigureOut">
               <a:rPr kumimoji="1" lang="ko-KR" altLang="en-US" smtClean="0"/>
-              <a:t>2026. 3. 17.</a:t>
+              <a:t>2026. 3. 20.</a:t>
             </a:fld>
             <a:endParaRPr kumimoji="1" lang="ko-KR" altLang="en-US"/>
           </a:p>
@@ -1681,7 +1572,7 @@
           <a:p>
             <a:fld id="{5A474E8E-AA64-0741-9F7E-7645C7D69728}" type="datetimeFigureOut">
               <a:rPr kumimoji="1" lang="ko-KR" altLang="en-US" smtClean="0"/>
-              <a:t>2026. 3. 17.</a:t>
+              <a:t>2026. 3. 20.</a:t>
             </a:fld>
             <a:endParaRPr kumimoji="1" lang="ko-KR" altLang="en-US"/>
           </a:p>
@@ -1889,7 +1780,7 @@
           <a:p>
             <a:fld id="{5A474E8E-AA64-0741-9F7E-7645C7D69728}" type="datetimeFigureOut">
               <a:rPr kumimoji="1" lang="ko-KR" altLang="en-US" smtClean="0"/>
-              <a:t>2026. 3. 17.</a:t>
+              <a:t>2026. 3. 20.</a:t>
             </a:fld>
             <a:endParaRPr kumimoji="1" lang="ko-KR" altLang="en-US"/>
           </a:p>
@@ -2087,7 +1978,7 @@
           <a:p>
             <a:fld id="{5A474E8E-AA64-0741-9F7E-7645C7D69728}" type="datetimeFigureOut">
               <a:rPr kumimoji="1" lang="ko-KR" altLang="en-US" smtClean="0"/>
-              <a:t>2026. 3. 17.</a:t>
+              <a:t>2026. 3. 20.</a:t>
             </a:fld>
             <a:endParaRPr kumimoji="1" lang="ko-KR" altLang="en-US"/>
           </a:p>
@@ -2362,7 +2253,7 @@
           <a:p>
             <a:fld id="{5A474E8E-AA64-0741-9F7E-7645C7D69728}" type="datetimeFigureOut">
               <a:rPr kumimoji="1" lang="ko-KR" altLang="en-US" smtClean="0"/>
-              <a:t>2026. 3. 17.</a:t>
+              <a:t>2026. 3. 20.</a:t>
             </a:fld>
             <a:endParaRPr kumimoji="1" lang="ko-KR" altLang="en-US"/>
           </a:p>
@@ -2627,7 +2518,7 @@
           <a:p>
             <a:fld id="{5A474E8E-AA64-0741-9F7E-7645C7D69728}" type="datetimeFigureOut">
               <a:rPr kumimoji="1" lang="ko-KR" altLang="en-US" smtClean="0"/>
-              <a:t>2026. 3. 17.</a:t>
+              <a:t>2026. 3. 20.</a:t>
             </a:fld>
             <a:endParaRPr kumimoji="1" lang="ko-KR" altLang="en-US"/>
           </a:p>
@@ -3039,7 +2930,7 @@
           <a:p>
             <a:fld id="{5A474E8E-AA64-0741-9F7E-7645C7D69728}" type="datetimeFigureOut">
               <a:rPr kumimoji="1" lang="ko-KR" altLang="en-US" smtClean="0"/>
-              <a:t>2026. 3. 17.</a:t>
+              <a:t>2026. 3. 20.</a:t>
             </a:fld>
             <a:endParaRPr kumimoji="1" lang="ko-KR" altLang="en-US"/>
           </a:p>
@@ -3180,7 +3071,7 @@
           <a:p>
             <a:fld id="{5A474E8E-AA64-0741-9F7E-7645C7D69728}" type="datetimeFigureOut">
               <a:rPr kumimoji="1" lang="ko-KR" altLang="en-US" smtClean="0"/>
-              <a:t>2026. 3. 17.</a:t>
+              <a:t>2026. 3. 20.</a:t>
             </a:fld>
             <a:endParaRPr kumimoji="1" lang="ko-KR" altLang="en-US"/>
           </a:p>
@@ -3293,7 +3184,7 @@
           <a:p>
             <a:fld id="{5A474E8E-AA64-0741-9F7E-7645C7D69728}" type="datetimeFigureOut">
               <a:rPr kumimoji="1" lang="ko-KR" altLang="en-US" smtClean="0"/>
-              <a:t>2026. 3. 17.</a:t>
+              <a:t>2026. 3. 20.</a:t>
             </a:fld>
             <a:endParaRPr kumimoji="1" lang="ko-KR" altLang="en-US"/>
           </a:p>
@@ -3604,7 +3495,7 @@
           <a:p>
             <a:fld id="{5A474E8E-AA64-0741-9F7E-7645C7D69728}" type="datetimeFigureOut">
               <a:rPr kumimoji="1" lang="ko-KR" altLang="en-US" smtClean="0"/>
-              <a:t>2026. 3. 17.</a:t>
+              <a:t>2026. 3. 20.</a:t>
             </a:fld>
             <a:endParaRPr kumimoji="1" lang="ko-KR" altLang="en-US"/>
           </a:p>
@@ -3892,7 +3783,7 @@
           <a:p>
             <a:fld id="{5A474E8E-AA64-0741-9F7E-7645C7D69728}" type="datetimeFigureOut">
               <a:rPr kumimoji="1" lang="ko-KR" altLang="en-US" smtClean="0"/>
-              <a:t>2026. 3. 17.</a:t>
+              <a:t>2026. 3. 20.</a:t>
             </a:fld>
             <a:endParaRPr kumimoji="1" lang="ko-KR" altLang="en-US"/>
           </a:p>
@@ -4133,7 +4024,7 @@
           <a:p>
             <a:fld id="{5A474E8E-AA64-0741-9F7E-7645C7D69728}" type="datetimeFigureOut">
               <a:rPr kumimoji="1" lang="ko-KR" altLang="en-US" smtClean="0"/>
-              <a:t>2026. 3. 17.</a:t>
+              <a:t>2026. 3. 20.</a:t>
             </a:fld>
             <a:endParaRPr kumimoji="1" lang="ko-KR" altLang="en-US"/>
           </a:p>
@@ -4940,7 +4831,7 @@
         <p:cNvPr id="1" name="">
           <a:extLst>
             <a:ext uri="{FF2B5EF4-FFF2-40B4-BE49-F238E27FC236}">
-              <a16:creationId xmlns:a16="http://schemas.microsoft.com/office/drawing/2014/main" id="{7C0135B0-875D-978A-5E9C-912A04AD68B9}"/>
+              <a16:creationId xmlns:a16="http://schemas.microsoft.com/office/drawing/2014/main" id="{F9DDF8E6-FA88-2E36-6414-E11ABE7F63B1}"/>
             </a:ext>
           </a:extLst>
         </p:cNvPr>
@@ -4960,7 +4851,7 @@
           <p:cNvPr id="5" name="그림 4">
             <a:extLst>
               <a:ext uri="{FF2B5EF4-FFF2-40B4-BE49-F238E27FC236}">
-                <a16:creationId xmlns:a16="http://schemas.microsoft.com/office/drawing/2014/main" id="{4F210D9B-DA39-BBD4-53D1-FE9B087825E3}"/>
+                <a16:creationId xmlns:a16="http://schemas.microsoft.com/office/drawing/2014/main" id="{4F3412A0-161D-F83D-960D-6CDB4F85A6A6}"/>
               </a:ext>
             </a:extLst>
           </p:cNvPr>
@@ -4990,7 +4881,7 @@
           <p:cNvPr id="10" name="모서리가 둥근 직사각형 9">
             <a:extLst>
               <a:ext uri="{FF2B5EF4-FFF2-40B4-BE49-F238E27FC236}">
-                <a16:creationId xmlns:a16="http://schemas.microsoft.com/office/drawing/2014/main" id="{26646F4D-2407-266D-D968-9F98B2F0B677}"/>
+                <a16:creationId xmlns:a16="http://schemas.microsoft.com/office/drawing/2014/main" id="{F38872F3-4F7E-6E9C-BA3D-0DCF7C16DFBB}"/>
               </a:ext>
             </a:extLst>
           </p:cNvPr>
@@ -5039,7 +4930,7 @@
           <p:cNvPr id="11" name="TextBox 10">
             <a:extLst>
               <a:ext uri="{FF2B5EF4-FFF2-40B4-BE49-F238E27FC236}">
-                <a16:creationId xmlns:a16="http://schemas.microsoft.com/office/drawing/2014/main" id="{91C60BBC-E33A-4DCD-237A-124A8F0897D7}"/>
+                <a16:creationId xmlns:a16="http://schemas.microsoft.com/office/drawing/2014/main" id="{D46A1D1F-F8BA-C348-1807-2F696FD733DF}"/>
               </a:ext>
             </a:extLst>
           </p:cNvPr>
@@ -5108,42 +4999,12 @@
           </a:p>
         </p:txBody>
       </p:sp>
-      <p:pic>
-        <p:nvPicPr>
-          <p:cNvPr id="2" name="그림 1">
-            <a:extLst>
-              <a:ext uri="{FF2B5EF4-FFF2-40B4-BE49-F238E27FC236}">
-                <a16:creationId xmlns:a16="http://schemas.microsoft.com/office/drawing/2014/main" id="{CC9E3A0F-66A9-2272-0C93-9F6BB0BB51CC}"/>
-              </a:ext>
-            </a:extLst>
-          </p:cNvPr>
-          <p:cNvPicPr>
-            <a:picLocks noChangeAspect="1"/>
-          </p:cNvPicPr>
-          <p:nvPr/>
-        </p:nvPicPr>
-        <p:blipFill>
-          <a:blip r:embed="rId4"/>
-          <a:stretch>
-            <a:fillRect/>
-          </a:stretch>
-        </p:blipFill>
-        <p:spPr>
-          <a:xfrm>
-            <a:off x="375874" y="1508494"/>
-            <a:ext cx="7991547" cy="4230155"/>
-          </a:xfrm>
-          <a:prstGeom prst="rect">
-            <a:avLst/>
-          </a:prstGeom>
-        </p:spPr>
-      </p:pic>
       <p:graphicFrame>
         <p:nvGraphicFramePr>
           <p:cNvPr id="4" name="표 3">
             <a:extLst>
               <a:ext uri="{FF2B5EF4-FFF2-40B4-BE49-F238E27FC236}">
-                <a16:creationId xmlns:a16="http://schemas.microsoft.com/office/drawing/2014/main" id="{F5EEFB28-3FC4-C4D8-44EE-91919C23722C}"/>
+                <a16:creationId xmlns:a16="http://schemas.microsoft.com/office/drawing/2014/main" id="{EBB9451F-D011-3E1A-13B8-32C970302C9B}"/>
               </a:ext>
             </a:extLst>
           </p:cNvPr>
@@ -5584,7 +5445,45 @@
                           <a:ea typeface="Pretendard Variable SemiBold" panose="02000003000000020004" pitchFamily="2" charset="-127"/>
                           <a:cs typeface="Pretendard Variable SemiBold" panose="02000003000000020004" pitchFamily="2" charset="-127"/>
                         </a:rPr>
-                        <a:t> 로그인</a:t>
+                        <a:t>네비게이션 바 </a:t>
+                      </a:r>
+                      <a:endParaRPr lang="en-US" altLang="ko-KR" sz="1000" b="1" i="0" kern="1200" dirty="0">
+                        <a:ln>
+                          <a:solidFill>
+                            <a:srgbClr val="4472C4">
+                              <a:alpha val="0"/>
+                            </a:srgbClr>
+                          </a:solidFill>
+                        </a:ln>
+                        <a:solidFill>
+                          <a:srgbClr val="202946"/>
+                        </a:solidFill>
+                        <a:latin typeface="Pretendard Variable SemiBold" panose="02000003000000020004" pitchFamily="2" charset="-127"/>
+                        <a:ea typeface="Pretendard Variable SemiBold" panose="02000003000000020004" pitchFamily="2" charset="-127"/>
+                        <a:cs typeface="Pretendard Variable SemiBold" panose="02000003000000020004" pitchFamily="2" charset="-127"/>
+                      </a:endParaRPr>
+                    </a:p>
+                    <a:p>
+                      <a:pPr algn="l" fontAlgn="ctr">
+                        <a:buNone/>
+                      </a:pPr>
+                      <a:r>
+                        <a:rPr lang="ko-KR" altLang="en-US" sz="1000" b="1" i="0" kern="1200" dirty="0">
+                          <a:ln>
+                            <a:solidFill>
+                              <a:srgbClr val="4472C4">
+                                <a:alpha val="0"/>
+                              </a:srgbClr>
+                            </a:solidFill>
+                          </a:ln>
+                          <a:solidFill>
+                            <a:srgbClr val="202946"/>
+                          </a:solidFill>
+                          <a:latin typeface="Pretendard Variable SemiBold" panose="02000003000000020004" pitchFamily="2" charset="-127"/>
+                          <a:ea typeface="Pretendard Variable SemiBold" panose="02000003000000020004" pitchFamily="2" charset="-127"/>
+                          <a:cs typeface="Pretendard Variable SemiBold" panose="02000003000000020004" pitchFamily="2" charset="-127"/>
+                        </a:rPr>
+                        <a:t> </a:t>
                       </a:r>
                       <a:r>
                         <a:rPr lang="en-US" altLang="ko-KR" sz="1000" b="1" i="0" kern="1200" dirty="0">
@@ -5602,7 +5501,7 @@
                           <a:ea typeface="Pretendard Variable SemiBold" panose="02000003000000020004" pitchFamily="2" charset="-127"/>
                           <a:cs typeface="Pretendard Variable SemiBold" panose="02000003000000020004" pitchFamily="2" charset="-127"/>
                         </a:rPr>
-                        <a:t>,</a:t>
+                        <a:t>-</a:t>
                       </a:r>
                       <a:r>
                         <a:rPr lang="ko-KR" altLang="en-US" sz="1000" b="1" i="0" kern="1200" dirty="0">
@@ -5620,8 +5519,535 @@
                           <a:ea typeface="Pretendard Variable SemiBold" panose="02000003000000020004" pitchFamily="2" charset="-127"/>
                           <a:cs typeface="Pretendard Variable SemiBold" panose="02000003000000020004" pitchFamily="2" charset="-127"/>
                         </a:rPr>
-                        <a:t> 회원가입 버튼 구분</a:t>
-                      </a:r>
+                        <a:t> 서비스 소개</a:t>
+                      </a:r>
+                      <a:r>
+                        <a:rPr lang="en-US" altLang="ko-KR" sz="1000" b="1" i="0" kern="1200" dirty="0">
+                          <a:ln>
+                            <a:solidFill>
+                              <a:srgbClr val="4472C4">
+                                <a:alpha val="0"/>
+                              </a:srgbClr>
+                            </a:solidFill>
+                          </a:ln>
+                          <a:solidFill>
+                            <a:srgbClr val="202946"/>
+                          </a:solidFill>
+                          <a:latin typeface="Pretendard Variable SemiBold" panose="02000003000000020004" pitchFamily="2" charset="-127"/>
+                          <a:ea typeface="Pretendard Variable SemiBold" panose="02000003000000020004" pitchFamily="2" charset="-127"/>
+                          <a:cs typeface="Pretendard Variable SemiBold" panose="02000003000000020004" pitchFamily="2" charset="-127"/>
+                        </a:rPr>
+                        <a:t>:</a:t>
+                      </a:r>
+                      <a:r>
+                        <a:rPr lang="ko-KR" altLang="en-US" sz="1000" b="1" i="0" kern="1200" dirty="0">
+                          <a:ln>
+                            <a:solidFill>
+                              <a:srgbClr val="4472C4">
+                                <a:alpha val="0"/>
+                              </a:srgbClr>
+                            </a:solidFill>
+                          </a:ln>
+                          <a:solidFill>
+                            <a:srgbClr val="202946"/>
+                          </a:solidFill>
+                          <a:latin typeface="Pretendard Variable SemiBold" panose="02000003000000020004" pitchFamily="2" charset="-127"/>
+                          <a:ea typeface="Pretendard Variable SemiBold" panose="02000003000000020004" pitchFamily="2" charset="-127"/>
+                          <a:cs typeface="Pretendard Variable SemiBold" panose="02000003000000020004" pitchFamily="2" charset="-127"/>
+                        </a:rPr>
+                        <a:t> 메인 화면 이동</a:t>
+                      </a:r>
+                      <a:endParaRPr lang="en-US" altLang="ko-KR" sz="1000" b="1" i="0" kern="1200" dirty="0">
+                        <a:ln>
+                          <a:solidFill>
+                            <a:srgbClr val="4472C4">
+                              <a:alpha val="0"/>
+                            </a:srgbClr>
+                          </a:solidFill>
+                        </a:ln>
+                        <a:solidFill>
+                          <a:srgbClr val="202946"/>
+                        </a:solidFill>
+                        <a:latin typeface="Pretendard Variable SemiBold" panose="02000003000000020004" pitchFamily="2" charset="-127"/>
+                        <a:ea typeface="Pretendard Variable SemiBold" panose="02000003000000020004" pitchFamily="2" charset="-127"/>
+                        <a:cs typeface="Pretendard Variable SemiBold" panose="02000003000000020004" pitchFamily="2" charset="-127"/>
+                      </a:endParaRPr>
+                    </a:p>
+                    <a:p>
+                      <a:pPr algn="l" fontAlgn="ctr">
+                        <a:buNone/>
+                      </a:pPr>
+                      <a:r>
+                        <a:rPr lang="ko-KR" altLang="en-US" sz="1000" b="1" i="0" kern="1200" dirty="0">
+                          <a:ln>
+                            <a:solidFill>
+                              <a:srgbClr val="4472C4">
+                                <a:alpha val="0"/>
+                              </a:srgbClr>
+                            </a:solidFill>
+                          </a:ln>
+                          <a:solidFill>
+                            <a:srgbClr val="202946"/>
+                          </a:solidFill>
+                          <a:latin typeface="Pretendard Variable SemiBold" panose="02000003000000020004" pitchFamily="2" charset="-127"/>
+                          <a:ea typeface="Pretendard Variable SemiBold" panose="02000003000000020004" pitchFamily="2" charset="-127"/>
+                          <a:cs typeface="Pretendard Variable SemiBold" panose="02000003000000020004" pitchFamily="2" charset="-127"/>
+                        </a:rPr>
+                        <a:t> </a:t>
+                      </a:r>
+                      <a:r>
+                        <a:rPr lang="en-US" altLang="ko-KR" sz="1000" b="1" i="0" kern="1200" dirty="0">
+                          <a:ln>
+                            <a:solidFill>
+                              <a:srgbClr val="4472C4">
+                                <a:alpha val="0"/>
+                              </a:srgbClr>
+                            </a:solidFill>
+                          </a:ln>
+                          <a:solidFill>
+                            <a:srgbClr val="202946"/>
+                          </a:solidFill>
+                          <a:latin typeface="Pretendard Variable SemiBold" panose="02000003000000020004" pitchFamily="2" charset="-127"/>
+                          <a:ea typeface="Pretendard Variable SemiBold" panose="02000003000000020004" pitchFamily="2" charset="-127"/>
+                          <a:cs typeface="Pretendard Variable SemiBold" panose="02000003000000020004" pitchFamily="2" charset="-127"/>
+                        </a:rPr>
+                        <a:t>-</a:t>
+                      </a:r>
+                      <a:r>
+                        <a:rPr lang="ko-KR" altLang="en-US" sz="1000" b="1" i="0" kern="1200" dirty="0">
+                          <a:ln>
+                            <a:solidFill>
+                              <a:srgbClr val="4472C4">
+                                <a:alpha val="0"/>
+                              </a:srgbClr>
+                            </a:solidFill>
+                          </a:ln>
+                          <a:solidFill>
+                            <a:srgbClr val="202946"/>
+                          </a:solidFill>
+                          <a:latin typeface="Pretendard Variable SemiBold" panose="02000003000000020004" pitchFamily="2" charset="-127"/>
+                          <a:ea typeface="Pretendard Variable SemiBold" panose="02000003000000020004" pitchFamily="2" charset="-127"/>
+                          <a:cs typeface="Pretendard Variable SemiBold" panose="02000003000000020004" pitchFamily="2" charset="-127"/>
+                        </a:rPr>
+                        <a:t> 예측하기</a:t>
+                      </a:r>
+                      <a:r>
+                        <a:rPr lang="en-US" altLang="ko-KR" sz="1000" b="1" i="0" kern="1200" dirty="0">
+                          <a:ln>
+                            <a:solidFill>
+                              <a:srgbClr val="4472C4">
+                                <a:alpha val="0"/>
+                              </a:srgbClr>
+                            </a:solidFill>
+                          </a:ln>
+                          <a:solidFill>
+                            <a:srgbClr val="202946"/>
+                          </a:solidFill>
+                          <a:latin typeface="Pretendard Variable SemiBold" panose="02000003000000020004" pitchFamily="2" charset="-127"/>
+                          <a:ea typeface="Pretendard Variable SemiBold" panose="02000003000000020004" pitchFamily="2" charset="-127"/>
+                          <a:cs typeface="Pretendard Variable SemiBold" panose="02000003000000020004" pitchFamily="2" charset="-127"/>
+                        </a:rPr>
+                        <a:t>:</a:t>
+                      </a:r>
+                      <a:r>
+                        <a:rPr lang="ko-KR" altLang="en-US" sz="1000" b="1" i="0" kern="1200" dirty="0">
+                          <a:ln>
+                            <a:solidFill>
+                              <a:srgbClr val="4472C4">
+                                <a:alpha val="0"/>
+                              </a:srgbClr>
+                            </a:solidFill>
+                          </a:ln>
+                          <a:solidFill>
+                            <a:srgbClr val="202946"/>
+                          </a:solidFill>
+                          <a:latin typeface="Pretendard Variable SemiBold" panose="02000003000000020004" pitchFamily="2" charset="-127"/>
+                          <a:ea typeface="Pretendard Variable SemiBold" panose="02000003000000020004" pitchFamily="2" charset="-127"/>
+                          <a:cs typeface="Pretendard Variable SemiBold" panose="02000003000000020004" pitchFamily="2" charset="-127"/>
+                        </a:rPr>
+                        <a:t> 서비스 정보 입력하는 곳으로 이동</a:t>
+                      </a:r>
+                      <a:endParaRPr lang="en-US" altLang="ko-KR" sz="1000" b="1" i="0" kern="1200" dirty="0">
+                        <a:ln>
+                          <a:solidFill>
+                            <a:srgbClr val="4472C4">
+                              <a:alpha val="0"/>
+                            </a:srgbClr>
+                          </a:solidFill>
+                        </a:ln>
+                        <a:solidFill>
+                          <a:srgbClr val="202946"/>
+                        </a:solidFill>
+                        <a:latin typeface="Pretendard Variable SemiBold" panose="02000003000000020004" pitchFamily="2" charset="-127"/>
+                        <a:ea typeface="Pretendard Variable SemiBold" panose="02000003000000020004" pitchFamily="2" charset="-127"/>
+                        <a:cs typeface="Pretendard Variable SemiBold" panose="02000003000000020004" pitchFamily="2" charset="-127"/>
+                      </a:endParaRPr>
+                    </a:p>
+                    <a:p>
+                      <a:pPr algn="l" fontAlgn="ctr">
+                        <a:buNone/>
+                      </a:pPr>
+                      <a:r>
+                        <a:rPr lang="ko-KR" altLang="en-US" sz="1000" b="1" i="0" kern="1200" dirty="0">
+                          <a:ln>
+                            <a:solidFill>
+                              <a:srgbClr val="4472C4">
+                                <a:alpha val="0"/>
+                              </a:srgbClr>
+                            </a:solidFill>
+                          </a:ln>
+                          <a:solidFill>
+                            <a:srgbClr val="202946"/>
+                          </a:solidFill>
+                          <a:latin typeface="Pretendard Variable SemiBold" panose="02000003000000020004" pitchFamily="2" charset="-127"/>
+                          <a:ea typeface="Pretendard Variable SemiBold" panose="02000003000000020004" pitchFamily="2" charset="-127"/>
+                          <a:cs typeface="Pretendard Variable SemiBold" panose="02000003000000020004" pitchFamily="2" charset="-127"/>
+                        </a:rPr>
+                        <a:t> </a:t>
+                      </a:r>
+                      <a:r>
+                        <a:rPr lang="en-US" altLang="ko-KR" sz="1000" b="1" i="0" kern="1200" dirty="0">
+                          <a:ln>
+                            <a:solidFill>
+                              <a:srgbClr val="4472C4">
+                                <a:alpha val="0"/>
+                              </a:srgbClr>
+                            </a:solidFill>
+                          </a:ln>
+                          <a:solidFill>
+                            <a:srgbClr val="202946"/>
+                          </a:solidFill>
+                          <a:latin typeface="Pretendard Variable SemiBold" panose="02000003000000020004" pitchFamily="2" charset="-127"/>
+                          <a:ea typeface="Pretendard Variable SemiBold" panose="02000003000000020004" pitchFamily="2" charset="-127"/>
+                          <a:cs typeface="Pretendard Variable SemiBold" panose="02000003000000020004" pitchFamily="2" charset="-127"/>
+                        </a:rPr>
+                        <a:t>-</a:t>
+                      </a:r>
+                      <a:r>
+                        <a:rPr lang="ko-KR" altLang="en-US" sz="1000" b="1" i="0" kern="1200" dirty="0">
+                          <a:ln>
+                            <a:solidFill>
+                              <a:srgbClr val="4472C4">
+                                <a:alpha val="0"/>
+                              </a:srgbClr>
+                            </a:solidFill>
+                          </a:ln>
+                          <a:solidFill>
+                            <a:srgbClr val="202946"/>
+                          </a:solidFill>
+                          <a:latin typeface="Pretendard Variable SemiBold" panose="02000003000000020004" pitchFamily="2" charset="-127"/>
+                          <a:ea typeface="Pretendard Variable SemiBold" panose="02000003000000020004" pitchFamily="2" charset="-127"/>
+                          <a:cs typeface="Pretendard Variable SemiBold" panose="02000003000000020004" pitchFamily="2" charset="-127"/>
+                        </a:rPr>
+                        <a:t> 결과 이력</a:t>
+                      </a:r>
+                      <a:r>
+                        <a:rPr lang="en-US" altLang="ko-KR" sz="1000" b="1" i="0" kern="1200" dirty="0">
+                          <a:ln>
+                            <a:solidFill>
+                              <a:srgbClr val="4472C4">
+                                <a:alpha val="0"/>
+                              </a:srgbClr>
+                            </a:solidFill>
+                          </a:ln>
+                          <a:solidFill>
+                            <a:srgbClr val="202946"/>
+                          </a:solidFill>
+                          <a:latin typeface="Pretendard Variable SemiBold" panose="02000003000000020004" pitchFamily="2" charset="-127"/>
+                          <a:ea typeface="Pretendard Variable SemiBold" panose="02000003000000020004" pitchFamily="2" charset="-127"/>
+                          <a:cs typeface="Pretendard Variable SemiBold" panose="02000003000000020004" pitchFamily="2" charset="-127"/>
+                        </a:rPr>
+                        <a:t>:</a:t>
+                      </a:r>
+                      <a:r>
+                        <a:rPr lang="ko-KR" altLang="en-US" sz="1000" b="1" i="0" kern="1200" dirty="0">
+                          <a:ln>
+                            <a:solidFill>
+                              <a:srgbClr val="4472C4">
+                                <a:alpha val="0"/>
+                              </a:srgbClr>
+                            </a:solidFill>
+                          </a:ln>
+                          <a:solidFill>
+                            <a:srgbClr val="202946"/>
+                          </a:solidFill>
+                          <a:latin typeface="Pretendard Variable SemiBold" panose="02000003000000020004" pitchFamily="2" charset="-127"/>
+                          <a:ea typeface="Pretendard Variable SemiBold" panose="02000003000000020004" pitchFamily="2" charset="-127"/>
+                          <a:cs typeface="Pretendard Variable SemiBold" panose="02000003000000020004" pitchFamily="2" charset="-127"/>
+                        </a:rPr>
+                        <a:t> </a:t>
+                      </a:r>
+                      <a:endParaRPr lang="en-US" altLang="ko-KR" sz="1000" b="1" i="0" kern="1200" dirty="0">
+                        <a:ln>
+                          <a:solidFill>
+                            <a:srgbClr val="4472C4">
+                              <a:alpha val="0"/>
+                            </a:srgbClr>
+                          </a:solidFill>
+                        </a:ln>
+                        <a:solidFill>
+                          <a:srgbClr val="202946"/>
+                        </a:solidFill>
+                        <a:latin typeface="Pretendard Variable SemiBold" panose="02000003000000020004" pitchFamily="2" charset="-127"/>
+                        <a:ea typeface="Pretendard Variable SemiBold" panose="02000003000000020004" pitchFamily="2" charset="-127"/>
+                        <a:cs typeface="Pretendard Variable SemiBold" panose="02000003000000020004" pitchFamily="2" charset="-127"/>
+                      </a:endParaRPr>
+                    </a:p>
+                    <a:p>
+                      <a:pPr algn="l" fontAlgn="ctr">
+                        <a:buNone/>
+                      </a:pPr>
+                      <a:r>
+                        <a:rPr lang="ko-KR" altLang="en-US" sz="1000" b="1" i="0" kern="1200" dirty="0">
+                          <a:ln>
+                            <a:solidFill>
+                              <a:srgbClr val="4472C4">
+                                <a:alpha val="0"/>
+                              </a:srgbClr>
+                            </a:solidFill>
+                          </a:ln>
+                          <a:solidFill>
+                            <a:srgbClr val="202946"/>
+                          </a:solidFill>
+                          <a:latin typeface="Pretendard Variable SemiBold" panose="02000003000000020004" pitchFamily="2" charset="-127"/>
+                          <a:ea typeface="Pretendard Variable SemiBold" panose="02000003000000020004" pitchFamily="2" charset="-127"/>
+                          <a:cs typeface="Pretendard Variable SemiBold" panose="02000003000000020004" pitchFamily="2" charset="-127"/>
+                        </a:rPr>
+                        <a:t> </a:t>
+                      </a:r>
+                      <a:r>
+                        <a:rPr lang="ko-KR" altLang="en-US" sz="1000" b="1" i="0" kern="1200" dirty="0" err="1">
+                          <a:ln>
+                            <a:solidFill>
+                              <a:srgbClr val="4472C4">
+                                <a:alpha val="0"/>
+                              </a:srgbClr>
+                            </a:solidFill>
+                          </a:ln>
+                          <a:solidFill>
+                            <a:srgbClr val="202946"/>
+                          </a:solidFill>
+                          <a:latin typeface="Pretendard Variable SemiBold" panose="02000003000000020004" pitchFamily="2" charset="-127"/>
+                          <a:ea typeface="Pretendard Variable SemiBold" panose="02000003000000020004" pitchFamily="2" charset="-127"/>
+                          <a:cs typeface="Pretendard Variable SemiBold" panose="02000003000000020004" pitchFamily="2" charset="-127"/>
+                        </a:rPr>
+                        <a:t>ㄴ</a:t>
+                      </a:r>
+                      <a:r>
+                        <a:rPr lang="en-US" altLang="ko-KR" sz="1000" b="1" i="0" kern="1200" dirty="0">
+                          <a:ln>
+                            <a:solidFill>
+                              <a:srgbClr val="4472C4">
+                                <a:alpha val="0"/>
+                              </a:srgbClr>
+                            </a:solidFill>
+                          </a:ln>
+                          <a:solidFill>
+                            <a:srgbClr val="202946"/>
+                          </a:solidFill>
+                          <a:latin typeface="Pretendard Variable SemiBold" panose="02000003000000020004" pitchFamily="2" charset="-127"/>
+                          <a:ea typeface="Pretendard Variable SemiBold" panose="02000003000000020004" pitchFamily="2" charset="-127"/>
+                          <a:cs typeface="Pretendard Variable SemiBold" panose="02000003000000020004" pitchFamily="2" charset="-127"/>
+                        </a:rPr>
+                        <a:t>(</a:t>
+                      </a:r>
+                      <a:r>
+                        <a:rPr lang="ko-KR" altLang="en-US" sz="1000" b="1" i="0" kern="1200" dirty="0">
+                          <a:ln>
+                            <a:solidFill>
+                              <a:srgbClr val="4472C4">
+                                <a:alpha val="0"/>
+                              </a:srgbClr>
+                            </a:solidFill>
+                          </a:ln>
+                          <a:solidFill>
+                            <a:srgbClr val="202946"/>
+                          </a:solidFill>
+                          <a:latin typeface="Pretendard Variable SemiBold" panose="02000003000000020004" pitchFamily="2" charset="-127"/>
+                          <a:ea typeface="Pretendard Variable SemiBold" panose="02000003000000020004" pitchFamily="2" charset="-127"/>
+                          <a:cs typeface="Pretendard Variable SemiBold" panose="02000003000000020004" pitchFamily="2" charset="-127"/>
+                        </a:rPr>
+                        <a:t>로그인</a:t>
+                      </a:r>
+                      <a:r>
+                        <a:rPr lang="en-US" altLang="ko-KR" sz="1000" b="1" i="0" kern="1200" dirty="0">
+                          <a:ln>
+                            <a:solidFill>
+                              <a:srgbClr val="4472C4">
+                                <a:alpha val="0"/>
+                              </a:srgbClr>
+                            </a:solidFill>
+                          </a:ln>
+                          <a:solidFill>
+                            <a:srgbClr val="202946"/>
+                          </a:solidFill>
+                          <a:latin typeface="Pretendard Variable SemiBold" panose="02000003000000020004" pitchFamily="2" charset="-127"/>
+                          <a:ea typeface="Pretendard Variable SemiBold" panose="02000003000000020004" pitchFamily="2" charset="-127"/>
+                          <a:cs typeface="Pretendard Variable SemiBold" panose="02000003000000020004" pitchFamily="2" charset="-127"/>
+                        </a:rPr>
+                        <a:t>)</a:t>
+                      </a:r>
+                      <a:r>
+                        <a:rPr lang="ko-KR" altLang="en-US" sz="1000" b="1" i="0" kern="1200" dirty="0">
+                          <a:ln>
+                            <a:solidFill>
+                              <a:srgbClr val="4472C4">
+                                <a:alpha val="0"/>
+                              </a:srgbClr>
+                            </a:solidFill>
+                          </a:ln>
+                          <a:solidFill>
+                            <a:srgbClr val="202946"/>
+                          </a:solidFill>
+                          <a:latin typeface="Pretendard Variable SemiBold" panose="02000003000000020004" pitchFamily="2" charset="-127"/>
+                          <a:ea typeface="Pretendard Variable SemiBold" panose="02000003000000020004" pitchFamily="2" charset="-127"/>
+                          <a:cs typeface="Pretendard Variable SemiBold" panose="02000003000000020004" pitchFamily="2" charset="-127"/>
+                        </a:rPr>
+                        <a:t> 기존 결과 제공</a:t>
+                      </a:r>
+                      <a:endParaRPr lang="en-US" altLang="ko-KR" sz="1000" b="1" i="0" kern="1200" dirty="0">
+                        <a:ln>
+                          <a:solidFill>
+                            <a:srgbClr val="4472C4">
+                              <a:alpha val="0"/>
+                            </a:srgbClr>
+                          </a:solidFill>
+                        </a:ln>
+                        <a:solidFill>
+                          <a:srgbClr val="202946"/>
+                        </a:solidFill>
+                        <a:latin typeface="Pretendard Variable SemiBold" panose="02000003000000020004" pitchFamily="2" charset="-127"/>
+                        <a:ea typeface="Pretendard Variable SemiBold" panose="02000003000000020004" pitchFamily="2" charset="-127"/>
+                        <a:cs typeface="Pretendard Variable SemiBold" panose="02000003000000020004" pitchFamily="2" charset="-127"/>
+                      </a:endParaRPr>
+                    </a:p>
+                    <a:p>
+                      <a:pPr algn="l" fontAlgn="ctr">
+                        <a:buNone/>
+                      </a:pPr>
+                      <a:r>
+                        <a:rPr lang="ko-KR" altLang="en-US" sz="1000" b="1" i="0" kern="1200" dirty="0">
+                          <a:ln>
+                            <a:solidFill>
+                              <a:srgbClr val="4472C4">
+                                <a:alpha val="0"/>
+                              </a:srgbClr>
+                            </a:solidFill>
+                          </a:ln>
+                          <a:solidFill>
+                            <a:srgbClr val="202946"/>
+                          </a:solidFill>
+                          <a:latin typeface="Pretendard Variable SemiBold" panose="02000003000000020004" pitchFamily="2" charset="-127"/>
+                          <a:ea typeface="Pretendard Variable SemiBold" panose="02000003000000020004" pitchFamily="2" charset="-127"/>
+                          <a:cs typeface="Pretendard Variable SemiBold" panose="02000003000000020004" pitchFamily="2" charset="-127"/>
+                        </a:rPr>
+                        <a:t> </a:t>
+                      </a:r>
+                      <a:r>
+                        <a:rPr lang="ko-KR" altLang="en-US" sz="1000" b="1" i="0" kern="1200" dirty="0" err="1">
+                          <a:ln>
+                            <a:solidFill>
+                              <a:srgbClr val="4472C4">
+                                <a:alpha val="0"/>
+                              </a:srgbClr>
+                            </a:solidFill>
+                          </a:ln>
+                          <a:solidFill>
+                            <a:srgbClr val="202946"/>
+                          </a:solidFill>
+                          <a:latin typeface="Pretendard Variable SemiBold" panose="02000003000000020004" pitchFamily="2" charset="-127"/>
+                          <a:ea typeface="Pretendard Variable SemiBold" panose="02000003000000020004" pitchFamily="2" charset="-127"/>
+                          <a:cs typeface="Pretendard Variable SemiBold" panose="02000003000000020004" pitchFamily="2" charset="-127"/>
+                        </a:rPr>
+                        <a:t>ㄴ</a:t>
+                      </a:r>
+                      <a:r>
+                        <a:rPr lang="en-US" altLang="ko-KR" sz="1000" b="1" i="0" kern="1200" dirty="0">
+                          <a:ln>
+                            <a:solidFill>
+                              <a:srgbClr val="4472C4">
+                                <a:alpha val="0"/>
+                              </a:srgbClr>
+                            </a:solidFill>
+                          </a:ln>
+                          <a:solidFill>
+                            <a:srgbClr val="202946"/>
+                          </a:solidFill>
+                          <a:latin typeface="Pretendard Variable SemiBold" panose="02000003000000020004" pitchFamily="2" charset="-127"/>
+                          <a:ea typeface="Pretendard Variable SemiBold" panose="02000003000000020004" pitchFamily="2" charset="-127"/>
+                          <a:cs typeface="Pretendard Variable SemiBold" panose="02000003000000020004" pitchFamily="2" charset="-127"/>
+                        </a:rPr>
+                        <a:t>(</a:t>
+                      </a:r>
+                      <a:r>
+                        <a:rPr lang="ko-KR" altLang="en-US" sz="1000" b="1" i="0" kern="1200" dirty="0">
+                          <a:ln>
+                            <a:solidFill>
+                              <a:srgbClr val="4472C4">
+                                <a:alpha val="0"/>
+                              </a:srgbClr>
+                            </a:solidFill>
+                          </a:ln>
+                          <a:solidFill>
+                            <a:srgbClr val="202946"/>
+                          </a:solidFill>
+                          <a:latin typeface="Pretendard Variable SemiBold" panose="02000003000000020004" pitchFamily="2" charset="-127"/>
+                          <a:ea typeface="Pretendard Variable SemiBold" panose="02000003000000020004" pitchFamily="2" charset="-127"/>
+                          <a:cs typeface="Pretendard Variable SemiBold" panose="02000003000000020004" pitchFamily="2" charset="-127"/>
+                        </a:rPr>
+                        <a:t>비로그인</a:t>
+                      </a:r>
+                      <a:r>
+                        <a:rPr lang="en-US" altLang="ko-KR" sz="1000" b="1" i="0" kern="1200" dirty="0">
+                          <a:ln>
+                            <a:solidFill>
+                              <a:srgbClr val="4472C4">
+                                <a:alpha val="0"/>
+                              </a:srgbClr>
+                            </a:solidFill>
+                          </a:ln>
+                          <a:solidFill>
+                            <a:srgbClr val="202946"/>
+                          </a:solidFill>
+                          <a:latin typeface="Pretendard Variable SemiBold" panose="02000003000000020004" pitchFamily="2" charset="-127"/>
+                          <a:ea typeface="Pretendard Variable SemiBold" panose="02000003000000020004" pitchFamily="2" charset="-127"/>
+                          <a:cs typeface="Pretendard Variable SemiBold" panose="02000003000000020004" pitchFamily="2" charset="-127"/>
+                        </a:rPr>
+                        <a:t>)</a:t>
+                      </a:r>
+                      <a:r>
+                        <a:rPr lang="ko-KR" altLang="en-US" sz="1000" b="1" i="0" kern="1200" dirty="0">
+                          <a:ln>
+                            <a:solidFill>
+                              <a:srgbClr val="4472C4">
+                                <a:alpha val="0"/>
+                              </a:srgbClr>
+                            </a:solidFill>
+                          </a:ln>
+                          <a:solidFill>
+                            <a:srgbClr val="202946"/>
+                          </a:solidFill>
+                          <a:latin typeface="Pretendard Variable SemiBold" panose="02000003000000020004" pitchFamily="2" charset="-127"/>
+                          <a:ea typeface="Pretendard Variable SemiBold" panose="02000003000000020004" pitchFamily="2" charset="-127"/>
+                          <a:cs typeface="Pretendard Variable SemiBold" panose="02000003000000020004" pitchFamily="2" charset="-127"/>
+                        </a:rPr>
+                        <a:t> 로그인을 해주세요 문구 노출</a:t>
+                      </a:r>
+                      <a:endParaRPr lang="en-US" altLang="ko-KR" sz="1000" b="1" i="0" kern="1200" dirty="0">
+                        <a:ln>
+                          <a:solidFill>
+                            <a:srgbClr val="4472C4">
+                              <a:alpha val="0"/>
+                            </a:srgbClr>
+                          </a:solidFill>
+                        </a:ln>
+                        <a:solidFill>
+                          <a:srgbClr val="202946"/>
+                        </a:solidFill>
+                        <a:latin typeface="Pretendard Variable SemiBold" panose="02000003000000020004" pitchFamily="2" charset="-127"/>
+                        <a:ea typeface="Pretendard Variable SemiBold" panose="02000003000000020004" pitchFamily="2" charset="-127"/>
+                        <a:cs typeface="Pretendard Variable SemiBold" panose="02000003000000020004" pitchFamily="2" charset="-127"/>
+                      </a:endParaRPr>
                     </a:p>
                   </a:txBody>
                   <a:tcPr marL="4265" marR="4265" marT="4265" marB="0" anchor="ctr">
@@ -5990,12 +6416,42 @@
           </a:graphicData>
         </a:graphic>
       </p:graphicFrame>
+      <p:pic>
+        <p:nvPicPr>
+          <p:cNvPr id="3" name="그림 2">
+            <a:extLst>
+              <a:ext uri="{FF2B5EF4-FFF2-40B4-BE49-F238E27FC236}">
+                <a16:creationId xmlns:a16="http://schemas.microsoft.com/office/drawing/2014/main" id="{3704E1FE-F509-70DF-E73F-C409A22DF230}"/>
+              </a:ext>
+            </a:extLst>
+          </p:cNvPr>
+          <p:cNvPicPr>
+            <a:picLocks noChangeAspect="1"/>
+          </p:cNvPicPr>
+          <p:nvPr/>
+        </p:nvPicPr>
+        <p:blipFill>
+          <a:blip r:embed="rId4"/>
+          <a:stretch>
+            <a:fillRect/>
+          </a:stretch>
+        </p:blipFill>
+        <p:spPr>
+          <a:xfrm>
+            <a:off x="375874" y="1504750"/>
+            <a:ext cx="7772400" cy="4230158"/>
+          </a:xfrm>
+          <a:prstGeom prst="rect">
+            <a:avLst/>
+          </a:prstGeom>
+        </p:spPr>
+      </p:pic>
       <p:sp>
         <p:nvSpPr>
           <p:cNvPr id="6" name="액자 5">
             <a:extLst>
               <a:ext uri="{FF2B5EF4-FFF2-40B4-BE49-F238E27FC236}">
-                <a16:creationId xmlns:a16="http://schemas.microsoft.com/office/drawing/2014/main" id="{C870D251-2D0A-E9F4-3A62-C8057C7EFACE}"/>
+                <a16:creationId xmlns:a16="http://schemas.microsoft.com/office/drawing/2014/main" id="{3041223D-0F93-5E9C-32B7-BB055139DE98}"/>
               </a:ext>
             </a:extLst>
           </p:cNvPr>
@@ -6004,7 +6460,7 @@
         </p:nvSpPr>
         <p:spPr>
           <a:xfrm>
-            <a:off x="421593" y="1508494"/>
+            <a:off x="451410" y="1548250"/>
             <a:ext cx="837052" cy="298791"/>
           </a:xfrm>
           <a:prstGeom prst="frame">
@@ -6051,7 +6507,7 @@
           <p:cNvPr id="20" name="타원 19">
             <a:extLst>
               <a:ext uri="{FF2B5EF4-FFF2-40B4-BE49-F238E27FC236}">
-                <a16:creationId xmlns:a16="http://schemas.microsoft.com/office/drawing/2014/main" id="{EA3929B4-56DD-66C0-065F-F33A3B86A307}"/>
+                <a16:creationId xmlns:a16="http://schemas.microsoft.com/office/drawing/2014/main" id="{EDE14153-47B5-9556-69F7-336DFD171547}"/>
               </a:ext>
             </a:extLst>
           </p:cNvPr>
@@ -6060,7 +6516,7 @@
         </p:nvSpPr>
         <p:spPr>
           <a:xfrm>
-            <a:off x="26601" y="1496552"/>
+            <a:off x="56418" y="1536308"/>
             <a:ext cx="322673" cy="322673"/>
           </a:xfrm>
           <a:prstGeom prst="ellipse">
@@ -6121,7 +6577,7 @@
           <p:cNvPr id="21" name="액자 20">
             <a:extLst>
               <a:ext uri="{FF2B5EF4-FFF2-40B4-BE49-F238E27FC236}">
-                <a16:creationId xmlns:a16="http://schemas.microsoft.com/office/drawing/2014/main" id="{1053483F-1CE7-3F59-211E-1A2E321F4154}"/>
+                <a16:creationId xmlns:a16="http://schemas.microsoft.com/office/drawing/2014/main" id="{62EB928E-7EA7-B790-CD05-29300A5A6EED}"/>
               </a:ext>
             </a:extLst>
           </p:cNvPr>
@@ -6130,8 +6586,8 @@
         </p:nvSpPr>
         <p:spPr>
           <a:xfrm>
-            <a:off x="7362201" y="1508493"/>
-            <a:ext cx="1005219" cy="322673"/>
+            <a:off x="5365372" y="1562488"/>
+            <a:ext cx="2675385" cy="296494"/>
           </a:xfrm>
           <a:prstGeom prst="frame">
             <a:avLst/>
@@ -6177,7 +6633,7 @@
           <p:cNvPr id="22" name="타원 21">
             <a:extLst>
               <a:ext uri="{FF2B5EF4-FFF2-40B4-BE49-F238E27FC236}">
-                <a16:creationId xmlns:a16="http://schemas.microsoft.com/office/drawing/2014/main" id="{B738915B-59ED-D561-1D34-C340484CF1EA}"/>
+                <a16:creationId xmlns:a16="http://schemas.microsoft.com/office/drawing/2014/main" id="{0BE4481C-0A3E-CDA7-2226-D7A40B040733}"/>
               </a:ext>
             </a:extLst>
           </p:cNvPr>
@@ -6186,7 +6642,7 @@
         </p:nvSpPr>
         <p:spPr>
           <a:xfrm>
-            <a:off x="6967210" y="1496551"/>
+            <a:off x="4958611" y="1548250"/>
             <a:ext cx="322673" cy="322673"/>
           </a:xfrm>
           <a:prstGeom prst="ellipse">
@@ -6247,7 +6703,7 @@
           <p:cNvPr id="23" name="액자 22">
             <a:extLst>
               <a:ext uri="{FF2B5EF4-FFF2-40B4-BE49-F238E27FC236}">
-                <a16:creationId xmlns:a16="http://schemas.microsoft.com/office/drawing/2014/main" id="{AD25D619-467D-D65C-6DF5-DFB57F80F796}"/>
+                <a16:creationId xmlns:a16="http://schemas.microsoft.com/office/drawing/2014/main" id="{FD515E65-7068-755C-FBEB-0E328DFD9BC2}"/>
               </a:ext>
             </a:extLst>
           </p:cNvPr>
@@ -6256,7 +6712,7 @@
         </p:nvSpPr>
         <p:spPr>
           <a:xfrm>
-            <a:off x="3509608" y="3723017"/>
+            <a:off x="3393795" y="3813824"/>
             <a:ext cx="837052" cy="298791"/>
           </a:xfrm>
           <a:prstGeom prst="frame">
@@ -6303,7 +6759,7 @@
           <p:cNvPr id="24" name="타원 23">
             <a:extLst>
               <a:ext uri="{FF2B5EF4-FFF2-40B4-BE49-F238E27FC236}">
-                <a16:creationId xmlns:a16="http://schemas.microsoft.com/office/drawing/2014/main" id="{249D123D-4F1C-C7E6-D116-7BF1550766D2}"/>
+                <a16:creationId xmlns:a16="http://schemas.microsoft.com/office/drawing/2014/main" id="{F06B6FD0-2AFA-F00D-F291-F003295BA852}"/>
               </a:ext>
             </a:extLst>
           </p:cNvPr>
@@ -6312,7 +6768,7 @@
         </p:nvSpPr>
         <p:spPr>
           <a:xfrm>
-            <a:off x="3091013" y="3723017"/>
+            <a:off x="2975200" y="3813824"/>
             <a:ext cx="322673" cy="322673"/>
           </a:xfrm>
           <a:prstGeom prst="ellipse">
@@ -6373,7 +6829,7 @@
           <p:cNvPr id="25" name="액자 24">
             <a:extLst>
               <a:ext uri="{FF2B5EF4-FFF2-40B4-BE49-F238E27FC236}">
-                <a16:creationId xmlns:a16="http://schemas.microsoft.com/office/drawing/2014/main" id="{855ABBBB-7207-B522-5502-0786EC5D04C4}"/>
+                <a16:creationId xmlns:a16="http://schemas.microsoft.com/office/drawing/2014/main" id="{FD3C5DFE-9ECE-F96D-C6A5-31CCC495D3D0}"/>
               </a:ext>
             </a:extLst>
           </p:cNvPr>
@@ -6382,7 +6838,7 @@
         </p:nvSpPr>
         <p:spPr>
           <a:xfrm>
-            <a:off x="4371647" y="3721465"/>
+            <a:off x="4255834" y="3812272"/>
             <a:ext cx="837052" cy="298791"/>
           </a:xfrm>
           <a:prstGeom prst="frame">
@@ -6429,7 +6885,7 @@
           <p:cNvPr id="26" name="타원 25">
             <a:extLst>
               <a:ext uri="{FF2B5EF4-FFF2-40B4-BE49-F238E27FC236}">
-                <a16:creationId xmlns:a16="http://schemas.microsoft.com/office/drawing/2014/main" id="{3D543ECA-E704-6DA0-B0AF-338028C6FAA6}"/>
+                <a16:creationId xmlns:a16="http://schemas.microsoft.com/office/drawing/2014/main" id="{634BC73A-0D87-A41D-DA50-62EDD1106A1A}"/>
               </a:ext>
             </a:extLst>
           </p:cNvPr>
@@ -6438,7 +6894,7 @@
         </p:nvSpPr>
         <p:spPr>
           <a:xfrm>
-            <a:off x="5281284" y="3732885"/>
+            <a:off x="5165471" y="3823692"/>
             <a:ext cx="322673" cy="322673"/>
           </a:xfrm>
           <a:prstGeom prst="ellipse">
@@ -6497,7 +6953,7 @@
     </p:spTree>
     <p:extLst>
       <p:ext uri="{BB962C8B-B14F-4D97-AF65-F5344CB8AC3E}">
-        <p14:creationId xmlns:p14="http://schemas.microsoft.com/office/powerpoint/2010/main" val="1498550502"/>
+        <p14:creationId xmlns:p14="http://schemas.microsoft.com/office/powerpoint/2010/main" val="561282837"/>
       </p:ext>
     </p:extLst>
   </p:cSld>
@@ -14591,7 +15047,7 @@
         <p:cNvPr id="1" name="">
           <a:extLst>
             <a:ext uri="{FF2B5EF4-FFF2-40B4-BE49-F238E27FC236}">
-              <a16:creationId xmlns:a16="http://schemas.microsoft.com/office/drawing/2014/main" id="{836B2F71-BD3F-D3FD-038D-7EBF668CFE55}"/>
+              <a16:creationId xmlns:a16="http://schemas.microsoft.com/office/drawing/2014/main" id="{D7B6D8A2-4D5A-BC51-9704-480DF61FF551}"/>
             </a:ext>
           </a:extLst>
         </p:cNvPr>
@@ -14611,7 +15067,7 @@
           <p:cNvPr id="5" name="그림 4">
             <a:extLst>
               <a:ext uri="{FF2B5EF4-FFF2-40B4-BE49-F238E27FC236}">
-                <a16:creationId xmlns:a16="http://schemas.microsoft.com/office/drawing/2014/main" id="{BA68B8C4-721C-5437-7DD4-46ACF5F95347}"/>
+                <a16:creationId xmlns:a16="http://schemas.microsoft.com/office/drawing/2014/main" id="{1ADFD69A-EDB0-4CB1-239F-2ACB949AEFA6}"/>
               </a:ext>
             </a:extLst>
           </p:cNvPr>
@@ -14641,7 +15097,7 @@
           <p:cNvPr id="10" name="모서리가 둥근 직사각형 9">
             <a:extLst>
               <a:ext uri="{FF2B5EF4-FFF2-40B4-BE49-F238E27FC236}">
-                <a16:creationId xmlns:a16="http://schemas.microsoft.com/office/drawing/2014/main" id="{3376DE65-FC9B-68A3-E946-F234122BB2D2}"/>
+                <a16:creationId xmlns:a16="http://schemas.microsoft.com/office/drawing/2014/main" id="{19842418-5E2C-1081-EAA7-352AB48677CA}"/>
               </a:ext>
             </a:extLst>
           </p:cNvPr>
@@ -14690,7 +15146,7 @@
           <p:cNvPr id="11" name="TextBox 10">
             <a:extLst>
               <a:ext uri="{FF2B5EF4-FFF2-40B4-BE49-F238E27FC236}">
-                <a16:creationId xmlns:a16="http://schemas.microsoft.com/office/drawing/2014/main" id="{67BFE0F5-7A9D-2A82-EC12-0CFA355DF349}"/>
+                <a16:creationId xmlns:a16="http://schemas.microsoft.com/office/drawing/2014/main" id="{E02F30EE-5795-7D75-3AD2-7DE7E8AD9C11}"/>
               </a:ext>
             </a:extLst>
           </p:cNvPr>
@@ -14764,7 +15220,7 @@
           <p:cNvPr id="4" name="표 3">
             <a:extLst>
               <a:ext uri="{FF2B5EF4-FFF2-40B4-BE49-F238E27FC236}">
-                <a16:creationId xmlns:a16="http://schemas.microsoft.com/office/drawing/2014/main" id="{B21B5888-5500-D363-A905-BAD116B04438}"/>
+                <a16:creationId xmlns:a16="http://schemas.microsoft.com/office/drawing/2014/main" id="{532F849B-839A-76FC-33ED-91F36855131E}"/>
               </a:ext>
             </a:extLst>
           </p:cNvPr>
@@ -15760,10 +16216,10 @@
       </p:graphicFrame>
       <p:pic>
         <p:nvPicPr>
-          <p:cNvPr id="3" name="그림 2">
+          <p:cNvPr id="2" name="그림 1">
             <a:extLst>
               <a:ext uri="{FF2B5EF4-FFF2-40B4-BE49-F238E27FC236}">
-                <a16:creationId xmlns:a16="http://schemas.microsoft.com/office/drawing/2014/main" id="{5596117A-68CB-F0CF-6201-206C8118805E}"/>
+                <a16:creationId xmlns:a16="http://schemas.microsoft.com/office/drawing/2014/main" id="{3BB02045-6043-46D3-DDE6-16D627361B55}"/>
               </a:ext>
             </a:extLst>
           </p:cNvPr>
@@ -15780,74 +16236,20 @@
         </p:blipFill>
         <p:spPr>
           <a:xfrm>
-            <a:off x="401356" y="1504749"/>
-            <a:ext cx="7772400" cy="4224973"/>
+            <a:off x="401356" y="1504750"/>
+            <a:ext cx="7772400" cy="3504572"/>
           </a:xfrm>
           <a:prstGeom prst="rect">
             <a:avLst/>
           </a:prstGeom>
         </p:spPr>
       </p:pic>
-      <p:sp>
-        <p:nvSpPr>
-          <p:cNvPr id="6" name="모서리가 둥근 직사각형 5">
-            <a:extLst>
-              <a:ext uri="{FF2B5EF4-FFF2-40B4-BE49-F238E27FC236}">
-                <a16:creationId xmlns:a16="http://schemas.microsoft.com/office/drawing/2014/main" id="{CCA44A7E-13C0-FEAB-7236-12258C5E35EB}"/>
-              </a:ext>
-            </a:extLst>
-          </p:cNvPr>
-          <p:cNvSpPr/>
-          <p:nvPr/>
-        </p:nvSpPr>
-        <p:spPr>
-          <a:xfrm>
-            <a:off x="512389" y="2802207"/>
-            <a:ext cx="7550333" cy="626793"/>
-          </a:xfrm>
-          <a:prstGeom prst="roundRect">
-            <a:avLst>
-              <a:gd name="adj" fmla="val 2736"/>
-            </a:avLst>
-          </a:prstGeom>
-          <a:solidFill>
-            <a:srgbClr val="FFFCF9"/>
-          </a:solidFill>
-          <a:ln>
-            <a:noFill/>
-          </a:ln>
-        </p:spPr>
-        <p:style>
-          <a:lnRef idx="2">
-            <a:schemeClr val="accent1">
-              <a:shade val="15000"/>
-            </a:schemeClr>
-          </a:lnRef>
-          <a:fillRef idx="1">
-            <a:schemeClr val="accent1"/>
-          </a:fillRef>
-          <a:effectRef idx="0">
-            <a:schemeClr val="accent1"/>
-          </a:effectRef>
-          <a:fontRef idx="minor">
-            <a:schemeClr val="lt1"/>
-          </a:fontRef>
-        </p:style>
-        <p:txBody>
-          <a:bodyPr rtlCol="0" anchor="ctr"/>
-          <a:lstStyle/>
-          <a:p>
-            <a:pPr algn="ctr"/>
-            <a:endParaRPr kumimoji="1" lang="ko-KR" altLang="en-US"/>
-          </a:p>
-        </p:txBody>
-      </p:sp>
       <p:pic>
         <p:nvPicPr>
           <p:cNvPr id="7" name="그림 6">
             <a:extLst>
               <a:ext uri="{FF2B5EF4-FFF2-40B4-BE49-F238E27FC236}">
-                <a16:creationId xmlns:a16="http://schemas.microsoft.com/office/drawing/2014/main" id="{3FE5F148-8715-8E02-049A-42FF9A9FB383}"/>
+                <a16:creationId xmlns:a16="http://schemas.microsoft.com/office/drawing/2014/main" id="{C2C9F60A-B84A-6BB0-3731-11171FFAD03C}"/>
               </a:ext>
             </a:extLst>
           </p:cNvPr>
@@ -15864,7 +16266,7 @@
         </p:blipFill>
         <p:spPr>
           <a:xfrm>
-            <a:off x="426855" y="4887686"/>
+            <a:off x="405691" y="4899643"/>
             <a:ext cx="7772400" cy="842036"/>
           </a:xfrm>
           <a:prstGeom prst="rect">
@@ -15874,10 +16276,10 @@
       </p:pic>
       <p:sp>
         <p:nvSpPr>
-          <p:cNvPr id="9" name="모서리가 둥근 직사각형 8">
+          <p:cNvPr id="8" name="타원 7">
             <a:extLst>
               <a:ext uri="{FF2B5EF4-FFF2-40B4-BE49-F238E27FC236}">
-                <a16:creationId xmlns:a16="http://schemas.microsoft.com/office/drawing/2014/main" id="{8D54D0D6-6EB8-CB65-F1F3-3F1EB34E6F84}"/>
+                <a16:creationId xmlns:a16="http://schemas.microsoft.com/office/drawing/2014/main" id="{66FF7222-714F-91D1-FCB7-2DF36E756234}"/>
               </a:ext>
             </a:extLst>
           </p:cNvPr>
@@ -15886,63 +16288,7 @@
         </p:nvSpPr>
         <p:spPr>
           <a:xfrm>
-            <a:off x="519779" y="3063388"/>
-            <a:ext cx="7455994" cy="265660"/>
-          </a:xfrm>
-          <a:prstGeom prst="roundRect">
-            <a:avLst/>
-          </a:prstGeom>
-          <a:solidFill>
-            <a:schemeClr val="bg1"/>
-          </a:solidFill>
-          <a:ln>
-            <a:solidFill>
-              <a:schemeClr val="bg2">
-                <a:lumMod val="90000"/>
-              </a:schemeClr>
-            </a:solidFill>
-          </a:ln>
-        </p:spPr>
-        <p:style>
-          <a:lnRef idx="2">
-            <a:schemeClr val="accent1">
-              <a:shade val="15000"/>
-            </a:schemeClr>
-          </a:lnRef>
-          <a:fillRef idx="1">
-            <a:schemeClr val="accent1"/>
-          </a:fillRef>
-          <a:effectRef idx="0">
-            <a:schemeClr val="accent1"/>
-          </a:effectRef>
-          <a:fontRef idx="minor">
-            <a:schemeClr val="lt1"/>
-          </a:fontRef>
-        </p:style>
-        <p:txBody>
-          <a:bodyPr rtlCol="0" anchor="ctr"/>
-          <a:lstStyle/>
-          <a:p>
-            <a:pPr algn="ctr"/>
-            <a:endParaRPr kumimoji="1" lang="ko-KR" altLang="en-US"/>
-          </a:p>
-        </p:txBody>
-      </p:sp>
-      <p:sp>
-        <p:nvSpPr>
-          <p:cNvPr id="15" name="타원 14">
-            <a:extLst>
-              <a:ext uri="{FF2B5EF4-FFF2-40B4-BE49-F238E27FC236}">
-                <a16:creationId xmlns:a16="http://schemas.microsoft.com/office/drawing/2014/main" id="{CC3C8286-74E7-7333-6EDF-EE76BCE9605E}"/>
-              </a:ext>
-            </a:extLst>
-          </p:cNvPr>
-          <p:cNvSpPr/>
-          <p:nvPr/>
-        </p:nvSpPr>
-        <p:spPr>
-          <a:xfrm>
-            <a:off x="43858" y="2834854"/>
+            <a:off x="43858" y="2745403"/>
             <a:ext cx="322673" cy="322673"/>
           </a:xfrm>
           <a:prstGeom prst="ellipse">
@@ -16000,10 +16346,10 @@
       </p:sp>
       <p:sp>
         <p:nvSpPr>
-          <p:cNvPr id="16" name="타원 15">
+          <p:cNvPr id="13" name="타원 12">
             <a:extLst>
               <a:ext uri="{FF2B5EF4-FFF2-40B4-BE49-F238E27FC236}">
-                <a16:creationId xmlns:a16="http://schemas.microsoft.com/office/drawing/2014/main" id="{965BD483-1CBE-6C8C-C435-BDAE51460010}"/>
+                <a16:creationId xmlns:a16="http://schemas.microsoft.com/office/drawing/2014/main" id="{F0984B4D-BD55-C5F3-3B5B-133406F5ED0C}"/>
               </a:ext>
             </a:extLst>
           </p:cNvPr>
@@ -16012,7 +16358,7 @@
         </p:nvSpPr>
         <p:spPr>
           <a:xfrm>
-            <a:off x="43858" y="3571324"/>
+            <a:off x="43858" y="3283088"/>
             <a:ext cx="322673" cy="322673"/>
           </a:xfrm>
           <a:prstGeom prst="ellipse">
@@ -16070,10 +16416,10 @@
       </p:sp>
       <p:sp>
         <p:nvSpPr>
-          <p:cNvPr id="17" name="타원 16">
+          <p:cNvPr id="24" name="타원 23">
             <a:extLst>
               <a:ext uri="{FF2B5EF4-FFF2-40B4-BE49-F238E27FC236}">
-                <a16:creationId xmlns:a16="http://schemas.microsoft.com/office/drawing/2014/main" id="{4D66CEC8-21F1-07E4-195F-1BE1C90674F3}"/>
+                <a16:creationId xmlns:a16="http://schemas.microsoft.com/office/drawing/2014/main" id="{ACC43C86-3433-BBE4-1569-E3E08032E638}"/>
               </a:ext>
             </a:extLst>
           </p:cNvPr>
@@ -16138,1759 +16484,10 @@
           </a:p>
         </p:txBody>
       </p:sp>
-      <p:sp>
-        <p:nvSpPr>
-          <p:cNvPr id="18" name="직사각형 17">
-            <a:extLst>
-              <a:ext uri="{FF2B5EF4-FFF2-40B4-BE49-F238E27FC236}">
-                <a16:creationId xmlns:a16="http://schemas.microsoft.com/office/drawing/2014/main" id="{1617C86A-23F0-67DA-7BE2-69586E98B748}"/>
-              </a:ext>
-            </a:extLst>
-          </p:cNvPr>
-          <p:cNvSpPr/>
-          <p:nvPr/>
-        </p:nvSpPr>
-        <p:spPr>
-          <a:xfrm>
-            <a:off x="3856383" y="2001078"/>
-            <a:ext cx="1020417" cy="304800"/>
-          </a:xfrm>
-          <a:prstGeom prst="rect">
-            <a:avLst/>
-          </a:prstGeom>
-          <a:solidFill>
-            <a:srgbClr val="1E3989"/>
-          </a:solidFill>
-          <a:ln>
-            <a:noFill/>
-          </a:ln>
-        </p:spPr>
-        <p:style>
-          <a:lnRef idx="2">
-            <a:schemeClr val="accent1">
-              <a:shade val="15000"/>
-            </a:schemeClr>
-          </a:lnRef>
-          <a:fillRef idx="1">
-            <a:schemeClr val="accent1"/>
-          </a:fillRef>
-          <a:effectRef idx="0">
-            <a:schemeClr val="accent1"/>
-          </a:effectRef>
-          <a:fontRef idx="minor">
-            <a:schemeClr val="lt1"/>
-          </a:fontRef>
-        </p:style>
-        <p:txBody>
-          <a:bodyPr rtlCol="0" anchor="ctr"/>
-          <a:lstStyle/>
-          <a:p>
-            <a:pPr algn="ctr"/>
-            <a:endParaRPr kumimoji="1" lang="ko-KR" altLang="en-US"/>
-          </a:p>
-        </p:txBody>
-      </p:sp>
-      <p:sp>
-        <p:nvSpPr>
-          <p:cNvPr id="19" name="TextBox 18">
-            <a:extLst>
-              <a:ext uri="{FF2B5EF4-FFF2-40B4-BE49-F238E27FC236}">
-                <a16:creationId xmlns:a16="http://schemas.microsoft.com/office/drawing/2014/main" id="{CCBFB77E-52D1-8F70-81E8-98FD380785DD}"/>
-              </a:ext>
-            </a:extLst>
-          </p:cNvPr>
-          <p:cNvSpPr txBox="1"/>
-          <p:nvPr/>
-        </p:nvSpPr>
-        <p:spPr>
-          <a:xfrm>
-            <a:off x="469776" y="2807623"/>
-            <a:ext cx="384518" cy="184666"/>
-          </a:xfrm>
-          <a:prstGeom prst="rect">
-            <a:avLst/>
-          </a:prstGeom>
-          <a:noFill/>
-        </p:spPr>
-        <p:txBody>
-          <a:bodyPr wrap="square" rtlCol="0">
-            <a:spAutoFit/>
-          </a:bodyPr>
-          <a:lstStyle/>
-          <a:p>
-            <a:r>
-              <a:rPr lang="ko-KR" altLang="en-US" sz="600" b="1" dirty="0">
-                <a:ln>
-                  <a:solidFill>
-                    <a:srgbClr val="4472C4">
-                      <a:alpha val="0"/>
-                    </a:srgbClr>
-                  </a:solidFill>
-                </a:ln>
-                <a:solidFill>
-                  <a:srgbClr val="202946"/>
-                </a:solidFill>
-                <a:latin typeface="Pretendard Variable SemiBold" panose="02000003000000020004" pitchFamily="2" charset="-127"/>
-                <a:ea typeface="Pretendard Variable SemiBold" panose="02000003000000020004" pitchFamily="2" charset="-127"/>
-                <a:cs typeface="Pretendard Variable SemiBold" panose="02000003000000020004" pitchFamily="2" charset="-127"/>
-              </a:rPr>
-              <a:t>칼로리</a:t>
-            </a:r>
-          </a:p>
-        </p:txBody>
-      </p:sp>
-      <p:sp>
-        <p:nvSpPr>
-          <p:cNvPr id="12" name="TextBox 11">
-            <a:extLst>
-              <a:ext uri="{FF2B5EF4-FFF2-40B4-BE49-F238E27FC236}">
-                <a16:creationId xmlns:a16="http://schemas.microsoft.com/office/drawing/2014/main" id="{4451D30E-0988-C54A-33DD-6FB412F173BD}"/>
-              </a:ext>
-            </a:extLst>
-          </p:cNvPr>
-          <p:cNvSpPr txBox="1"/>
-          <p:nvPr/>
-        </p:nvSpPr>
-        <p:spPr>
-          <a:xfrm>
-            <a:off x="512629" y="3073108"/>
-            <a:ext cx="2257075" cy="230832"/>
-          </a:xfrm>
-          <a:prstGeom prst="rect">
-            <a:avLst/>
-          </a:prstGeom>
-          <a:noFill/>
-        </p:spPr>
-        <p:txBody>
-          <a:bodyPr wrap="square" rtlCol="0">
-            <a:spAutoFit/>
-          </a:bodyPr>
-          <a:lstStyle/>
-          <a:p>
-            <a:r>
-              <a:rPr lang="ko-KR" altLang="en-US" sz="900" b="1" dirty="0">
-                <a:ln>
-                  <a:solidFill>
-                    <a:srgbClr val="4472C4">
-                      <a:alpha val="0"/>
-                    </a:srgbClr>
-                  </a:solidFill>
-                </a:ln>
-                <a:solidFill>
-                  <a:schemeClr val="bg1">
-                    <a:lumMod val="85000"/>
-                  </a:schemeClr>
-                </a:solidFill>
-                <a:latin typeface="Pretendard Variable SemiBold" panose="02000003000000020004" pitchFamily="2" charset="-127"/>
-                <a:ea typeface="Pretendard Variable SemiBold" panose="02000003000000020004" pitchFamily="2" charset="-127"/>
-                <a:cs typeface="Pretendard Variable SemiBold" panose="02000003000000020004" pitchFamily="2" charset="-127"/>
-              </a:rPr>
-              <a:t>오늘 먹은 총 칼로리를 입력해 주세요</a:t>
-            </a:r>
-            <a:r>
-              <a:rPr lang="en-US" altLang="ko-KR" sz="900" b="1" dirty="0">
-                <a:ln>
-                  <a:solidFill>
-                    <a:srgbClr val="4472C4">
-                      <a:alpha val="0"/>
-                    </a:srgbClr>
-                  </a:solidFill>
-                </a:ln>
-                <a:solidFill>
-                  <a:schemeClr val="bg1">
-                    <a:lumMod val="85000"/>
-                  </a:schemeClr>
-                </a:solidFill>
-                <a:latin typeface="Pretendard Variable SemiBold" panose="02000003000000020004" pitchFamily="2" charset="-127"/>
-                <a:ea typeface="Pretendard Variable SemiBold" panose="02000003000000020004" pitchFamily="2" charset="-127"/>
-                <a:cs typeface="Pretendard Variable SemiBold" panose="02000003000000020004" pitchFamily="2" charset="-127"/>
-              </a:rPr>
-              <a:t>!</a:t>
-            </a:r>
-            <a:endParaRPr lang="ko-KR" altLang="en-US" sz="900" b="1" dirty="0">
-              <a:ln>
-                <a:solidFill>
-                  <a:srgbClr val="4472C4">
-                    <a:alpha val="0"/>
-                  </a:srgbClr>
-                </a:solidFill>
-              </a:ln>
-              <a:solidFill>
-                <a:schemeClr val="bg1">
-                  <a:lumMod val="85000"/>
-                </a:schemeClr>
-              </a:solidFill>
-              <a:latin typeface="Pretendard Variable SemiBold" panose="02000003000000020004" pitchFamily="2" charset="-127"/>
-              <a:ea typeface="Pretendard Variable SemiBold" panose="02000003000000020004" pitchFamily="2" charset="-127"/>
-              <a:cs typeface="Pretendard Variable SemiBold" panose="02000003000000020004" pitchFamily="2" charset="-127"/>
-            </a:endParaRPr>
-          </a:p>
-        </p:txBody>
-      </p:sp>
-      <p:sp>
-        <p:nvSpPr>
-          <p:cNvPr id="20" name="TextBox 19">
-            <a:extLst>
-              <a:ext uri="{FF2B5EF4-FFF2-40B4-BE49-F238E27FC236}">
-                <a16:creationId xmlns:a16="http://schemas.microsoft.com/office/drawing/2014/main" id="{91D46A3C-F6C1-604D-4685-E81F75E35375}"/>
-              </a:ext>
-            </a:extLst>
-          </p:cNvPr>
-          <p:cNvSpPr txBox="1"/>
-          <p:nvPr/>
-        </p:nvSpPr>
-        <p:spPr>
-          <a:xfrm>
-            <a:off x="7465444" y="3069436"/>
-            <a:ext cx="610028" cy="246221"/>
-          </a:xfrm>
-          <a:prstGeom prst="rect">
-            <a:avLst/>
-          </a:prstGeom>
-          <a:noFill/>
-        </p:spPr>
-        <p:txBody>
-          <a:bodyPr wrap="square" rtlCol="0">
-            <a:spAutoFit/>
-          </a:bodyPr>
-          <a:lstStyle/>
-          <a:p>
-            <a:r>
-              <a:rPr kumimoji="1" lang="en-US" altLang="ko-KR" sz="1000" dirty="0">
-                <a:solidFill>
-                  <a:schemeClr val="bg1">
-                    <a:lumMod val="85000"/>
-                  </a:schemeClr>
-                </a:solidFill>
-                <a:latin typeface="Pretendard Variable Light" panose="02000003000000020004" pitchFamily="2" charset="-127"/>
-                <a:ea typeface="Pretendard Variable Light" panose="02000003000000020004" pitchFamily="2" charset="-127"/>
-                <a:cs typeface="Pretendard Variable Light" panose="02000003000000020004" pitchFamily="2" charset="-127"/>
-              </a:rPr>
-              <a:t>kcal</a:t>
-            </a:r>
-            <a:endParaRPr kumimoji="1" lang="ko-KR" altLang="en-US" sz="1000" dirty="0">
-              <a:solidFill>
-                <a:schemeClr val="bg1">
-                  <a:lumMod val="85000"/>
-                </a:schemeClr>
-              </a:solidFill>
-              <a:latin typeface="Pretendard Variable Light" panose="02000003000000020004" pitchFamily="2" charset="-127"/>
-              <a:ea typeface="Pretendard Variable Light" panose="02000003000000020004" pitchFamily="2" charset="-127"/>
-              <a:cs typeface="Pretendard Variable Light" panose="02000003000000020004" pitchFamily="2" charset="-127"/>
-            </a:endParaRPr>
-          </a:p>
-        </p:txBody>
-      </p:sp>
-      <p:sp>
-        <p:nvSpPr>
-          <p:cNvPr id="22" name="모서리가 둥근 직사각형 21">
-            <a:extLst>
-              <a:ext uri="{FF2B5EF4-FFF2-40B4-BE49-F238E27FC236}">
-                <a16:creationId xmlns:a16="http://schemas.microsoft.com/office/drawing/2014/main" id="{805BF372-E00A-2EC6-C19C-0E0C42813D62}"/>
-              </a:ext>
-            </a:extLst>
-          </p:cNvPr>
-          <p:cNvSpPr/>
-          <p:nvPr/>
-        </p:nvSpPr>
-        <p:spPr>
-          <a:xfrm>
-            <a:off x="537888" y="3423508"/>
-            <a:ext cx="7550333" cy="145254"/>
-          </a:xfrm>
-          <a:prstGeom prst="roundRect">
-            <a:avLst>
-              <a:gd name="adj" fmla="val 2736"/>
-            </a:avLst>
-          </a:prstGeom>
-          <a:solidFill>
-            <a:schemeClr val="bg1"/>
-          </a:solidFill>
-          <a:ln>
-            <a:noFill/>
-          </a:ln>
-        </p:spPr>
-        <p:style>
-          <a:lnRef idx="2">
-            <a:schemeClr val="accent1">
-              <a:shade val="15000"/>
-            </a:schemeClr>
-          </a:lnRef>
-          <a:fillRef idx="1">
-            <a:schemeClr val="accent1"/>
-          </a:fillRef>
-          <a:effectRef idx="0">
-            <a:schemeClr val="accent1"/>
-          </a:effectRef>
-          <a:fontRef idx="minor">
-            <a:schemeClr val="lt1"/>
-          </a:fontRef>
-        </p:style>
-        <p:txBody>
-          <a:bodyPr rtlCol="0" anchor="ctr"/>
-          <a:lstStyle/>
-          <a:p>
-            <a:pPr algn="ctr"/>
-            <a:endParaRPr kumimoji="1" lang="ko-KR" altLang="en-US"/>
-          </a:p>
-        </p:txBody>
-      </p:sp>
-      <p:sp>
-        <p:nvSpPr>
-          <p:cNvPr id="23" name="모서리가 둥근 직사각형 22">
-            <a:extLst>
-              <a:ext uri="{FF2B5EF4-FFF2-40B4-BE49-F238E27FC236}">
-                <a16:creationId xmlns:a16="http://schemas.microsoft.com/office/drawing/2014/main" id="{C4B171D1-62F0-685C-1863-A67793EB174F}"/>
-              </a:ext>
-            </a:extLst>
-          </p:cNvPr>
-          <p:cNvSpPr/>
-          <p:nvPr/>
-        </p:nvSpPr>
-        <p:spPr>
-          <a:xfrm>
-            <a:off x="537887" y="3552174"/>
-            <a:ext cx="7550333" cy="1235559"/>
-          </a:xfrm>
-          <a:prstGeom prst="roundRect">
-            <a:avLst>
-              <a:gd name="adj" fmla="val 2736"/>
-            </a:avLst>
-          </a:prstGeom>
-          <a:solidFill>
-            <a:srgbClr val="F5FAFF"/>
-          </a:solidFill>
-          <a:ln>
-            <a:noFill/>
-          </a:ln>
-        </p:spPr>
-        <p:style>
-          <a:lnRef idx="2">
-            <a:schemeClr val="accent1">
-              <a:shade val="15000"/>
-            </a:schemeClr>
-          </a:lnRef>
-          <a:fillRef idx="1">
-            <a:schemeClr val="accent1"/>
-          </a:fillRef>
-          <a:effectRef idx="0">
-            <a:schemeClr val="accent1"/>
-          </a:effectRef>
-          <a:fontRef idx="minor">
-            <a:schemeClr val="lt1"/>
-          </a:fontRef>
-        </p:style>
-        <p:txBody>
-          <a:bodyPr rtlCol="0" anchor="ctr"/>
-          <a:lstStyle/>
-          <a:p>
-            <a:pPr algn="ctr"/>
-            <a:endParaRPr kumimoji="1" lang="ko-KR" altLang="en-US"/>
-          </a:p>
-        </p:txBody>
-      </p:sp>
-      <p:sp>
-        <p:nvSpPr>
-          <p:cNvPr id="21" name="TextBox 20">
-            <a:extLst>
-              <a:ext uri="{FF2B5EF4-FFF2-40B4-BE49-F238E27FC236}">
-                <a16:creationId xmlns:a16="http://schemas.microsoft.com/office/drawing/2014/main" id="{E11547EB-C225-DE90-862E-D4F169EA3170}"/>
-              </a:ext>
-            </a:extLst>
-          </p:cNvPr>
-          <p:cNvSpPr txBox="1"/>
-          <p:nvPr/>
-        </p:nvSpPr>
-        <p:spPr>
-          <a:xfrm>
-            <a:off x="469776" y="3609380"/>
-            <a:ext cx="744691" cy="184666"/>
-          </a:xfrm>
-          <a:prstGeom prst="rect">
-            <a:avLst/>
-          </a:prstGeom>
-          <a:noFill/>
-        </p:spPr>
-        <p:txBody>
-          <a:bodyPr wrap="square" rtlCol="0">
-            <a:spAutoFit/>
-          </a:bodyPr>
-          <a:lstStyle/>
-          <a:p>
-            <a:r>
-              <a:rPr lang="ko-KR" altLang="en-US" sz="600" b="1" dirty="0">
-                <a:ln>
-                  <a:solidFill>
-                    <a:srgbClr val="4472C4">
-                      <a:alpha val="0"/>
-                    </a:srgbClr>
-                  </a:solidFill>
-                </a:ln>
-                <a:solidFill>
-                  <a:srgbClr val="202946"/>
-                </a:solidFill>
-                <a:latin typeface="Pretendard Variable SemiBold" panose="02000003000000020004" pitchFamily="2" charset="-127"/>
-                <a:ea typeface="Pretendard Variable SemiBold" panose="02000003000000020004" pitchFamily="2" charset="-127"/>
-                <a:cs typeface="Pretendard Variable SemiBold" panose="02000003000000020004" pitchFamily="2" charset="-127"/>
-              </a:rPr>
-              <a:t>영양소</a:t>
-            </a:r>
-          </a:p>
-        </p:txBody>
-      </p:sp>
-      <p:sp>
-        <p:nvSpPr>
-          <p:cNvPr id="26" name="TextBox 25">
-            <a:extLst>
-              <a:ext uri="{FF2B5EF4-FFF2-40B4-BE49-F238E27FC236}">
-                <a16:creationId xmlns:a16="http://schemas.microsoft.com/office/drawing/2014/main" id="{B077459B-4867-0173-CEEC-24D665EFBAFF}"/>
-              </a:ext>
-            </a:extLst>
-          </p:cNvPr>
-          <p:cNvSpPr txBox="1"/>
-          <p:nvPr/>
-        </p:nvSpPr>
-        <p:spPr>
-          <a:xfrm>
-            <a:off x="481948" y="3872309"/>
-            <a:ext cx="744691" cy="184666"/>
-          </a:xfrm>
-          <a:prstGeom prst="rect">
-            <a:avLst/>
-          </a:prstGeom>
-          <a:noFill/>
-        </p:spPr>
-        <p:txBody>
-          <a:bodyPr wrap="square" rtlCol="0">
-            <a:spAutoFit/>
-          </a:bodyPr>
-          <a:lstStyle/>
-          <a:p>
-            <a:r>
-              <a:rPr lang="ko-KR" altLang="en-US" sz="600" b="1" dirty="0">
-                <a:ln>
-                  <a:solidFill>
-                    <a:srgbClr val="4472C4">
-                      <a:alpha val="0"/>
-                    </a:srgbClr>
-                  </a:solidFill>
-                </a:ln>
-                <a:solidFill>
-                  <a:srgbClr val="202946"/>
-                </a:solidFill>
-                <a:latin typeface="Pretendard Variable SemiBold" panose="02000003000000020004" pitchFamily="2" charset="-127"/>
-                <a:ea typeface="Pretendard Variable SemiBold" panose="02000003000000020004" pitchFamily="2" charset="-127"/>
-                <a:cs typeface="Pretendard Variable SemiBold" panose="02000003000000020004" pitchFamily="2" charset="-127"/>
-              </a:rPr>
-              <a:t>단백질</a:t>
-            </a:r>
-          </a:p>
-        </p:txBody>
-      </p:sp>
-      <p:sp>
-        <p:nvSpPr>
-          <p:cNvPr id="34" name="모서리가 둥근 직사각형 33">
-            <a:extLst>
-              <a:ext uri="{FF2B5EF4-FFF2-40B4-BE49-F238E27FC236}">
-                <a16:creationId xmlns:a16="http://schemas.microsoft.com/office/drawing/2014/main" id="{DB2E86AC-4A03-13C9-AF17-3684270FDAC3}"/>
-              </a:ext>
-            </a:extLst>
-          </p:cNvPr>
-          <p:cNvSpPr/>
-          <p:nvPr/>
-        </p:nvSpPr>
-        <p:spPr>
-          <a:xfrm>
-            <a:off x="870816" y="3814486"/>
-            <a:ext cx="2985567" cy="306894"/>
-          </a:xfrm>
-          <a:prstGeom prst="roundRect">
-            <a:avLst/>
-          </a:prstGeom>
-          <a:solidFill>
-            <a:schemeClr val="bg1"/>
-          </a:solidFill>
-          <a:ln>
-            <a:solidFill>
-              <a:schemeClr val="bg2">
-                <a:lumMod val="90000"/>
-              </a:schemeClr>
-            </a:solidFill>
-          </a:ln>
-        </p:spPr>
-        <p:style>
-          <a:lnRef idx="2">
-            <a:schemeClr val="accent1">
-              <a:shade val="15000"/>
-            </a:schemeClr>
-          </a:lnRef>
-          <a:fillRef idx="1">
-            <a:schemeClr val="accent1"/>
-          </a:fillRef>
-          <a:effectRef idx="0">
-            <a:schemeClr val="accent1"/>
-          </a:effectRef>
-          <a:fontRef idx="minor">
-            <a:schemeClr val="lt1"/>
-          </a:fontRef>
-        </p:style>
-        <p:txBody>
-          <a:bodyPr rtlCol="0" anchor="ctr"/>
-          <a:lstStyle/>
-          <a:p>
-            <a:pPr algn="ctr"/>
-            <a:endParaRPr kumimoji="1" lang="ko-KR" altLang="en-US"/>
-          </a:p>
-        </p:txBody>
-      </p:sp>
-      <p:sp>
-        <p:nvSpPr>
-          <p:cNvPr id="35" name="TextBox 34">
-            <a:extLst>
-              <a:ext uri="{FF2B5EF4-FFF2-40B4-BE49-F238E27FC236}">
-                <a16:creationId xmlns:a16="http://schemas.microsoft.com/office/drawing/2014/main" id="{2CAAADDA-824C-0AF2-73A1-7CDF21262A49}"/>
-              </a:ext>
-            </a:extLst>
-          </p:cNvPr>
-          <p:cNvSpPr txBox="1"/>
-          <p:nvPr/>
-        </p:nvSpPr>
-        <p:spPr>
-          <a:xfrm>
-            <a:off x="875986" y="3863902"/>
-            <a:ext cx="338482" cy="200055"/>
-          </a:xfrm>
-          <a:prstGeom prst="rect">
-            <a:avLst/>
-          </a:prstGeom>
-          <a:noFill/>
-        </p:spPr>
-        <p:txBody>
-          <a:bodyPr wrap="square" rtlCol="0">
-            <a:spAutoFit/>
-          </a:bodyPr>
-          <a:lstStyle/>
-          <a:p>
-            <a:r>
-              <a:rPr kumimoji="1" lang="en-US" altLang="ko-KR" sz="700" dirty="0">
-                <a:latin typeface="Pretendard Variable Light" panose="02000003000000020004" pitchFamily="2" charset="-127"/>
-                <a:ea typeface="Pretendard Variable Light" panose="02000003000000020004" pitchFamily="2" charset="-127"/>
-                <a:cs typeface="Pretendard Variable Light" panose="02000003000000020004" pitchFamily="2" charset="-127"/>
-              </a:rPr>
-              <a:t>1</a:t>
-            </a:r>
-            <a:endParaRPr kumimoji="1" lang="ko-KR" altLang="en-US" sz="700" dirty="0">
-              <a:latin typeface="Pretendard Variable Light" panose="02000003000000020004" pitchFamily="2" charset="-127"/>
-              <a:ea typeface="Pretendard Variable Light" panose="02000003000000020004" pitchFamily="2" charset="-127"/>
-              <a:cs typeface="Pretendard Variable Light" panose="02000003000000020004" pitchFamily="2" charset="-127"/>
-            </a:endParaRPr>
-          </a:p>
-        </p:txBody>
-      </p:sp>
-      <p:sp>
-        <p:nvSpPr>
-          <p:cNvPr id="36" name="TextBox 35">
-            <a:extLst>
-              <a:ext uri="{FF2B5EF4-FFF2-40B4-BE49-F238E27FC236}">
-                <a16:creationId xmlns:a16="http://schemas.microsoft.com/office/drawing/2014/main" id="{45D23167-B737-2763-8596-246E48648D74}"/>
-              </a:ext>
-            </a:extLst>
-          </p:cNvPr>
-          <p:cNvSpPr txBox="1"/>
-          <p:nvPr/>
-        </p:nvSpPr>
-        <p:spPr>
-          <a:xfrm>
-            <a:off x="3466621" y="3844823"/>
-            <a:ext cx="255387" cy="246221"/>
-          </a:xfrm>
-          <a:prstGeom prst="rect">
-            <a:avLst/>
-          </a:prstGeom>
-          <a:noFill/>
-        </p:spPr>
-        <p:txBody>
-          <a:bodyPr wrap="square" rtlCol="0">
-            <a:spAutoFit/>
-          </a:bodyPr>
-          <a:lstStyle/>
-          <a:p>
-            <a:r>
-              <a:rPr kumimoji="1" lang="en-US" altLang="ko-KR" sz="1000" dirty="0">
-                <a:solidFill>
-                  <a:schemeClr val="bg1">
-                    <a:lumMod val="85000"/>
-                  </a:schemeClr>
-                </a:solidFill>
-                <a:latin typeface="Pretendard Variable Light" panose="02000003000000020004" pitchFamily="2" charset="-127"/>
-                <a:ea typeface="Pretendard Variable Light" panose="02000003000000020004" pitchFamily="2" charset="-127"/>
-                <a:cs typeface="Pretendard Variable Light" panose="02000003000000020004" pitchFamily="2" charset="-127"/>
-              </a:rPr>
-              <a:t>g</a:t>
-            </a:r>
-            <a:endParaRPr kumimoji="1" lang="ko-KR" altLang="en-US" sz="1000" dirty="0">
-              <a:solidFill>
-                <a:schemeClr val="bg1">
-                  <a:lumMod val="85000"/>
-                </a:schemeClr>
-              </a:solidFill>
-              <a:latin typeface="Pretendard Variable Light" panose="02000003000000020004" pitchFamily="2" charset="-127"/>
-              <a:ea typeface="Pretendard Variable Light" panose="02000003000000020004" pitchFamily="2" charset="-127"/>
-              <a:cs typeface="Pretendard Variable Light" panose="02000003000000020004" pitchFamily="2" charset="-127"/>
-            </a:endParaRPr>
-          </a:p>
-        </p:txBody>
-      </p:sp>
-      <p:sp>
-        <p:nvSpPr>
-          <p:cNvPr id="49" name="TextBox 48">
-            <a:extLst>
-              <a:ext uri="{FF2B5EF4-FFF2-40B4-BE49-F238E27FC236}">
-                <a16:creationId xmlns:a16="http://schemas.microsoft.com/office/drawing/2014/main" id="{66FAAE01-94D9-307B-18C9-D0FEA33BBF41}"/>
-              </a:ext>
-            </a:extLst>
-          </p:cNvPr>
-          <p:cNvSpPr txBox="1"/>
-          <p:nvPr/>
-        </p:nvSpPr>
-        <p:spPr>
-          <a:xfrm>
-            <a:off x="4463758" y="3887801"/>
-            <a:ext cx="744691" cy="184666"/>
-          </a:xfrm>
-          <a:prstGeom prst="rect">
-            <a:avLst/>
-          </a:prstGeom>
-          <a:noFill/>
-        </p:spPr>
-        <p:txBody>
-          <a:bodyPr wrap="square" rtlCol="0">
-            <a:spAutoFit/>
-          </a:bodyPr>
-          <a:lstStyle/>
-          <a:p>
-            <a:r>
-              <a:rPr lang="ko-KR" altLang="en-US" sz="600" b="1" dirty="0">
-                <a:ln>
-                  <a:solidFill>
-                    <a:srgbClr val="4472C4">
-                      <a:alpha val="0"/>
-                    </a:srgbClr>
-                  </a:solidFill>
-                </a:ln>
-                <a:solidFill>
-                  <a:srgbClr val="202946"/>
-                </a:solidFill>
-                <a:latin typeface="Pretendard Variable SemiBold" panose="02000003000000020004" pitchFamily="2" charset="-127"/>
-                <a:ea typeface="Pretendard Variable SemiBold" panose="02000003000000020004" pitchFamily="2" charset="-127"/>
-                <a:cs typeface="Pretendard Variable SemiBold" panose="02000003000000020004" pitchFamily="2" charset="-127"/>
-              </a:rPr>
-              <a:t>지방</a:t>
-            </a:r>
-          </a:p>
-        </p:txBody>
-      </p:sp>
-      <p:sp>
-        <p:nvSpPr>
-          <p:cNvPr id="50" name="모서리가 둥근 직사각형 49">
-            <a:extLst>
-              <a:ext uri="{FF2B5EF4-FFF2-40B4-BE49-F238E27FC236}">
-                <a16:creationId xmlns:a16="http://schemas.microsoft.com/office/drawing/2014/main" id="{99DE4484-897B-132F-C801-5B4457E65FE2}"/>
-              </a:ext>
-            </a:extLst>
-          </p:cNvPr>
-          <p:cNvSpPr/>
-          <p:nvPr/>
-        </p:nvSpPr>
-        <p:spPr>
-          <a:xfrm>
-            <a:off x="4985493" y="3799787"/>
-            <a:ext cx="2985567" cy="306894"/>
-          </a:xfrm>
-          <a:prstGeom prst="roundRect">
-            <a:avLst/>
-          </a:prstGeom>
-          <a:solidFill>
-            <a:schemeClr val="bg1"/>
-          </a:solidFill>
-          <a:ln>
-            <a:solidFill>
-              <a:schemeClr val="bg2">
-                <a:lumMod val="90000"/>
-              </a:schemeClr>
-            </a:solidFill>
-          </a:ln>
-        </p:spPr>
-        <p:style>
-          <a:lnRef idx="2">
-            <a:schemeClr val="accent1">
-              <a:shade val="15000"/>
-            </a:schemeClr>
-          </a:lnRef>
-          <a:fillRef idx="1">
-            <a:schemeClr val="accent1"/>
-          </a:fillRef>
-          <a:effectRef idx="0">
-            <a:schemeClr val="accent1"/>
-          </a:effectRef>
-          <a:fontRef idx="minor">
-            <a:schemeClr val="lt1"/>
-          </a:fontRef>
-        </p:style>
-        <p:txBody>
-          <a:bodyPr rtlCol="0" anchor="ctr"/>
-          <a:lstStyle/>
-          <a:p>
-            <a:pPr algn="ctr"/>
-            <a:endParaRPr kumimoji="1" lang="ko-KR" altLang="en-US"/>
-          </a:p>
-        </p:txBody>
-      </p:sp>
-      <p:sp>
-        <p:nvSpPr>
-          <p:cNvPr id="51" name="TextBox 50">
-            <a:extLst>
-              <a:ext uri="{FF2B5EF4-FFF2-40B4-BE49-F238E27FC236}">
-                <a16:creationId xmlns:a16="http://schemas.microsoft.com/office/drawing/2014/main" id="{C974A8BE-7884-5181-31AA-D3252B69ED53}"/>
-              </a:ext>
-            </a:extLst>
-          </p:cNvPr>
-          <p:cNvSpPr txBox="1"/>
-          <p:nvPr/>
-        </p:nvSpPr>
-        <p:spPr>
-          <a:xfrm>
-            <a:off x="4990663" y="3854944"/>
-            <a:ext cx="338482" cy="200055"/>
-          </a:xfrm>
-          <a:prstGeom prst="rect">
-            <a:avLst/>
-          </a:prstGeom>
-          <a:noFill/>
-        </p:spPr>
-        <p:txBody>
-          <a:bodyPr wrap="square" rtlCol="0">
-            <a:spAutoFit/>
-          </a:bodyPr>
-          <a:lstStyle/>
-          <a:p>
-            <a:r>
-              <a:rPr kumimoji="1" lang="en-US" altLang="ko-KR" sz="700" dirty="0">
-                <a:latin typeface="Pretendard Variable Light" panose="02000003000000020004" pitchFamily="2" charset="-127"/>
-                <a:ea typeface="Pretendard Variable Light" panose="02000003000000020004" pitchFamily="2" charset="-127"/>
-                <a:cs typeface="Pretendard Variable Light" panose="02000003000000020004" pitchFamily="2" charset="-127"/>
-              </a:rPr>
-              <a:t>0.2</a:t>
-            </a:r>
-            <a:endParaRPr kumimoji="1" lang="ko-KR" altLang="en-US" sz="700" dirty="0">
-              <a:latin typeface="Pretendard Variable Light" panose="02000003000000020004" pitchFamily="2" charset="-127"/>
-              <a:ea typeface="Pretendard Variable Light" panose="02000003000000020004" pitchFamily="2" charset="-127"/>
-              <a:cs typeface="Pretendard Variable Light" panose="02000003000000020004" pitchFamily="2" charset="-127"/>
-            </a:endParaRPr>
-          </a:p>
-        </p:txBody>
-      </p:sp>
-      <p:sp>
-        <p:nvSpPr>
-          <p:cNvPr id="52" name="TextBox 51">
-            <a:extLst>
-              <a:ext uri="{FF2B5EF4-FFF2-40B4-BE49-F238E27FC236}">
-                <a16:creationId xmlns:a16="http://schemas.microsoft.com/office/drawing/2014/main" id="{67E04A97-48F8-8465-366C-8905DB1D416A}"/>
-              </a:ext>
-            </a:extLst>
-          </p:cNvPr>
-          <p:cNvSpPr txBox="1"/>
-          <p:nvPr/>
-        </p:nvSpPr>
-        <p:spPr>
-          <a:xfrm>
-            <a:off x="7600729" y="3830124"/>
-            <a:ext cx="255387" cy="246221"/>
-          </a:xfrm>
-          <a:prstGeom prst="rect">
-            <a:avLst/>
-          </a:prstGeom>
-          <a:noFill/>
-        </p:spPr>
-        <p:txBody>
-          <a:bodyPr wrap="square" rtlCol="0">
-            <a:spAutoFit/>
-          </a:bodyPr>
-          <a:lstStyle/>
-          <a:p>
-            <a:r>
-              <a:rPr kumimoji="1" lang="en-US" altLang="ko-KR" sz="1000" dirty="0">
-                <a:solidFill>
-                  <a:schemeClr val="bg1">
-                    <a:lumMod val="85000"/>
-                  </a:schemeClr>
-                </a:solidFill>
-                <a:latin typeface="Pretendard Variable Light" panose="02000003000000020004" pitchFamily="2" charset="-127"/>
-                <a:ea typeface="Pretendard Variable Light" panose="02000003000000020004" pitchFamily="2" charset="-127"/>
-                <a:cs typeface="Pretendard Variable Light" panose="02000003000000020004" pitchFamily="2" charset="-127"/>
-              </a:rPr>
-              <a:t>g</a:t>
-            </a:r>
-            <a:endParaRPr kumimoji="1" lang="ko-KR" altLang="en-US" sz="1000" dirty="0">
-              <a:solidFill>
-                <a:schemeClr val="bg1">
-                  <a:lumMod val="85000"/>
-                </a:schemeClr>
-              </a:solidFill>
-              <a:latin typeface="Pretendard Variable Light" panose="02000003000000020004" pitchFamily="2" charset="-127"/>
-              <a:ea typeface="Pretendard Variable Light" panose="02000003000000020004" pitchFamily="2" charset="-127"/>
-              <a:cs typeface="Pretendard Variable Light" panose="02000003000000020004" pitchFamily="2" charset="-127"/>
-            </a:endParaRPr>
-          </a:p>
-        </p:txBody>
-      </p:sp>
-      <p:sp>
-        <p:nvSpPr>
-          <p:cNvPr id="53" name="TextBox 52">
-            <a:extLst>
-              <a:ext uri="{FF2B5EF4-FFF2-40B4-BE49-F238E27FC236}">
-                <a16:creationId xmlns:a16="http://schemas.microsoft.com/office/drawing/2014/main" id="{74724306-FDBA-889D-2A55-9FB47E7A173A}"/>
-              </a:ext>
-            </a:extLst>
-          </p:cNvPr>
-          <p:cNvSpPr txBox="1"/>
-          <p:nvPr/>
-        </p:nvSpPr>
-        <p:spPr>
-          <a:xfrm>
-            <a:off x="469776" y="4249663"/>
-            <a:ext cx="744691" cy="184666"/>
-          </a:xfrm>
-          <a:prstGeom prst="rect">
-            <a:avLst/>
-          </a:prstGeom>
-          <a:noFill/>
-        </p:spPr>
-        <p:txBody>
-          <a:bodyPr wrap="square" rtlCol="0">
-            <a:spAutoFit/>
-          </a:bodyPr>
-          <a:lstStyle/>
-          <a:p>
-            <a:r>
-              <a:rPr lang="ko-KR" altLang="en-US" sz="600" b="1" dirty="0">
-                <a:ln>
-                  <a:solidFill>
-                    <a:srgbClr val="4472C4">
-                      <a:alpha val="0"/>
-                    </a:srgbClr>
-                  </a:solidFill>
-                </a:ln>
-                <a:solidFill>
-                  <a:srgbClr val="202946"/>
-                </a:solidFill>
-                <a:latin typeface="Pretendard Variable SemiBold" panose="02000003000000020004" pitchFamily="2" charset="-127"/>
-                <a:ea typeface="Pretendard Variable SemiBold" panose="02000003000000020004" pitchFamily="2" charset="-127"/>
-                <a:cs typeface="Pretendard Variable SemiBold" panose="02000003000000020004" pitchFamily="2" charset="-127"/>
-              </a:rPr>
-              <a:t>탄수화물</a:t>
-            </a:r>
-          </a:p>
-        </p:txBody>
-      </p:sp>
-      <p:sp>
-        <p:nvSpPr>
-          <p:cNvPr id="54" name="모서리가 둥근 직사각형 53">
-            <a:extLst>
-              <a:ext uri="{FF2B5EF4-FFF2-40B4-BE49-F238E27FC236}">
-                <a16:creationId xmlns:a16="http://schemas.microsoft.com/office/drawing/2014/main" id="{BC985B24-3A3F-B56F-20A0-7F86385CE8E7}"/>
-              </a:ext>
-            </a:extLst>
-          </p:cNvPr>
-          <p:cNvSpPr/>
-          <p:nvPr/>
-        </p:nvSpPr>
-        <p:spPr>
-          <a:xfrm>
-            <a:off x="858644" y="4191840"/>
-            <a:ext cx="2985567" cy="306894"/>
-          </a:xfrm>
-          <a:prstGeom prst="roundRect">
-            <a:avLst/>
-          </a:prstGeom>
-          <a:solidFill>
-            <a:schemeClr val="bg1"/>
-          </a:solidFill>
-          <a:ln>
-            <a:solidFill>
-              <a:schemeClr val="bg2">
-                <a:lumMod val="90000"/>
-              </a:schemeClr>
-            </a:solidFill>
-          </a:ln>
-        </p:spPr>
-        <p:style>
-          <a:lnRef idx="2">
-            <a:schemeClr val="accent1">
-              <a:shade val="15000"/>
-            </a:schemeClr>
-          </a:lnRef>
-          <a:fillRef idx="1">
-            <a:schemeClr val="accent1"/>
-          </a:fillRef>
-          <a:effectRef idx="0">
-            <a:schemeClr val="accent1"/>
-          </a:effectRef>
-          <a:fontRef idx="minor">
-            <a:schemeClr val="lt1"/>
-          </a:fontRef>
-        </p:style>
-        <p:txBody>
-          <a:bodyPr rtlCol="0" anchor="ctr"/>
-          <a:lstStyle/>
-          <a:p>
-            <a:pPr algn="ctr"/>
-            <a:endParaRPr kumimoji="1" lang="ko-KR" altLang="en-US"/>
-          </a:p>
-        </p:txBody>
-      </p:sp>
-      <p:sp>
-        <p:nvSpPr>
-          <p:cNvPr id="55" name="TextBox 54">
-            <a:extLst>
-              <a:ext uri="{FF2B5EF4-FFF2-40B4-BE49-F238E27FC236}">
-                <a16:creationId xmlns:a16="http://schemas.microsoft.com/office/drawing/2014/main" id="{960D7E37-7B5F-93EE-B80A-D4E0FB0C0107}"/>
-              </a:ext>
-            </a:extLst>
-          </p:cNvPr>
-          <p:cNvSpPr txBox="1"/>
-          <p:nvPr/>
-        </p:nvSpPr>
-        <p:spPr>
-          <a:xfrm>
-            <a:off x="863814" y="4241256"/>
-            <a:ext cx="338482" cy="200055"/>
-          </a:xfrm>
-          <a:prstGeom prst="rect">
-            <a:avLst/>
-          </a:prstGeom>
-          <a:noFill/>
-        </p:spPr>
-        <p:txBody>
-          <a:bodyPr wrap="square" rtlCol="0">
-            <a:spAutoFit/>
-          </a:bodyPr>
-          <a:lstStyle/>
-          <a:p>
-            <a:r>
-              <a:rPr kumimoji="1" lang="en-US" altLang="ko-KR" sz="700" dirty="0">
-                <a:latin typeface="Pretendard Variable Light" panose="02000003000000020004" pitchFamily="2" charset="-127"/>
-                <a:ea typeface="Pretendard Variable Light" panose="02000003000000020004" pitchFamily="2" charset="-127"/>
-                <a:cs typeface="Pretendard Variable Light" panose="02000003000000020004" pitchFamily="2" charset="-127"/>
-              </a:rPr>
-              <a:t>1</a:t>
-            </a:r>
-            <a:endParaRPr kumimoji="1" lang="ko-KR" altLang="en-US" sz="700" dirty="0">
-              <a:latin typeface="Pretendard Variable Light" panose="02000003000000020004" pitchFamily="2" charset="-127"/>
-              <a:ea typeface="Pretendard Variable Light" panose="02000003000000020004" pitchFamily="2" charset="-127"/>
-              <a:cs typeface="Pretendard Variable Light" panose="02000003000000020004" pitchFamily="2" charset="-127"/>
-            </a:endParaRPr>
-          </a:p>
-        </p:txBody>
-      </p:sp>
-      <p:sp>
-        <p:nvSpPr>
-          <p:cNvPr id="56" name="TextBox 55">
-            <a:extLst>
-              <a:ext uri="{FF2B5EF4-FFF2-40B4-BE49-F238E27FC236}">
-                <a16:creationId xmlns:a16="http://schemas.microsoft.com/office/drawing/2014/main" id="{5918C520-3C5D-BD41-2BF1-DF2BD6AAC076}"/>
-              </a:ext>
-            </a:extLst>
-          </p:cNvPr>
-          <p:cNvSpPr txBox="1"/>
-          <p:nvPr/>
-        </p:nvSpPr>
-        <p:spPr>
-          <a:xfrm>
-            <a:off x="3454449" y="4222177"/>
-            <a:ext cx="255387" cy="246221"/>
-          </a:xfrm>
-          <a:prstGeom prst="rect">
-            <a:avLst/>
-          </a:prstGeom>
-          <a:noFill/>
-        </p:spPr>
-        <p:txBody>
-          <a:bodyPr wrap="square" rtlCol="0">
-            <a:spAutoFit/>
-          </a:bodyPr>
-          <a:lstStyle/>
-          <a:p>
-            <a:r>
-              <a:rPr kumimoji="1" lang="en-US" altLang="ko-KR" sz="1000" dirty="0">
-                <a:solidFill>
-                  <a:schemeClr val="bg1">
-                    <a:lumMod val="85000"/>
-                  </a:schemeClr>
-                </a:solidFill>
-                <a:latin typeface="Pretendard Variable Light" panose="02000003000000020004" pitchFamily="2" charset="-127"/>
-                <a:ea typeface="Pretendard Variable Light" panose="02000003000000020004" pitchFamily="2" charset="-127"/>
-                <a:cs typeface="Pretendard Variable Light" panose="02000003000000020004" pitchFamily="2" charset="-127"/>
-              </a:rPr>
-              <a:t>g</a:t>
-            </a:r>
-            <a:endParaRPr kumimoji="1" lang="ko-KR" altLang="en-US" sz="1000" dirty="0">
-              <a:solidFill>
-                <a:schemeClr val="bg1">
-                  <a:lumMod val="85000"/>
-                </a:schemeClr>
-              </a:solidFill>
-              <a:latin typeface="Pretendard Variable Light" panose="02000003000000020004" pitchFamily="2" charset="-127"/>
-              <a:ea typeface="Pretendard Variable Light" panose="02000003000000020004" pitchFamily="2" charset="-127"/>
-              <a:cs typeface="Pretendard Variable Light" panose="02000003000000020004" pitchFamily="2" charset="-127"/>
-            </a:endParaRPr>
-          </a:p>
-        </p:txBody>
-      </p:sp>
-      <p:sp>
-        <p:nvSpPr>
-          <p:cNvPr id="57" name="TextBox 56">
-            <a:extLst>
-              <a:ext uri="{FF2B5EF4-FFF2-40B4-BE49-F238E27FC236}">
-                <a16:creationId xmlns:a16="http://schemas.microsoft.com/office/drawing/2014/main" id="{7CF27FCF-739E-5093-1D88-0FBCE1CA1911}"/>
-              </a:ext>
-            </a:extLst>
-          </p:cNvPr>
-          <p:cNvSpPr txBox="1"/>
-          <p:nvPr/>
-        </p:nvSpPr>
-        <p:spPr>
-          <a:xfrm>
-            <a:off x="4465185" y="4240705"/>
-            <a:ext cx="744691" cy="184666"/>
-          </a:xfrm>
-          <a:prstGeom prst="rect">
-            <a:avLst/>
-          </a:prstGeom>
-          <a:noFill/>
-        </p:spPr>
-        <p:txBody>
-          <a:bodyPr wrap="square" rtlCol="0">
-            <a:spAutoFit/>
-          </a:bodyPr>
-          <a:lstStyle/>
-          <a:p>
-            <a:r>
-              <a:rPr lang="ko-KR" altLang="en-US" sz="600" b="1" dirty="0">
-                <a:ln>
-                  <a:solidFill>
-                    <a:srgbClr val="4472C4">
-                      <a:alpha val="0"/>
-                    </a:srgbClr>
-                  </a:solidFill>
-                </a:ln>
-                <a:solidFill>
-                  <a:srgbClr val="202946"/>
-                </a:solidFill>
-                <a:latin typeface="Pretendard Variable SemiBold" panose="02000003000000020004" pitchFamily="2" charset="-127"/>
-                <a:ea typeface="Pretendard Variable SemiBold" panose="02000003000000020004" pitchFamily="2" charset="-127"/>
-                <a:cs typeface="Pretendard Variable SemiBold" panose="02000003000000020004" pitchFamily="2" charset="-127"/>
-              </a:rPr>
-              <a:t>당</a:t>
-            </a:r>
-          </a:p>
-        </p:txBody>
-      </p:sp>
-      <p:sp>
-        <p:nvSpPr>
-          <p:cNvPr id="58" name="모서리가 둥근 직사각형 57">
-            <a:extLst>
-              <a:ext uri="{FF2B5EF4-FFF2-40B4-BE49-F238E27FC236}">
-                <a16:creationId xmlns:a16="http://schemas.microsoft.com/office/drawing/2014/main" id="{F8DFE2D5-A994-CA28-A432-A9F8D7722ACC}"/>
-              </a:ext>
-            </a:extLst>
-          </p:cNvPr>
-          <p:cNvSpPr/>
-          <p:nvPr/>
-        </p:nvSpPr>
-        <p:spPr>
-          <a:xfrm>
-            <a:off x="4973321" y="4177141"/>
-            <a:ext cx="2985567" cy="306894"/>
-          </a:xfrm>
-          <a:prstGeom prst="roundRect">
-            <a:avLst/>
-          </a:prstGeom>
-          <a:solidFill>
-            <a:schemeClr val="bg1"/>
-          </a:solidFill>
-          <a:ln>
-            <a:solidFill>
-              <a:schemeClr val="bg2">
-                <a:lumMod val="90000"/>
-              </a:schemeClr>
-            </a:solidFill>
-          </a:ln>
-        </p:spPr>
-        <p:style>
-          <a:lnRef idx="2">
-            <a:schemeClr val="accent1">
-              <a:shade val="15000"/>
-            </a:schemeClr>
-          </a:lnRef>
-          <a:fillRef idx="1">
-            <a:schemeClr val="accent1"/>
-          </a:fillRef>
-          <a:effectRef idx="0">
-            <a:schemeClr val="accent1"/>
-          </a:effectRef>
-          <a:fontRef idx="minor">
-            <a:schemeClr val="lt1"/>
-          </a:fontRef>
-        </p:style>
-        <p:txBody>
-          <a:bodyPr rtlCol="0" anchor="ctr"/>
-          <a:lstStyle/>
-          <a:p>
-            <a:pPr algn="ctr"/>
-            <a:endParaRPr kumimoji="1" lang="ko-KR" altLang="en-US"/>
-          </a:p>
-        </p:txBody>
-      </p:sp>
-      <p:sp>
-        <p:nvSpPr>
-          <p:cNvPr id="59" name="TextBox 58">
-            <a:extLst>
-              <a:ext uri="{FF2B5EF4-FFF2-40B4-BE49-F238E27FC236}">
-                <a16:creationId xmlns:a16="http://schemas.microsoft.com/office/drawing/2014/main" id="{F2B731F9-16C8-BA50-A81B-819D899BF54E}"/>
-              </a:ext>
-            </a:extLst>
-          </p:cNvPr>
-          <p:cNvSpPr txBox="1"/>
-          <p:nvPr/>
-        </p:nvSpPr>
-        <p:spPr>
-          <a:xfrm>
-            <a:off x="4978491" y="4232298"/>
-            <a:ext cx="338482" cy="200055"/>
-          </a:xfrm>
-          <a:prstGeom prst="rect">
-            <a:avLst/>
-          </a:prstGeom>
-          <a:noFill/>
-        </p:spPr>
-        <p:txBody>
-          <a:bodyPr wrap="square" rtlCol="0">
-            <a:spAutoFit/>
-          </a:bodyPr>
-          <a:lstStyle/>
-          <a:p>
-            <a:r>
-              <a:rPr kumimoji="1" lang="en-US" altLang="ko-KR" sz="700" dirty="0">
-                <a:latin typeface="Pretendard Variable Light" panose="02000003000000020004" pitchFamily="2" charset="-127"/>
-                <a:ea typeface="Pretendard Variable Light" panose="02000003000000020004" pitchFamily="2" charset="-127"/>
-                <a:cs typeface="Pretendard Variable Light" panose="02000003000000020004" pitchFamily="2" charset="-127"/>
-              </a:rPr>
-              <a:t>0.2</a:t>
-            </a:r>
-            <a:endParaRPr kumimoji="1" lang="ko-KR" altLang="en-US" sz="700" dirty="0">
-              <a:latin typeface="Pretendard Variable Light" panose="02000003000000020004" pitchFamily="2" charset="-127"/>
-              <a:ea typeface="Pretendard Variable Light" panose="02000003000000020004" pitchFamily="2" charset="-127"/>
-              <a:cs typeface="Pretendard Variable Light" panose="02000003000000020004" pitchFamily="2" charset="-127"/>
-            </a:endParaRPr>
-          </a:p>
-        </p:txBody>
-      </p:sp>
-      <p:sp>
-        <p:nvSpPr>
-          <p:cNvPr id="60" name="TextBox 59">
-            <a:extLst>
-              <a:ext uri="{FF2B5EF4-FFF2-40B4-BE49-F238E27FC236}">
-                <a16:creationId xmlns:a16="http://schemas.microsoft.com/office/drawing/2014/main" id="{61BCD0E8-7091-746A-B86E-EE89265CEE66}"/>
-              </a:ext>
-            </a:extLst>
-          </p:cNvPr>
-          <p:cNvSpPr txBox="1"/>
-          <p:nvPr/>
-        </p:nvSpPr>
-        <p:spPr>
-          <a:xfrm>
-            <a:off x="7588557" y="4207478"/>
-            <a:ext cx="255387" cy="246221"/>
-          </a:xfrm>
-          <a:prstGeom prst="rect">
-            <a:avLst/>
-          </a:prstGeom>
-          <a:noFill/>
-        </p:spPr>
-        <p:txBody>
-          <a:bodyPr wrap="square" rtlCol="0">
-            <a:spAutoFit/>
-          </a:bodyPr>
-          <a:lstStyle/>
-          <a:p>
-            <a:r>
-              <a:rPr kumimoji="1" lang="en-US" altLang="ko-KR" sz="1000" dirty="0">
-                <a:solidFill>
-                  <a:schemeClr val="bg1">
-                    <a:lumMod val="85000"/>
-                  </a:schemeClr>
-                </a:solidFill>
-                <a:latin typeface="Pretendard Variable Light" panose="02000003000000020004" pitchFamily="2" charset="-127"/>
-                <a:ea typeface="Pretendard Variable Light" panose="02000003000000020004" pitchFamily="2" charset="-127"/>
-                <a:cs typeface="Pretendard Variable Light" panose="02000003000000020004" pitchFamily="2" charset="-127"/>
-              </a:rPr>
-              <a:t>g</a:t>
-            </a:r>
-            <a:endParaRPr kumimoji="1" lang="ko-KR" altLang="en-US" sz="1000" dirty="0">
-              <a:solidFill>
-                <a:schemeClr val="bg1">
-                  <a:lumMod val="85000"/>
-                </a:schemeClr>
-              </a:solidFill>
-              <a:latin typeface="Pretendard Variable Light" panose="02000003000000020004" pitchFamily="2" charset="-127"/>
-              <a:ea typeface="Pretendard Variable Light" panose="02000003000000020004" pitchFamily="2" charset="-127"/>
-              <a:cs typeface="Pretendard Variable Light" panose="02000003000000020004" pitchFamily="2" charset="-127"/>
-            </a:endParaRPr>
-          </a:p>
-        </p:txBody>
-      </p:sp>
-      <p:sp>
-        <p:nvSpPr>
-          <p:cNvPr id="61" name="TextBox 60">
-            <a:extLst>
-              <a:ext uri="{FF2B5EF4-FFF2-40B4-BE49-F238E27FC236}">
-                <a16:creationId xmlns:a16="http://schemas.microsoft.com/office/drawing/2014/main" id="{7A532AE8-3653-8F44-2FC5-23BA76924A99}"/>
-              </a:ext>
-            </a:extLst>
-          </p:cNvPr>
-          <p:cNvSpPr txBox="1"/>
-          <p:nvPr/>
-        </p:nvSpPr>
-        <p:spPr>
-          <a:xfrm>
-            <a:off x="481948" y="4647259"/>
-            <a:ext cx="744691" cy="184666"/>
-          </a:xfrm>
-          <a:prstGeom prst="rect">
-            <a:avLst/>
-          </a:prstGeom>
-          <a:noFill/>
-        </p:spPr>
-        <p:txBody>
-          <a:bodyPr wrap="square" rtlCol="0">
-            <a:spAutoFit/>
-          </a:bodyPr>
-          <a:lstStyle/>
-          <a:p>
-            <a:r>
-              <a:rPr lang="ko-KR" altLang="en-US" sz="600" b="1" dirty="0">
-                <a:ln>
-                  <a:solidFill>
-                    <a:srgbClr val="4472C4">
-                      <a:alpha val="0"/>
-                    </a:srgbClr>
-                  </a:solidFill>
-                </a:ln>
-                <a:solidFill>
-                  <a:srgbClr val="202946"/>
-                </a:solidFill>
-                <a:latin typeface="Pretendard Variable SemiBold" panose="02000003000000020004" pitchFamily="2" charset="-127"/>
-                <a:ea typeface="Pretendard Variable SemiBold" panose="02000003000000020004" pitchFamily="2" charset="-127"/>
-                <a:cs typeface="Pretendard Variable SemiBold" panose="02000003000000020004" pitchFamily="2" charset="-127"/>
-              </a:rPr>
-              <a:t>나트륨</a:t>
-            </a:r>
-          </a:p>
-        </p:txBody>
-      </p:sp>
-      <p:sp>
-        <p:nvSpPr>
-          <p:cNvPr id="62" name="모서리가 둥근 직사각형 61">
-            <a:extLst>
-              <a:ext uri="{FF2B5EF4-FFF2-40B4-BE49-F238E27FC236}">
-                <a16:creationId xmlns:a16="http://schemas.microsoft.com/office/drawing/2014/main" id="{C2674949-177D-0C49-15B6-A31E837E7626}"/>
-              </a:ext>
-            </a:extLst>
-          </p:cNvPr>
-          <p:cNvSpPr/>
-          <p:nvPr/>
-        </p:nvSpPr>
-        <p:spPr>
-          <a:xfrm>
-            <a:off x="870816" y="4589436"/>
-            <a:ext cx="2985567" cy="306894"/>
-          </a:xfrm>
-          <a:prstGeom prst="roundRect">
-            <a:avLst/>
-          </a:prstGeom>
-          <a:solidFill>
-            <a:schemeClr val="bg1"/>
-          </a:solidFill>
-          <a:ln>
-            <a:solidFill>
-              <a:schemeClr val="bg2">
-                <a:lumMod val="90000"/>
-              </a:schemeClr>
-            </a:solidFill>
-          </a:ln>
-        </p:spPr>
-        <p:style>
-          <a:lnRef idx="2">
-            <a:schemeClr val="accent1">
-              <a:shade val="15000"/>
-            </a:schemeClr>
-          </a:lnRef>
-          <a:fillRef idx="1">
-            <a:schemeClr val="accent1"/>
-          </a:fillRef>
-          <a:effectRef idx="0">
-            <a:schemeClr val="accent1"/>
-          </a:effectRef>
-          <a:fontRef idx="minor">
-            <a:schemeClr val="lt1"/>
-          </a:fontRef>
-        </p:style>
-        <p:txBody>
-          <a:bodyPr rtlCol="0" anchor="ctr"/>
-          <a:lstStyle/>
-          <a:p>
-            <a:pPr algn="ctr"/>
-            <a:endParaRPr kumimoji="1" lang="ko-KR" altLang="en-US"/>
-          </a:p>
-        </p:txBody>
-      </p:sp>
-      <p:sp>
-        <p:nvSpPr>
-          <p:cNvPr id="63" name="TextBox 62">
-            <a:extLst>
-              <a:ext uri="{FF2B5EF4-FFF2-40B4-BE49-F238E27FC236}">
-                <a16:creationId xmlns:a16="http://schemas.microsoft.com/office/drawing/2014/main" id="{7F444B69-4E8D-658B-0FCE-A650D124B944}"/>
-              </a:ext>
-            </a:extLst>
-          </p:cNvPr>
-          <p:cNvSpPr txBox="1"/>
-          <p:nvPr/>
-        </p:nvSpPr>
-        <p:spPr>
-          <a:xfrm>
-            <a:off x="875986" y="4638852"/>
-            <a:ext cx="338482" cy="200055"/>
-          </a:xfrm>
-          <a:prstGeom prst="rect">
-            <a:avLst/>
-          </a:prstGeom>
-          <a:noFill/>
-        </p:spPr>
-        <p:txBody>
-          <a:bodyPr wrap="square" rtlCol="0">
-            <a:spAutoFit/>
-          </a:bodyPr>
-          <a:lstStyle/>
-          <a:p>
-            <a:r>
-              <a:rPr kumimoji="1" lang="en-US" altLang="ko-KR" sz="700" dirty="0">
-                <a:latin typeface="Pretendard Variable Light" panose="02000003000000020004" pitchFamily="2" charset="-127"/>
-                <a:ea typeface="Pretendard Variable Light" panose="02000003000000020004" pitchFamily="2" charset="-127"/>
-                <a:cs typeface="Pretendard Variable Light" panose="02000003000000020004" pitchFamily="2" charset="-127"/>
-              </a:rPr>
-              <a:t>1</a:t>
-            </a:r>
-            <a:endParaRPr kumimoji="1" lang="ko-KR" altLang="en-US" sz="700" dirty="0">
-              <a:latin typeface="Pretendard Variable Light" panose="02000003000000020004" pitchFamily="2" charset="-127"/>
-              <a:ea typeface="Pretendard Variable Light" panose="02000003000000020004" pitchFamily="2" charset="-127"/>
-              <a:cs typeface="Pretendard Variable Light" panose="02000003000000020004" pitchFamily="2" charset="-127"/>
-            </a:endParaRPr>
-          </a:p>
-        </p:txBody>
-      </p:sp>
-      <p:sp>
-        <p:nvSpPr>
-          <p:cNvPr id="64" name="TextBox 63">
-            <a:extLst>
-              <a:ext uri="{FF2B5EF4-FFF2-40B4-BE49-F238E27FC236}">
-                <a16:creationId xmlns:a16="http://schemas.microsoft.com/office/drawing/2014/main" id="{7E05A611-63DA-AC56-CE18-ED5C1A8743EB}"/>
-              </a:ext>
-            </a:extLst>
-          </p:cNvPr>
-          <p:cNvSpPr txBox="1"/>
-          <p:nvPr/>
-        </p:nvSpPr>
-        <p:spPr>
-          <a:xfrm>
-            <a:off x="3466621" y="4619773"/>
-            <a:ext cx="255387" cy="246221"/>
-          </a:xfrm>
-          <a:prstGeom prst="rect">
-            <a:avLst/>
-          </a:prstGeom>
-          <a:noFill/>
-        </p:spPr>
-        <p:txBody>
-          <a:bodyPr wrap="square" rtlCol="0">
-            <a:spAutoFit/>
-          </a:bodyPr>
-          <a:lstStyle/>
-          <a:p>
-            <a:r>
-              <a:rPr kumimoji="1" lang="en-US" altLang="ko-KR" sz="1000" dirty="0">
-                <a:solidFill>
-                  <a:schemeClr val="bg1">
-                    <a:lumMod val="85000"/>
-                  </a:schemeClr>
-                </a:solidFill>
-                <a:latin typeface="Pretendard Variable Light" panose="02000003000000020004" pitchFamily="2" charset="-127"/>
-                <a:ea typeface="Pretendard Variable Light" panose="02000003000000020004" pitchFamily="2" charset="-127"/>
-                <a:cs typeface="Pretendard Variable Light" panose="02000003000000020004" pitchFamily="2" charset="-127"/>
-              </a:rPr>
-              <a:t>g</a:t>
-            </a:r>
-            <a:endParaRPr kumimoji="1" lang="ko-KR" altLang="en-US" sz="1000" dirty="0">
-              <a:solidFill>
-                <a:schemeClr val="bg1">
-                  <a:lumMod val="85000"/>
-                </a:schemeClr>
-              </a:solidFill>
-              <a:latin typeface="Pretendard Variable Light" panose="02000003000000020004" pitchFamily="2" charset="-127"/>
-              <a:ea typeface="Pretendard Variable Light" panose="02000003000000020004" pitchFamily="2" charset="-127"/>
-              <a:cs typeface="Pretendard Variable Light" panose="02000003000000020004" pitchFamily="2" charset="-127"/>
-            </a:endParaRPr>
-          </a:p>
-        </p:txBody>
-      </p:sp>
-      <p:sp>
-        <p:nvSpPr>
-          <p:cNvPr id="65" name="TextBox 64">
-            <a:extLst>
-              <a:ext uri="{FF2B5EF4-FFF2-40B4-BE49-F238E27FC236}">
-                <a16:creationId xmlns:a16="http://schemas.microsoft.com/office/drawing/2014/main" id="{1ACB0A0F-EBFE-0E6B-1138-D9987F55C707}"/>
-              </a:ext>
-            </a:extLst>
-          </p:cNvPr>
-          <p:cNvSpPr txBox="1"/>
-          <p:nvPr/>
-        </p:nvSpPr>
-        <p:spPr>
-          <a:xfrm>
-            <a:off x="4465185" y="4638301"/>
-            <a:ext cx="744691" cy="184666"/>
-          </a:xfrm>
-          <a:prstGeom prst="rect">
-            <a:avLst/>
-          </a:prstGeom>
-          <a:noFill/>
-        </p:spPr>
-        <p:txBody>
-          <a:bodyPr wrap="square" rtlCol="0">
-            <a:spAutoFit/>
-          </a:bodyPr>
-          <a:lstStyle/>
-          <a:p>
-            <a:r>
-              <a:rPr lang="ko-KR" altLang="en-US" sz="600" b="1" dirty="0">
-                <a:ln>
-                  <a:solidFill>
-                    <a:srgbClr val="4472C4">
-                      <a:alpha val="0"/>
-                    </a:srgbClr>
-                  </a:solidFill>
-                </a:ln>
-                <a:solidFill>
-                  <a:srgbClr val="202946"/>
-                </a:solidFill>
-                <a:latin typeface="Pretendard Variable SemiBold" panose="02000003000000020004" pitchFamily="2" charset="-127"/>
-                <a:ea typeface="Pretendard Variable SemiBold" panose="02000003000000020004" pitchFamily="2" charset="-127"/>
-                <a:cs typeface="Pretendard Variable SemiBold" panose="02000003000000020004" pitchFamily="2" charset="-127"/>
-              </a:rPr>
-              <a:t>콜레스테롤</a:t>
-            </a:r>
-          </a:p>
-        </p:txBody>
-      </p:sp>
-      <p:sp>
-        <p:nvSpPr>
-          <p:cNvPr id="66" name="모서리가 둥근 직사각형 65">
-            <a:extLst>
-              <a:ext uri="{FF2B5EF4-FFF2-40B4-BE49-F238E27FC236}">
-                <a16:creationId xmlns:a16="http://schemas.microsoft.com/office/drawing/2014/main" id="{EDBEB249-7BEA-E1AB-EAE2-EB0FC37364D7}"/>
-              </a:ext>
-            </a:extLst>
-          </p:cNvPr>
-          <p:cNvSpPr/>
-          <p:nvPr/>
-        </p:nvSpPr>
-        <p:spPr>
-          <a:xfrm>
-            <a:off x="4985493" y="4574737"/>
-            <a:ext cx="2985567" cy="306894"/>
-          </a:xfrm>
-          <a:prstGeom prst="roundRect">
-            <a:avLst/>
-          </a:prstGeom>
-          <a:solidFill>
-            <a:schemeClr val="bg1"/>
-          </a:solidFill>
-          <a:ln>
-            <a:solidFill>
-              <a:schemeClr val="bg2">
-                <a:lumMod val="90000"/>
-              </a:schemeClr>
-            </a:solidFill>
-          </a:ln>
-        </p:spPr>
-        <p:style>
-          <a:lnRef idx="2">
-            <a:schemeClr val="accent1">
-              <a:shade val="15000"/>
-            </a:schemeClr>
-          </a:lnRef>
-          <a:fillRef idx="1">
-            <a:schemeClr val="accent1"/>
-          </a:fillRef>
-          <a:effectRef idx="0">
-            <a:schemeClr val="accent1"/>
-          </a:effectRef>
-          <a:fontRef idx="minor">
-            <a:schemeClr val="lt1"/>
-          </a:fontRef>
-        </p:style>
-        <p:txBody>
-          <a:bodyPr rtlCol="0" anchor="ctr"/>
-          <a:lstStyle/>
-          <a:p>
-            <a:pPr algn="ctr"/>
-            <a:endParaRPr kumimoji="1" lang="ko-KR" altLang="en-US"/>
-          </a:p>
-        </p:txBody>
-      </p:sp>
-      <p:sp>
-        <p:nvSpPr>
-          <p:cNvPr id="67" name="TextBox 66">
-            <a:extLst>
-              <a:ext uri="{FF2B5EF4-FFF2-40B4-BE49-F238E27FC236}">
-                <a16:creationId xmlns:a16="http://schemas.microsoft.com/office/drawing/2014/main" id="{8193498E-F840-C318-F96A-E7648636ADE1}"/>
-              </a:ext>
-            </a:extLst>
-          </p:cNvPr>
-          <p:cNvSpPr txBox="1"/>
-          <p:nvPr/>
-        </p:nvSpPr>
-        <p:spPr>
-          <a:xfrm>
-            <a:off x="4990663" y="4629894"/>
-            <a:ext cx="338482" cy="200055"/>
-          </a:xfrm>
-          <a:prstGeom prst="rect">
-            <a:avLst/>
-          </a:prstGeom>
-          <a:noFill/>
-        </p:spPr>
-        <p:txBody>
-          <a:bodyPr wrap="square" rtlCol="0">
-            <a:spAutoFit/>
-          </a:bodyPr>
-          <a:lstStyle/>
-          <a:p>
-            <a:r>
-              <a:rPr kumimoji="1" lang="en-US" altLang="ko-KR" sz="700" dirty="0">
-                <a:latin typeface="Pretendard Variable Light" panose="02000003000000020004" pitchFamily="2" charset="-127"/>
-                <a:ea typeface="Pretendard Variable Light" panose="02000003000000020004" pitchFamily="2" charset="-127"/>
-                <a:cs typeface="Pretendard Variable Light" panose="02000003000000020004" pitchFamily="2" charset="-127"/>
-              </a:rPr>
-              <a:t>0.2</a:t>
-            </a:r>
-            <a:endParaRPr kumimoji="1" lang="ko-KR" altLang="en-US" sz="700" dirty="0">
-              <a:latin typeface="Pretendard Variable Light" panose="02000003000000020004" pitchFamily="2" charset="-127"/>
-              <a:ea typeface="Pretendard Variable Light" panose="02000003000000020004" pitchFamily="2" charset="-127"/>
-              <a:cs typeface="Pretendard Variable Light" panose="02000003000000020004" pitchFamily="2" charset="-127"/>
-            </a:endParaRPr>
-          </a:p>
-        </p:txBody>
-      </p:sp>
-      <p:sp>
-        <p:nvSpPr>
-          <p:cNvPr id="68" name="TextBox 67">
-            <a:extLst>
-              <a:ext uri="{FF2B5EF4-FFF2-40B4-BE49-F238E27FC236}">
-                <a16:creationId xmlns:a16="http://schemas.microsoft.com/office/drawing/2014/main" id="{8BE23844-864C-48AA-FEA2-283AF143D5FE}"/>
-              </a:ext>
-            </a:extLst>
-          </p:cNvPr>
-          <p:cNvSpPr txBox="1"/>
-          <p:nvPr/>
-        </p:nvSpPr>
-        <p:spPr>
-          <a:xfrm>
-            <a:off x="7600729" y="4605074"/>
-            <a:ext cx="255387" cy="246221"/>
-          </a:xfrm>
-          <a:prstGeom prst="rect">
-            <a:avLst/>
-          </a:prstGeom>
-          <a:noFill/>
-        </p:spPr>
-        <p:txBody>
-          <a:bodyPr wrap="square" rtlCol="0">
-            <a:spAutoFit/>
-          </a:bodyPr>
-          <a:lstStyle/>
-          <a:p>
-            <a:r>
-              <a:rPr kumimoji="1" lang="en-US" altLang="ko-KR" sz="1000" dirty="0">
-                <a:solidFill>
-                  <a:schemeClr val="bg1">
-                    <a:lumMod val="85000"/>
-                  </a:schemeClr>
-                </a:solidFill>
-                <a:latin typeface="Pretendard Variable Light" panose="02000003000000020004" pitchFamily="2" charset="-127"/>
-                <a:ea typeface="Pretendard Variable Light" panose="02000003000000020004" pitchFamily="2" charset="-127"/>
-                <a:cs typeface="Pretendard Variable Light" panose="02000003000000020004" pitchFamily="2" charset="-127"/>
-              </a:rPr>
-              <a:t>g</a:t>
-            </a:r>
-            <a:endParaRPr kumimoji="1" lang="ko-KR" altLang="en-US" sz="1000" dirty="0">
-              <a:solidFill>
-                <a:schemeClr val="bg1">
-                  <a:lumMod val="85000"/>
-                </a:schemeClr>
-              </a:solidFill>
-              <a:latin typeface="Pretendard Variable Light" panose="02000003000000020004" pitchFamily="2" charset="-127"/>
-              <a:ea typeface="Pretendard Variable Light" panose="02000003000000020004" pitchFamily="2" charset="-127"/>
-              <a:cs typeface="Pretendard Variable Light" panose="02000003000000020004" pitchFamily="2" charset="-127"/>
-            </a:endParaRPr>
-          </a:p>
-        </p:txBody>
-      </p:sp>
-      <p:sp>
-        <p:nvSpPr>
-          <p:cNvPr id="69" name="TextBox 68">
-            <a:extLst>
-              <a:ext uri="{FF2B5EF4-FFF2-40B4-BE49-F238E27FC236}">
-                <a16:creationId xmlns:a16="http://schemas.microsoft.com/office/drawing/2014/main" id="{35DC2678-99A8-DC4D-08FC-E05CF91800C9}"/>
-              </a:ext>
-            </a:extLst>
-          </p:cNvPr>
-          <p:cNvSpPr txBox="1"/>
-          <p:nvPr/>
-        </p:nvSpPr>
-        <p:spPr>
-          <a:xfrm>
-            <a:off x="3940822" y="1979251"/>
-            <a:ext cx="1178392" cy="246221"/>
-          </a:xfrm>
-          <a:prstGeom prst="rect">
-            <a:avLst/>
-          </a:prstGeom>
-          <a:noFill/>
-        </p:spPr>
-        <p:txBody>
-          <a:bodyPr wrap="square" rtlCol="0">
-            <a:spAutoFit/>
-          </a:bodyPr>
-          <a:lstStyle/>
-          <a:p>
-            <a:r>
-              <a:rPr lang="ko-KR" altLang="en-US" sz="1000" b="1" dirty="0">
-                <a:ln>
-                  <a:solidFill>
-                    <a:srgbClr val="4472C4">
-                      <a:alpha val="0"/>
-                    </a:srgbClr>
-                  </a:solidFill>
-                </a:ln>
-                <a:solidFill>
-                  <a:schemeClr val="bg1"/>
-                </a:solidFill>
-                <a:latin typeface="Pretendard Variable SemiBold" panose="02000003000000020004" pitchFamily="2" charset="-127"/>
-                <a:ea typeface="Pretendard Variable SemiBold" panose="02000003000000020004" pitchFamily="2" charset="-127"/>
-                <a:cs typeface="Pretendard Variable SemiBold" panose="02000003000000020004" pitchFamily="2" charset="-127"/>
-              </a:rPr>
-              <a:t>영양소 정보</a:t>
-            </a:r>
-          </a:p>
-        </p:txBody>
-      </p:sp>
-      <p:sp>
-        <p:nvSpPr>
-          <p:cNvPr id="14" name="TextBox 13">
-            <a:extLst>
-              <a:ext uri="{FF2B5EF4-FFF2-40B4-BE49-F238E27FC236}">
-                <a16:creationId xmlns:a16="http://schemas.microsoft.com/office/drawing/2014/main" id="{85FEA354-7B1F-3524-1846-90DBA008693D}"/>
-              </a:ext>
-            </a:extLst>
-          </p:cNvPr>
-          <p:cNvSpPr txBox="1"/>
-          <p:nvPr/>
-        </p:nvSpPr>
-        <p:spPr>
-          <a:xfrm>
-            <a:off x="3594314" y="2174938"/>
-            <a:ext cx="2210169" cy="200055"/>
-          </a:xfrm>
-          <a:prstGeom prst="rect">
-            <a:avLst/>
-          </a:prstGeom>
-          <a:noFill/>
-        </p:spPr>
-        <p:txBody>
-          <a:bodyPr wrap="square" rtlCol="0">
-            <a:spAutoFit/>
-          </a:bodyPr>
-          <a:lstStyle/>
-          <a:p>
-            <a:r>
-              <a:rPr lang="ko-KR" altLang="en-US" sz="700" dirty="0">
-                <a:ln>
-                  <a:solidFill>
-                    <a:srgbClr val="4472C4">
-                      <a:alpha val="0"/>
-                    </a:srgbClr>
-                  </a:solidFill>
-                </a:ln>
-                <a:solidFill>
-                  <a:schemeClr val="bg1"/>
-                </a:solidFill>
-                <a:latin typeface="Pretendard Variable Light" panose="02000003000000020004" pitchFamily="2" charset="-127"/>
-                <a:ea typeface="Pretendard Variable Light" panose="02000003000000020004" pitchFamily="2" charset="-127"/>
-                <a:cs typeface="Pretendard Variable Light" panose="02000003000000020004" pitchFamily="2" charset="-127"/>
-              </a:rPr>
-              <a:t>섭취한 영양소 정보를 입력해 주세요</a:t>
-            </a:r>
-            <a:r>
-              <a:rPr lang="en-US" altLang="ko-KR" sz="700" dirty="0">
-                <a:ln>
-                  <a:solidFill>
-                    <a:srgbClr val="4472C4">
-                      <a:alpha val="0"/>
-                    </a:srgbClr>
-                  </a:solidFill>
-                </a:ln>
-                <a:solidFill>
-                  <a:schemeClr val="bg1"/>
-                </a:solidFill>
-                <a:latin typeface="Pretendard Variable Light" panose="02000003000000020004" pitchFamily="2" charset="-127"/>
-                <a:ea typeface="Pretendard Variable Light" panose="02000003000000020004" pitchFamily="2" charset="-127"/>
-                <a:cs typeface="Pretendard Variable Light" panose="02000003000000020004" pitchFamily="2" charset="-127"/>
-              </a:rPr>
-              <a:t>.</a:t>
-            </a:r>
-            <a:endParaRPr lang="ko-KR" altLang="en-US" sz="700" dirty="0">
-              <a:ln>
-                <a:solidFill>
-                  <a:srgbClr val="4472C4">
-                    <a:alpha val="0"/>
-                  </a:srgbClr>
-                </a:solidFill>
-              </a:ln>
-              <a:solidFill>
-                <a:schemeClr val="bg1"/>
-              </a:solidFill>
-              <a:latin typeface="Pretendard Variable Light" panose="02000003000000020004" pitchFamily="2" charset="-127"/>
-              <a:ea typeface="Pretendard Variable Light" panose="02000003000000020004" pitchFamily="2" charset="-127"/>
-              <a:cs typeface="Pretendard Variable Light" panose="02000003000000020004" pitchFamily="2" charset="-127"/>
-            </a:endParaRPr>
-          </a:p>
-        </p:txBody>
-      </p:sp>
     </p:spTree>
     <p:extLst>
       <p:ext uri="{BB962C8B-B14F-4D97-AF65-F5344CB8AC3E}">
-        <p14:creationId xmlns:p14="http://schemas.microsoft.com/office/powerpoint/2010/main" val="3903989862"/>
+        <p14:creationId xmlns:p14="http://schemas.microsoft.com/office/powerpoint/2010/main" val="480663158"/>
       </p:ext>
     </p:extLst>
   </p:cSld>
@@ -18062,40 +16659,7 @@
                 <a:ea typeface="Pretendard Variable SemiBold" panose="02000003000000020004" pitchFamily="2" charset="-127"/>
                 <a:cs typeface="Pretendard Variable SemiBold" panose="02000003000000020004" pitchFamily="2" charset="-127"/>
               </a:rPr>
-              <a:t>위험도 분석 결과 </a:t>
-            </a:r>
-            <a:r>
-              <a:rPr lang="en-US" altLang="ko-KR" sz="1600" dirty="0">
-                <a:solidFill>
-                  <a:srgbClr val="4D5F8F"/>
-                </a:solidFill>
-                <a:latin typeface="Pretendard Variable SemiBold" panose="02000003000000020004" pitchFamily="2" charset="-127"/>
-                <a:ea typeface="Pretendard Variable SemiBold" panose="02000003000000020004" pitchFamily="2" charset="-127"/>
-                <a:cs typeface="Pretendard Variable SemiBold" panose="02000003000000020004" pitchFamily="2" charset="-127"/>
-              </a:rPr>
-              <a:t>-</a:t>
-            </a:r>
-            <a:r>
-              <a:rPr lang="ko-KR" altLang="en-US" sz="1600" dirty="0">
-                <a:solidFill>
-                  <a:srgbClr val="4D5F8F"/>
-                </a:solidFill>
-                <a:latin typeface="Pretendard Variable SemiBold" panose="02000003000000020004" pitchFamily="2" charset="-127"/>
-                <a:ea typeface="Pretendard Variable SemiBold" panose="02000003000000020004" pitchFamily="2" charset="-127"/>
-                <a:cs typeface="Pretendard Variable SemiBold" panose="02000003000000020004" pitchFamily="2" charset="-127"/>
-              </a:rPr>
-              <a:t> </a:t>
-            </a:r>
-            <a:r>
-              <a:rPr lang="en-US" altLang="ko-KR" sz="1600" dirty="0">
-                <a:solidFill>
-                  <a:srgbClr val="4D5F8F"/>
-                </a:solidFill>
-                <a:latin typeface="Pretendard Variable SemiBold" panose="02000003000000020004" pitchFamily="2" charset="-127"/>
-                <a:ea typeface="Pretendard Variable SemiBold" panose="02000003000000020004" pitchFamily="2" charset="-127"/>
-                <a:cs typeface="Pretendard Variable SemiBold" panose="02000003000000020004" pitchFamily="2" charset="-127"/>
-              </a:rPr>
-              <a:t>1</a:t>
+              <a:t>위험도 분석 결과</a:t>
             </a:r>
             <a:endParaRPr lang="ko-KR" altLang="en-US" sz="1600" dirty="0">
               <a:solidFill>
@@ -18397,7 +16961,7 @@
                           <a:ea typeface="Pretendard Variable SemiBold" panose="02000003000000020004" pitchFamily="2" charset="-127"/>
                           <a:cs typeface="Pretendard Variable SemiBold" panose="02000003000000020004" pitchFamily="2" charset="-127"/>
                         </a:rPr>
-                        <a:t> 예측된 위험도</a:t>
+                        <a:t> 예측 결과 노출</a:t>
                       </a:r>
                       <a:endParaRPr lang="en-US" altLang="ko-KR" sz="1000" b="1" i="0" kern="1200" dirty="0">
                         <a:ln>
@@ -18471,8 +17035,171 @@
                           <a:ea typeface="Pretendard Variable SemiBold" panose="02000003000000020004" pitchFamily="2" charset="-127"/>
                           <a:cs typeface="Pretendard Variable SemiBold" panose="02000003000000020004" pitchFamily="2" charset="-127"/>
                         </a:rPr>
-                        <a:t> 위험도 예측 그래프 노출</a:t>
-                      </a:r>
+                        <a:t> 총 콜레스테롤 예측 결과 노출</a:t>
+                      </a:r>
+                      <a:endParaRPr lang="en-US" altLang="ko-KR" sz="1000" b="1" i="0" kern="1200" dirty="0">
+                        <a:ln>
+                          <a:solidFill>
+                            <a:srgbClr val="4472C4">
+                              <a:alpha val="0"/>
+                            </a:srgbClr>
+                          </a:solidFill>
+                        </a:ln>
+                        <a:solidFill>
+                          <a:srgbClr val="202946"/>
+                        </a:solidFill>
+                        <a:latin typeface="Pretendard Variable SemiBold" panose="02000003000000020004" pitchFamily="2" charset="-127"/>
+                        <a:ea typeface="Pretendard Variable SemiBold" panose="02000003000000020004" pitchFamily="2" charset="-127"/>
+                        <a:cs typeface="Pretendard Variable SemiBold" panose="02000003000000020004" pitchFamily="2" charset="-127"/>
+                      </a:endParaRPr>
+                    </a:p>
+                    <a:p>
+                      <a:pPr algn="l" fontAlgn="ctr">
+                        <a:buNone/>
+                      </a:pPr>
+                      <a:r>
+                        <a:rPr lang="ko-KR" altLang="en-US" sz="1000" b="1" i="0" kern="1200" dirty="0">
+                          <a:ln>
+                            <a:solidFill>
+                              <a:srgbClr val="4472C4">
+                                <a:alpha val="0"/>
+                              </a:srgbClr>
+                            </a:solidFill>
+                          </a:ln>
+                          <a:solidFill>
+                            <a:srgbClr val="202946"/>
+                          </a:solidFill>
+                          <a:latin typeface="Pretendard Variable SemiBold" panose="02000003000000020004" pitchFamily="2" charset="-127"/>
+                          <a:ea typeface="Pretendard Variable SemiBold" panose="02000003000000020004" pitchFamily="2" charset="-127"/>
+                          <a:cs typeface="Pretendard Variable SemiBold" panose="02000003000000020004" pitchFamily="2" charset="-127"/>
+                        </a:rPr>
+                        <a:t> </a:t>
+                      </a:r>
+                      <a:r>
+                        <a:rPr lang="en-US" altLang="ko-KR" sz="1000" b="1" i="0" kern="1200" dirty="0">
+                          <a:ln>
+                            <a:solidFill>
+                              <a:srgbClr val="4472C4">
+                                <a:alpha val="0"/>
+                              </a:srgbClr>
+                            </a:solidFill>
+                          </a:ln>
+                          <a:solidFill>
+                            <a:srgbClr val="202946"/>
+                          </a:solidFill>
+                          <a:latin typeface="Pretendard Variable SemiBold" panose="02000003000000020004" pitchFamily="2" charset="-127"/>
+                          <a:ea typeface="Pretendard Variable SemiBold" panose="02000003000000020004" pitchFamily="2" charset="-127"/>
+                          <a:cs typeface="Pretendard Variable SemiBold" panose="02000003000000020004" pitchFamily="2" charset="-127"/>
+                        </a:rPr>
+                        <a:t>-</a:t>
+                      </a:r>
+                      <a:r>
+                        <a:rPr lang="ko-KR" altLang="en-US" sz="1000" b="1" i="0" kern="1200" dirty="0">
+                          <a:ln>
+                            <a:solidFill>
+                              <a:srgbClr val="4472C4">
+                                <a:alpha val="0"/>
+                              </a:srgbClr>
+                            </a:solidFill>
+                          </a:ln>
+                          <a:solidFill>
+                            <a:srgbClr val="202946"/>
+                          </a:solidFill>
+                          <a:latin typeface="Pretendard Variable SemiBold" panose="02000003000000020004" pitchFamily="2" charset="-127"/>
+                          <a:ea typeface="Pretendard Variable SemiBold" panose="02000003000000020004" pitchFamily="2" charset="-127"/>
+                          <a:cs typeface="Pretendard Variable SemiBold" panose="02000003000000020004" pitchFamily="2" charset="-127"/>
+                        </a:rPr>
+                        <a:t> 위험도 등급 노출</a:t>
+                      </a:r>
+                      <a:endParaRPr lang="en-US" altLang="ko-KR" sz="1000" b="1" i="0" kern="1200" dirty="0">
+                        <a:ln>
+                          <a:solidFill>
+                            <a:srgbClr val="4472C4">
+                              <a:alpha val="0"/>
+                            </a:srgbClr>
+                          </a:solidFill>
+                        </a:ln>
+                        <a:solidFill>
+                          <a:srgbClr val="202946"/>
+                        </a:solidFill>
+                        <a:latin typeface="Pretendard Variable SemiBold" panose="02000003000000020004" pitchFamily="2" charset="-127"/>
+                        <a:ea typeface="Pretendard Variable SemiBold" panose="02000003000000020004" pitchFamily="2" charset="-127"/>
+                        <a:cs typeface="Pretendard Variable SemiBold" panose="02000003000000020004" pitchFamily="2" charset="-127"/>
+                      </a:endParaRPr>
+                    </a:p>
+                    <a:p>
+                      <a:pPr algn="l" fontAlgn="ctr">
+                        <a:buNone/>
+                      </a:pPr>
+                      <a:r>
+                        <a:rPr lang="ko-KR" altLang="en-US" sz="1000" b="1" i="0" kern="1200" dirty="0">
+                          <a:ln>
+                            <a:solidFill>
+                              <a:srgbClr val="4472C4">
+                                <a:alpha val="0"/>
+                              </a:srgbClr>
+                            </a:solidFill>
+                          </a:ln>
+                          <a:solidFill>
+                            <a:srgbClr val="202946"/>
+                          </a:solidFill>
+                          <a:latin typeface="Pretendard Variable SemiBold" panose="02000003000000020004" pitchFamily="2" charset="-127"/>
+                          <a:ea typeface="Pretendard Variable SemiBold" panose="02000003000000020004" pitchFamily="2" charset="-127"/>
+                          <a:cs typeface="Pretendard Variable SemiBold" panose="02000003000000020004" pitchFamily="2" charset="-127"/>
+                        </a:rPr>
+                        <a:t> </a:t>
+                      </a:r>
+                      <a:r>
+                        <a:rPr lang="en-US" altLang="ko-KR" sz="1000" b="1" i="0" kern="1200" dirty="0">
+                          <a:ln>
+                            <a:solidFill>
+                              <a:srgbClr val="4472C4">
+                                <a:alpha val="0"/>
+                              </a:srgbClr>
+                            </a:solidFill>
+                          </a:ln>
+                          <a:solidFill>
+                            <a:srgbClr val="202946"/>
+                          </a:solidFill>
+                          <a:latin typeface="Pretendard Variable SemiBold" panose="02000003000000020004" pitchFamily="2" charset="-127"/>
+                          <a:ea typeface="Pretendard Variable SemiBold" panose="02000003000000020004" pitchFamily="2" charset="-127"/>
+                          <a:cs typeface="Pretendard Variable SemiBold" panose="02000003000000020004" pitchFamily="2" charset="-127"/>
+                        </a:rPr>
+                        <a:t>-</a:t>
+                      </a:r>
+                      <a:r>
+                        <a:rPr lang="ko-KR" altLang="en-US" sz="1000" b="1" i="0" kern="1200" dirty="0">
+                          <a:ln>
+                            <a:solidFill>
+                              <a:srgbClr val="4472C4">
+                                <a:alpha val="0"/>
+                              </a:srgbClr>
+                            </a:solidFill>
+                          </a:ln>
+                          <a:solidFill>
+                            <a:srgbClr val="202946"/>
+                          </a:solidFill>
+                          <a:latin typeface="Pretendard Variable SemiBold" panose="02000003000000020004" pitchFamily="2" charset="-127"/>
+                          <a:ea typeface="Pretendard Variable SemiBold" panose="02000003000000020004" pitchFamily="2" charset="-127"/>
+                          <a:cs typeface="Pretendard Variable SemiBold" panose="02000003000000020004" pitchFamily="2" charset="-127"/>
+                        </a:rPr>
+                        <a:t> 영양소 섭취 패턴 노출</a:t>
+                      </a:r>
+                      <a:endParaRPr lang="en-US" altLang="ko-KR" sz="1000" b="1" i="0" kern="1200" dirty="0">
+                        <a:ln>
+                          <a:solidFill>
+                            <a:srgbClr val="4472C4">
+                              <a:alpha val="0"/>
+                            </a:srgbClr>
+                          </a:solidFill>
+                        </a:ln>
+                        <a:solidFill>
+                          <a:srgbClr val="202946"/>
+                        </a:solidFill>
+                        <a:latin typeface="Pretendard Variable SemiBold" panose="02000003000000020004" pitchFamily="2" charset="-127"/>
+                        <a:ea typeface="Pretendard Variable SemiBold" panose="02000003000000020004" pitchFamily="2" charset="-127"/>
+                        <a:cs typeface="Pretendard Variable SemiBold" panose="02000003000000020004" pitchFamily="2" charset="-127"/>
+                      </a:endParaRPr>
                     </a:p>
                   </a:txBody>
                   <a:tcPr marL="4265" marR="4265" marT="4265" marB="0" anchor="ctr">
@@ -18629,7 +17356,43 @@
                           <a:ea typeface="Pretendard Variable SemiBold" panose="02000003000000020004" pitchFamily="2" charset="-127"/>
                           <a:cs typeface="Pretendard Variable SemiBold" panose="02000003000000020004" pitchFamily="2" charset="-127"/>
                         </a:rPr>
-                        <a:t> 영양소 섭취 패턴</a:t>
+                        <a:t> </a:t>
+                      </a:r>
+                      <a:r>
+                        <a:rPr lang="ko-KR" altLang="en-US" sz="1000" b="1" i="0" kern="1200" dirty="0" err="1">
+                          <a:ln>
+                            <a:solidFill>
+                              <a:srgbClr val="4472C4">
+                                <a:alpha val="0"/>
+                              </a:srgbClr>
+                            </a:solidFill>
+                          </a:ln>
+                          <a:solidFill>
+                            <a:srgbClr val="202946"/>
+                          </a:solidFill>
+                          <a:latin typeface="Pretendard Variable SemiBold" panose="02000003000000020004" pitchFamily="2" charset="-127"/>
+                          <a:ea typeface="Pretendard Variable SemiBold" panose="02000003000000020004" pitchFamily="2" charset="-127"/>
+                          <a:cs typeface="Pretendard Variable SemiBold" panose="02000003000000020004" pitchFamily="2" charset="-127"/>
+                        </a:rPr>
+                        <a:t>메인화면으로</a:t>
+                      </a:r>
+                      <a:r>
+                        <a:rPr lang="ko-KR" altLang="en-US" sz="1000" b="1" i="0" kern="1200" dirty="0">
+                          <a:ln>
+                            <a:solidFill>
+                              <a:srgbClr val="4472C4">
+                                <a:alpha val="0"/>
+                              </a:srgbClr>
+                            </a:solidFill>
+                          </a:ln>
+                          <a:solidFill>
+                            <a:srgbClr val="202946"/>
+                          </a:solidFill>
+                          <a:latin typeface="Pretendard Variable SemiBold" panose="02000003000000020004" pitchFamily="2" charset="-127"/>
+                          <a:ea typeface="Pretendard Variable SemiBold" panose="02000003000000020004" pitchFamily="2" charset="-127"/>
+                          <a:cs typeface="Pretendard Variable SemiBold" panose="02000003000000020004" pitchFamily="2" charset="-127"/>
+                        </a:rPr>
+                        <a:t> 돌아가기</a:t>
                       </a:r>
                       <a:endParaRPr lang="en-US" altLang="ko-KR" sz="1000" b="1" i="0" kern="1200" dirty="0">
                         <a:ln>
@@ -18703,7 +17466,43 @@
                           <a:ea typeface="Pretendard Variable SemiBold" panose="02000003000000020004" pitchFamily="2" charset="-127"/>
                           <a:cs typeface="Pretendard Variable SemiBold" panose="02000003000000020004" pitchFamily="2" charset="-127"/>
                         </a:rPr>
-                        <a:t> 영양소 섭취 패턴 노출</a:t>
+                        <a:t> 완료 후 </a:t>
+                      </a:r>
+                      <a:r>
+                        <a:rPr lang="ko-KR" altLang="en-US" sz="1000" b="1" i="0" kern="1200" dirty="0" err="1">
+                          <a:ln>
+                            <a:solidFill>
+                              <a:srgbClr val="4472C4">
+                                <a:alpha val="0"/>
+                              </a:srgbClr>
+                            </a:solidFill>
+                          </a:ln>
+                          <a:solidFill>
+                            <a:srgbClr val="202946"/>
+                          </a:solidFill>
+                          <a:latin typeface="Pretendard Variable SemiBold" panose="02000003000000020004" pitchFamily="2" charset="-127"/>
+                          <a:ea typeface="Pretendard Variable SemiBold" panose="02000003000000020004" pitchFamily="2" charset="-127"/>
+                          <a:cs typeface="Pretendard Variable SemiBold" panose="02000003000000020004" pitchFamily="2" charset="-127"/>
+                        </a:rPr>
+                        <a:t>메인화면으로</a:t>
+                      </a:r>
+                      <a:r>
+                        <a:rPr lang="ko-KR" altLang="en-US" sz="1000" b="1" i="0" kern="1200" dirty="0">
+                          <a:ln>
+                            <a:solidFill>
+                              <a:srgbClr val="4472C4">
+                                <a:alpha val="0"/>
+                              </a:srgbClr>
+                            </a:solidFill>
+                          </a:ln>
+                          <a:solidFill>
+                            <a:srgbClr val="202946"/>
+                          </a:solidFill>
+                          <a:latin typeface="Pretendard Variable SemiBold" panose="02000003000000020004" pitchFamily="2" charset="-127"/>
+                          <a:ea typeface="Pretendard Variable SemiBold" panose="02000003000000020004" pitchFamily="2" charset="-127"/>
+                          <a:cs typeface="Pretendard Variable SemiBold" panose="02000003000000020004" pitchFamily="2" charset="-127"/>
+                        </a:rPr>
+                        <a:t> 돌아가는 버튼 노출</a:t>
                       </a:r>
                       <a:endParaRPr lang="en-US" altLang="ko-KR" sz="1000" b="1" i="0" kern="1200" dirty="0">
                         <a:ln>
@@ -18786,7 +17585,7 @@
         </p:nvSpPr>
         <p:spPr>
           <a:xfrm>
-            <a:off x="57110" y="2834854"/>
+            <a:off x="53201" y="2197580"/>
             <a:ext cx="322673" cy="322673"/>
           </a:xfrm>
           <a:prstGeom prst="ellipse">
@@ -18856,7 +17655,7 @@
         </p:nvSpPr>
         <p:spPr>
           <a:xfrm>
-            <a:off x="57110" y="3743601"/>
+            <a:off x="26600" y="5233301"/>
             <a:ext cx="322673" cy="322673"/>
           </a:xfrm>
           <a:prstGeom prst="ellipse">
@@ -18914,10 +17713,10 @@
       </p:sp>
       <p:pic>
         <p:nvPicPr>
-          <p:cNvPr id="2" name="그림 1">
+          <p:cNvPr id="6" name="그림 5">
             <a:extLst>
               <a:ext uri="{FF2B5EF4-FFF2-40B4-BE49-F238E27FC236}">
-                <a16:creationId xmlns:a16="http://schemas.microsoft.com/office/drawing/2014/main" id="{F0D95E81-FC5F-A574-D260-FCA02B30A4A7}"/>
+                <a16:creationId xmlns:a16="http://schemas.microsoft.com/office/drawing/2014/main" id="{E7E06D1B-FBD8-2BE1-2FFF-7DC7AA5258D4}"/>
               </a:ext>
             </a:extLst>
           </p:cNvPr>
@@ -18928,80 +17727,15 @@
         </p:nvPicPr>
         <p:blipFill>
           <a:blip r:embed="rId4"/>
+          <a:srcRect b="6411"/>
           <a:stretch>
             <a:fillRect/>
           </a:stretch>
         </p:blipFill>
         <p:spPr>
           <a:xfrm>
-            <a:off x="421593" y="1504749"/>
-            <a:ext cx="7772400" cy="4221228"/>
-          </a:xfrm>
-          <a:prstGeom prst="rect">
-            <a:avLst/>
-          </a:prstGeom>
-        </p:spPr>
-      </p:pic>
-    </p:spTree>
-    <p:extLst>
-      <p:ext uri="{BB962C8B-B14F-4D97-AF65-F5344CB8AC3E}">
-        <p14:creationId xmlns:p14="http://schemas.microsoft.com/office/powerpoint/2010/main" val="349482868"/>
-      </p:ext>
-    </p:extLst>
-  </p:cSld>
-  <p:clrMapOvr>
-    <a:masterClrMapping/>
-  </p:clrMapOvr>
-</p:sld>
-</file>
-
-<file path=ppt/slides/slide9.xml><?xml version="1.0" encoding="utf-8"?>
-<p:sld xmlns:a="http://schemas.openxmlformats.org/drawingml/2006/main" xmlns:r="http://schemas.openxmlformats.org/officeDocument/2006/relationships" xmlns:p="http://schemas.openxmlformats.org/presentationml/2006/main">
-  <p:cSld>
-    <p:spTree>
-      <p:nvGrpSpPr>
-        <p:cNvPr id="1" name="">
-          <a:extLst>
-            <a:ext uri="{FF2B5EF4-FFF2-40B4-BE49-F238E27FC236}">
-              <a16:creationId xmlns:a16="http://schemas.microsoft.com/office/drawing/2014/main" id="{E92B9B1A-2C14-83DE-94FD-805E11CF2833}"/>
-            </a:ext>
-          </a:extLst>
-        </p:cNvPr>
-        <p:cNvGrpSpPr/>
-        <p:nvPr/>
-      </p:nvGrpSpPr>
-      <p:grpSpPr>
-        <a:xfrm>
-          <a:off x="0" y="0"/>
-          <a:ext cx="0" cy="0"/>
-          <a:chOff x="0" y="0"/>
-          <a:chExt cx="0" cy="0"/>
-        </a:xfrm>
-      </p:grpSpPr>
-      <p:pic>
-        <p:nvPicPr>
-          <p:cNvPr id="5" name="그림 4">
-            <a:extLst>
-              <a:ext uri="{FF2B5EF4-FFF2-40B4-BE49-F238E27FC236}">
-                <a16:creationId xmlns:a16="http://schemas.microsoft.com/office/drawing/2014/main" id="{9C073369-29B1-5881-C498-C720DC53EB61}"/>
-              </a:ext>
-            </a:extLst>
-          </p:cNvPr>
-          <p:cNvPicPr>
-            <a:picLocks noChangeAspect="1"/>
-          </p:cNvPicPr>
-          <p:nvPr/>
-        </p:nvPicPr>
-        <p:blipFill>
-          <a:blip r:embed="rId3"/>
-          <a:stretch>
-            <a:fillRect/>
-          </a:stretch>
-        </p:blipFill>
-        <p:spPr>
-          <a:xfrm>
-            <a:off x="-1" y="0"/>
-            <a:ext cx="12192001" cy="6861745"/>
+            <a:off x="375874" y="1504749"/>
+            <a:ext cx="7772400" cy="4233184"/>
           </a:xfrm>
           <a:prstGeom prst="rect">
             <a:avLst/>
@@ -19010,10 +17744,10 @@
       </p:pic>
       <p:sp>
         <p:nvSpPr>
-          <p:cNvPr id="10" name="모서리가 둥근 직사각형 9">
+          <p:cNvPr id="7" name="직사각형 6">
             <a:extLst>
               <a:ext uri="{FF2B5EF4-FFF2-40B4-BE49-F238E27FC236}">
-                <a16:creationId xmlns:a16="http://schemas.microsoft.com/office/drawing/2014/main" id="{6D562A34-A574-8DBA-F1E9-E260D3838083}"/>
+                <a16:creationId xmlns:a16="http://schemas.microsoft.com/office/drawing/2014/main" id="{904265C6-3409-4CC8-DD04-2A0C7BB523B4}"/>
               </a:ext>
             </a:extLst>
           </p:cNvPr>
@@ -19021,936 +17755,15 @@
           <p:nvPr/>
         </p:nvSpPr>
         <p:spPr>
-          <a:xfrm flipH="1">
-            <a:off x="375874" y="407856"/>
-            <a:ext cx="45719" cy="641829"/>
-          </a:xfrm>
-          <a:prstGeom prst="roundRect">
-            <a:avLst/>
-          </a:prstGeom>
-          <a:solidFill>
-            <a:srgbClr val="203070"/>
-          </a:solidFill>
-        </p:spPr>
-        <p:style>
-          <a:lnRef idx="2">
-            <a:schemeClr val="accent1">
-              <a:shade val="15000"/>
-            </a:schemeClr>
-          </a:lnRef>
-          <a:fillRef idx="1">
-            <a:schemeClr val="accent1"/>
-          </a:fillRef>
-          <a:effectRef idx="0">
-            <a:schemeClr val="accent1"/>
-          </a:effectRef>
-          <a:fontRef idx="minor">
-            <a:schemeClr val="lt1"/>
-          </a:fontRef>
-        </p:style>
-        <p:txBody>
-          <a:bodyPr rtlCol="0" anchor="ctr"/>
-          <a:lstStyle/>
-          <a:p>
-            <a:pPr algn="ctr"/>
-            <a:endParaRPr kumimoji="1" lang="ko-KR" altLang="en-US"/>
-          </a:p>
-        </p:txBody>
-      </p:sp>
-      <p:sp>
-        <p:nvSpPr>
-          <p:cNvPr id="11" name="TextBox 10">
-            <a:extLst>
-              <a:ext uri="{FF2B5EF4-FFF2-40B4-BE49-F238E27FC236}">
-                <a16:creationId xmlns:a16="http://schemas.microsoft.com/office/drawing/2014/main" id="{7FB00C25-E2A5-3A34-A49A-A91805A3D04D}"/>
-              </a:ext>
-            </a:extLst>
-          </p:cNvPr>
-          <p:cNvSpPr txBox="1"/>
-          <p:nvPr/>
-        </p:nvSpPr>
-        <p:spPr>
-          <a:xfrm>
-            <a:off x="519779" y="358229"/>
-            <a:ext cx="9823121" cy="738664"/>
-          </a:xfrm>
-          <a:prstGeom prst="rect">
-            <a:avLst/>
-          </a:prstGeom>
-          <a:noFill/>
-        </p:spPr>
-        <p:txBody>
-          <a:bodyPr wrap="square" rtlCol="0">
-            <a:spAutoFit/>
-          </a:bodyPr>
-          <a:lstStyle/>
-          <a:p>
-            <a:r>
-              <a:rPr lang="ko-KR" altLang="en-US" sz="2600" b="1" dirty="0">
-                <a:solidFill>
-                  <a:srgbClr val="202946"/>
-                </a:solidFill>
-                <a:effectLst/>
-                <a:latin typeface="Pretendard Variable ExtraBold" panose="02000003000000020004" pitchFamily="2" charset="-127"/>
-                <a:ea typeface="Pretendard Variable ExtraBold" panose="02000003000000020004" pitchFamily="2" charset="-127"/>
-                <a:cs typeface="Pretendard Variable ExtraBold" panose="02000003000000020004" pitchFamily="2" charset="-127"/>
-              </a:rPr>
-              <a:t>화면 설계서</a:t>
-            </a:r>
-            <a:endParaRPr lang="en-US" altLang="ko-KR" sz="2600" b="1" dirty="0">
-              <a:solidFill>
-                <a:srgbClr val="202946"/>
-              </a:solidFill>
-              <a:effectLst/>
-              <a:latin typeface="Pretendard Variable ExtraBold" panose="02000003000000020004" pitchFamily="2" charset="-127"/>
-              <a:ea typeface="Pretendard Variable ExtraBold" panose="02000003000000020004" pitchFamily="2" charset="-127"/>
-              <a:cs typeface="Pretendard Variable ExtraBold" panose="02000003000000020004" pitchFamily="2" charset="-127"/>
-            </a:endParaRPr>
-          </a:p>
-          <a:p>
-            <a:r>
-              <a:rPr lang="ko-KR" altLang="en-US" sz="1600" dirty="0">
-                <a:solidFill>
-                  <a:srgbClr val="4D5F8F"/>
-                </a:solidFill>
-                <a:latin typeface="Pretendard Variable SemiBold" panose="02000003000000020004" pitchFamily="2" charset="-127"/>
-                <a:ea typeface="Pretendard Variable SemiBold" panose="02000003000000020004" pitchFamily="2" charset="-127"/>
-                <a:cs typeface="Pretendard Variable SemiBold" panose="02000003000000020004" pitchFamily="2" charset="-127"/>
-              </a:rPr>
-              <a:t>위험도 분석 결과 </a:t>
-            </a:r>
-            <a:r>
-              <a:rPr lang="en-US" altLang="ko-KR" sz="1600" dirty="0">
-                <a:solidFill>
-                  <a:srgbClr val="4D5F8F"/>
-                </a:solidFill>
-                <a:latin typeface="Pretendard Variable SemiBold" panose="02000003000000020004" pitchFamily="2" charset="-127"/>
-                <a:ea typeface="Pretendard Variable SemiBold" panose="02000003000000020004" pitchFamily="2" charset="-127"/>
-                <a:cs typeface="Pretendard Variable SemiBold" panose="02000003000000020004" pitchFamily="2" charset="-127"/>
-              </a:rPr>
-              <a:t>-</a:t>
-            </a:r>
-            <a:r>
-              <a:rPr lang="ko-KR" altLang="en-US" sz="1600" dirty="0">
-                <a:solidFill>
-                  <a:srgbClr val="4D5F8F"/>
-                </a:solidFill>
-                <a:latin typeface="Pretendard Variable SemiBold" panose="02000003000000020004" pitchFamily="2" charset="-127"/>
-                <a:ea typeface="Pretendard Variable SemiBold" panose="02000003000000020004" pitchFamily="2" charset="-127"/>
-                <a:cs typeface="Pretendard Variable SemiBold" panose="02000003000000020004" pitchFamily="2" charset="-127"/>
-              </a:rPr>
-              <a:t> </a:t>
-            </a:r>
-            <a:r>
-              <a:rPr lang="en-US" altLang="ko-KR" sz="1600" dirty="0">
-                <a:solidFill>
-                  <a:srgbClr val="4D5F8F"/>
-                </a:solidFill>
-                <a:latin typeface="Pretendard Variable SemiBold" panose="02000003000000020004" pitchFamily="2" charset="-127"/>
-                <a:ea typeface="Pretendard Variable SemiBold" panose="02000003000000020004" pitchFamily="2" charset="-127"/>
-                <a:cs typeface="Pretendard Variable SemiBold" panose="02000003000000020004" pitchFamily="2" charset="-127"/>
-              </a:rPr>
-              <a:t>2</a:t>
-            </a:r>
-            <a:endParaRPr lang="ko-KR" altLang="en-US" sz="1600" dirty="0">
-              <a:solidFill>
-                <a:srgbClr val="4D5F8F"/>
-              </a:solidFill>
-              <a:effectLst/>
-              <a:latin typeface="Pretendard Variable SemiBold" panose="02000003000000020004" pitchFamily="2" charset="-127"/>
-              <a:ea typeface="Pretendard Variable SemiBold" panose="02000003000000020004" pitchFamily="2" charset="-127"/>
-              <a:cs typeface="Pretendard Variable SemiBold" panose="02000003000000020004" pitchFamily="2" charset="-127"/>
-            </a:endParaRPr>
-          </a:p>
-        </p:txBody>
-      </p:sp>
-      <p:graphicFrame>
-        <p:nvGraphicFramePr>
-          <p:cNvPr id="4" name="표 3">
-            <a:extLst>
-              <a:ext uri="{FF2B5EF4-FFF2-40B4-BE49-F238E27FC236}">
-                <a16:creationId xmlns:a16="http://schemas.microsoft.com/office/drawing/2014/main" id="{365D4C56-3852-3338-80B8-3F22DFD71700}"/>
-              </a:ext>
-            </a:extLst>
-          </p:cNvPr>
-          <p:cNvGraphicFramePr>
-            <a:graphicFrameLocks noGrp="1"/>
-          </p:cNvGraphicFramePr>
-          <p:nvPr/>
-        </p:nvGraphicFramePr>
-        <p:xfrm>
-          <a:off x="8463343" y="1508493"/>
-          <a:ext cx="3464569" cy="4233184"/>
-        </p:xfrm>
-        <a:graphic>
-          <a:graphicData uri="http://schemas.openxmlformats.org/drawingml/2006/table">
-            <a:tbl>
-              <a:tblPr>
-                <a:solidFill>
-                  <a:srgbClr val="D9E2F0"/>
-                </a:solidFill>
-                <a:tableStyleId>{073A0DAA-6AF3-43AB-8588-CEC1D06C72B9}</a:tableStyleId>
-              </a:tblPr>
-              <a:tblGrid>
-                <a:gridCol w="640007">
-                  <a:extLst>
-                    <a:ext uri="{9D8B030D-6E8A-4147-A177-3AD203B41FA5}">
-                      <a16:colId xmlns:a16="http://schemas.microsoft.com/office/drawing/2014/main" val="3609243270"/>
-                    </a:ext>
-                  </a:extLst>
-                </a:gridCol>
-                <a:gridCol w="2824562">
-                  <a:extLst>
-                    <a:ext uri="{9D8B030D-6E8A-4147-A177-3AD203B41FA5}">
-                      <a16:colId xmlns:a16="http://schemas.microsoft.com/office/drawing/2014/main" val="3085350586"/>
-                    </a:ext>
-                  </a:extLst>
-                </a:gridCol>
-              </a:tblGrid>
-              <a:tr h="230612">
-                <a:tc>
-                  <a:txBody>
-                    <a:bodyPr/>
-                    <a:lstStyle/>
-                    <a:p>
-                      <a:pPr algn="ctr" fontAlgn="ctr">
-                        <a:buNone/>
-                      </a:pPr>
-                      <a:r>
-                        <a:rPr lang="ko-KR" altLang="en-US" sz="1000" b="1" i="0" kern="1200" dirty="0">
-                          <a:ln>
-                            <a:solidFill>
-                              <a:srgbClr val="4472C4">
-                                <a:alpha val="0"/>
-                              </a:srgbClr>
-                            </a:solidFill>
-                          </a:ln>
-                          <a:solidFill>
-                            <a:srgbClr val="202946"/>
-                          </a:solidFill>
-                          <a:latin typeface="Pretendard Variable SemiBold" panose="02000003000000020004" pitchFamily="2" charset="-127"/>
-                          <a:ea typeface="Pretendard Variable SemiBold" panose="02000003000000020004" pitchFamily="2" charset="-127"/>
-                          <a:cs typeface="Pretendard Variable SemiBold" panose="02000003000000020004" pitchFamily="2" charset="-127"/>
-                        </a:rPr>
-                        <a:t>구분</a:t>
-                      </a:r>
-                    </a:p>
-                  </a:txBody>
-                  <a:tcPr marL="4265" marR="4265" marT="4265" marB="0" anchor="ctr">
-                    <a:lnL w="12700" cap="flat" cmpd="sng" algn="ctr">
-                      <a:noFill/>
-                      <a:prstDash val="solid"/>
-                      <a:round/>
-                      <a:headEnd type="none" w="med" len="med"/>
-                      <a:tailEnd type="none" w="med" len="med"/>
-                    </a:lnL>
-                    <a:lnR w="12700" cap="flat" cmpd="sng" algn="ctr">
-                      <a:solidFill>
-                        <a:schemeClr val="tx1"/>
-                      </a:solidFill>
-                      <a:prstDash val="solid"/>
-                      <a:round/>
-                      <a:headEnd type="none" w="med" len="med"/>
-                      <a:tailEnd type="none" w="med" len="med"/>
-                    </a:lnR>
-                    <a:lnT w="12700" cap="flat" cmpd="sng" algn="ctr">
-                      <a:solidFill>
-                        <a:schemeClr val="tx1"/>
-                      </a:solidFill>
-                      <a:prstDash val="solid"/>
-                      <a:round/>
-                      <a:headEnd type="none" w="med" len="med"/>
-                      <a:tailEnd type="none" w="med" len="med"/>
-                    </a:lnT>
-                    <a:lnB w="12700" cap="flat" cmpd="sng" algn="ctr">
-                      <a:solidFill>
-                        <a:schemeClr val="tx1"/>
-                      </a:solidFill>
-                      <a:prstDash val="solid"/>
-                      <a:round/>
-                      <a:headEnd type="none" w="med" len="med"/>
-                      <a:tailEnd type="none" w="med" len="med"/>
-                    </a:lnB>
-                  </a:tcPr>
-                </a:tc>
-                <a:tc>
-                  <a:txBody>
-                    <a:bodyPr/>
-                    <a:lstStyle/>
-                    <a:p>
-                      <a:pPr algn="ctr" fontAlgn="ctr">
-                        <a:buNone/>
-                      </a:pPr>
-                      <a:r>
-                        <a:rPr lang="ko-KR" altLang="en-US" sz="1000" b="1" i="0" kern="1200" dirty="0">
-                          <a:ln>
-                            <a:solidFill>
-                              <a:srgbClr val="4472C4">
-                                <a:alpha val="0"/>
-                              </a:srgbClr>
-                            </a:solidFill>
-                          </a:ln>
-                          <a:solidFill>
-                            <a:srgbClr val="202946"/>
-                          </a:solidFill>
-                          <a:latin typeface="Pretendard Variable SemiBold" panose="02000003000000020004" pitchFamily="2" charset="-127"/>
-                          <a:ea typeface="Pretendard Variable SemiBold" panose="02000003000000020004" pitchFamily="2" charset="-127"/>
-                          <a:cs typeface="Pretendard Variable SemiBold" panose="02000003000000020004" pitchFamily="2" charset="-127"/>
-                        </a:rPr>
-                        <a:t>내용</a:t>
-                      </a:r>
-                    </a:p>
-                  </a:txBody>
-                  <a:tcPr marL="4265" marR="4265" marT="4265" marB="0" anchor="ctr">
-                    <a:lnL w="12700" cap="flat" cmpd="sng" algn="ctr">
-                      <a:solidFill>
-                        <a:schemeClr val="tx1"/>
-                      </a:solidFill>
-                      <a:prstDash val="solid"/>
-                      <a:round/>
-                      <a:headEnd type="none" w="med" len="med"/>
-                      <a:tailEnd type="none" w="med" len="med"/>
-                    </a:lnL>
-                    <a:lnR w="12700" cap="flat" cmpd="sng" algn="ctr">
-                      <a:noFill/>
-                      <a:prstDash val="solid"/>
-                      <a:round/>
-                      <a:headEnd type="none" w="med" len="med"/>
-                      <a:tailEnd type="none" w="med" len="med"/>
-                    </a:lnR>
-                    <a:lnT w="12700" cap="flat" cmpd="sng" algn="ctr">
-                      <a:solidFill>
-                        <a:schemeClr val="tx1"/>
-                      </a:solidFill>
-                      <a:prstDash val="solid"/>
-                      <a:round/>
-                      <a:headEnd type="none" w="med" len="med"/>
-                      <a:tailEnd type="none" w="med" len="med"/>
-                    </a:lnT>
-                    <a:lnB w="12700" cap="flat" cmpd="sng" algn="ctr">
-                      <a:solidFill>
-                        <a:schemeClr val="tx1"/>
-                      </a:solidFill>
-                      <a:prstDash val="solid"/>
-                      <a:round/>
-                      <a:headEnd type="none" w="med" len="med"/>
-                      <a:tailEnd type="none" w="med" len="med"/>
-                    </a:lnB>
-                  </a:tcPr>
-                </a:tc>
-                <a:extLst>
-                  <a:ext uri="{0D108BD9-81ED-4DB2-BD59-A6C34878D82A}">
-                    <a16:rowId xmlns:a16="http://schemas.microsoft.com/office/drawing/2014/main" val="2213331099"/>
-                  </a:ext>
-                </a:extLst>
-              </a:tr>
-              <a:tr h="2001286">
-                <a:tc>
-                  <a:txBody>
-                    <a:bodyPr/>
-                    <a:lstStyle/>
-                    <a:p>
-                      <a:pPr algn="ctr" fontAlgn="ctr">
-                        <a:buNone/>
-                      </a:pPr>
-                      <a:r>
-                        <a:rPr lang="en-US" altLang="ko-KR" sz="1000" b="1" i="0" kern="1200" dirty="0">
-                          <a:ln>
-                            <a:solidFill>
-                              <a:srgbClr val="4472C4">
-                                <a:alpha val="0"/>
-                              </a:srgbClr>
-                            </a:solidFill>
-                          </a:ln>
-                          <a:solidFill>
-                            <a:srgbClr val="202946"/>
-                          </a:solidFill>
-                          <a:latin typeface="Pretendard Variable SemiBold" panose="02000003000000020004" pitchFamily="2" charset="-127"/>
-                          <a:ea typeface="Pretendard Variable SemiBold" panose="02000003000000020004" pitchFamily="2" charset="-127"/>
-                          <a:cs typeface="Pretendard Variable SemiBold" panose="02000003000000020004" pitchFamily="2" charset="-127"/>
-                        </a:rPr>
-                        <a:t>3</a:t>
-                      </a:r>
-                      <a:endParaRPr lang="ko-KR" altLang="en-US" sz="1000" b="1" i="0" kern="1200" dirty="0">
-                        <a:ln>
-                          <a:solidFill>
-                            <a:srgbClr val="4472C4">
-                              <a:alpha val="0"/>
-                            </a:srgbClr>
-                          </a:solidFill>
-                        </a:ln>
-                        <a:solidFill>
-                          <a:srgbClr val="202946"/>
-                        </a:solidFill>
-                        <a:latin typeface="Pretendard Variable SemiBold" panose="02000003000000020004" pitchFamily="2" charset="-127"/>
-                        <a:ea typeface="Pretendard Variable SemiBold" panose="02000003000000020004" pitchFamily="2" charset="-127"/>
-                        <a:cs typeface="Pretendard Variable SemiBold" panose="02000003000000020004" pitchFamily="2" charset="-127"/>
-                      </a:endParaRPr>
-                    </a:p>
-                  </a:txBody>
-                  <a:tcPr marL="4265" marR="4265" marT="4265" marB="0" anchor="ctr">
-                    <a:lnL w="12700" cap="flat" cmpd="sng" algn="ctr">
-                      <a:noFill/>
-                      <a:prstDash val="solid"/>
-                      <a:round/>
-                      <a:headEnd type="none" w="med" len="med"/>
-                      <a:tailEnd type="none" w="med" len="med"/>
-                    </a:lnL>
-                    <a:lnR w="12700" cap="flat" cmpd="sng" algn="ctr">
-                      <a:solidFill>
-                        <a:schemeClr val="tx1"/>
-                      </a:solidFill>
-                      <a:prstDash val="solid"/>
-                      <a:round/>
-                      <a:headEnd type="none" w="med" len="med"/>
-                      <a:tailEnd type="none" w="med" len="med"/>
-                    </a:lnR>
-                    <a:lnT w="12700" cap="flat" cmpd="sng" algn="ctr">
-                      <a:solidFill>
-                        <a:schemeClr val="tx1"/>
-                      </a:solidFill>
-                      <a:prstDash val="solid"/>
-                      <a:round/>
-                      <a:headEnd type="none" w="med" len="med"/>
-                      <a:tailEnd type="none" w="med" len="med"/>
-                    </a:lnT>
-                    <a:lnB w="12700" cap="flat" cmpd="sng" algn="ctr">
-                      <a:solidFill>
-                        <a:schemeClr val="tx1"/>
-                      </a:solidFill>
-                      <a:prstDash val="solid"/>
-                      <a:round/>
-                      <a:headEnd type="none" w="med" len="med"/>
-                      <a:tailEnd type="none" w="med" len="med"/>
-                    </a:lnB>
-                    <a:solidFill>
-                      <a:schemeClr val="bg1"/>
-                    </a:solidFill>
-                  </a:tcPr>
-                </a:tc>
-                <a:tc>
-                  <a:txBody>
-                    <a:bodyPr/>
-                    <a:lstStyle/>
-                    <a:p>
-                      <a:pPr algn="l" fontAlgn="ctr">
-                        <a:buNone/>
-                      </a:pPr>
-                      <a:r>
-                        <a:rPr lang="ko-KR" altLang="en-US" sz="1000" b="1" i="0" kern="1200" dirty="0">
-                          <a:ln>
-                            <a:solidFill>
-                              <a:srgbClr val="4472C4">
-                                <a:alpha val="0"/>
-                              </a:srgbClr>
-                            </a:solidFill>
-                          </a:ln>
-                          <a:solidFill>
-                            <a:srgbClr val="202946"/>
-                          </a:solidFill>
-                          <a:latin typeface="Pretendard Variable SemiBold" panose="02000003000000020004" pitchFamily="2" charset="-127"/>
-                          <a:ea typeface="Pretendard Variable SemiBold" panose="02000003000000020004" pitchFamily="2" charset="-127"/>
-                          <a:cs typeface="Pretendard Variable SemiBold" panose="02000003000000020004" pitchFamily="2" charset="-127"/>
-                        </a:rPr>
-                        <a:t> 주요 위험 요인</a:t>
-                      </a:r>
-                      <a:endParaRPr lang="en-US" altLang="ko-KR" sz="1000" b="1" i="0" kern="1200" dirty="0">
-                        <a:ln>
-                          <a:solidFill>
-                            <a:srgbClr val="4472C4">
-                              <a:alpha val="0"/>
-                            </a:srgbClr>
-                          </a:solidFill>
-                        </a:ln>
-                        <a:solidFill>
-                          <a:srgbClr val="202946"/>
-                        </a:solidFill>
-                        <a:latin typeface="Pretendard Variable SemiBold" panose="02000003000000020004" pitchFamily="2" charset="-127"/>
-                        <a:ea typeface="Pretendard Variable SemiBold" panose="02000003000000020004" pitchFamily="2" charset="-127"/>
-                        <a:cs typeface="Pretendard Variable SemiBold" panose="02000003000000020004" pitchFamily="2" charset="-127"/>
-                      </a:endParaRPr>
-                    </a:p>
-                    <a:p>
-                      <a:pPr algn="l" fontAlgn="ctr">
-                        <a:buNone/>
-                      </a:pPr>
-                      <a:r>
-                        <a:rPr lang="ko-KR" altLang="en-US" sz="1000" b="1" i="0" kern="1200" dirty="0">
-                          <a:ln>
-                            <a:solidFill>
-                              <a:srgbClr val="4472C4">
-                                <a:alpha val="0"/>
-                              </a:srgbClr>
-                            </a:solidFill>
-                          </a:ln>
-                          <a:solidFill>
-                            <a:srgbClr val="202946"/>
-                          </a:solidFill>
-                          <a:latin typeface="Pretendard Variable SemiBold" panose="02000003000000020004" pitchFamily="2" charset="-127"/>
-                          <a:ea typeface="Pretendard Variable SemiBold" panose="02000003000000020004" pitchFamily="2" charset="-127"/>
-                          <a:cs typeface="Pretendard Variable SemiBold" panose="02000003000000020004" pitchFamily="2" charset="-127"/>
-                        </a:rPr>
-                        <a:t> </a:t>
-                      </a:r>
-                      <a:r>
-                        <a:rPr lang="en-US" altLang="ko-KR" sz="1000" b="1" i="0" kern="1200" dirty="0">
-                          <a:ln>
-                            <a:solidFill>
-                              <a:srgbClr val="4472C4">
-                                <a:alpha val="0"/>
-                              </a:srgbClr>
-                            </a:solidFill>
-                          </a:ln>
-                          <a:solidFill>
-                            <a:srgbClr val="202946"/>
-                          </a:solidFill>
-                          <a:latin typeface="Pretendard Variable SemiBold" panose="02000003000000020004" pitchFamily="2" charset="-127"/>
-                          <a:ea typeface="Pretendard Variable SemiBold" panose="02000003000000020004" pitchFamily="2" charset="-127"/>
-                          <a:cs typeface="Pretendard Variable SemiBold" panose="02000003000000020004" pitchFamily="2" charset="-127"/>
-                        </a:rPr>
-                        <a:t>-</a:t>
-                      </a:r>
-                      <a:r>
-                        <a:rPr lang="ko-KR" altLang="en-US" sz="1000" b="1" i="0" kern="1200" dirty="0">
-                          <a:ln>
-                            <a:solidFill>
-                              <a:srgbClr val="4472C4">
-                                <a:alpha val="0"/>
-                              </a:srgbClr>
-                            </a:solidFill>
-                          </a:ln>
-                          <a:solidFill>
-                            <a:srgbClr val="202946"/>
-                          </a:solidFill>
-                          <a:latin typeface="Pretendard Variable SemiBold" panose="02000003000000020004" pitchFamily="2" charset="-127"/>
-                          <a:ea typeface="Pretendard Variable SemiBold" panose="02000003000000020004" pitchFamily="2" charset="-127"/>
-                          <a:cs typeface="Pretendard Variable SemiBold" panose="02000003000000020004" pitchFamily="2" charset="-127"/>
-                        </a:rPr>
-                        <a:t> 주요 위험 요인 나열</a:t>
-                      </a:r>
-                    </a:p>
-                  </a:txBody>
-                  <a:tcPr marL="4265" marR="4265" marT="4265" marB="0" anchor="ctr">
-                    <a:lnL w="12700" cap="flat" cmpd="sng" algn="ctr">
-                      <a:solidFill>
-                        <a:schemeClr val="tx1"/>
-                      </a:solidFill>
-                      <a:prstDash val="solid"/>
-                      <a:round/>
-                      <a:headEnd type="none" w="med" len="med"/>
-                      <a:tailEnd type="none" w="med" len="med"/>
-                    </a:lnL>
-                    <a:lnR w="12700" cap="flat" cmpd="sng" algn="ctr">
-                      <a:noFill/>
-                      <a:prstDash val="solid"/>
-                      <a:round/>
-                      <a:headEnd type="none" w="med" len="med"/>
-                      <a:tailEnd type="none" w="med" len="med"/>
-                    </a:lnR>
-                    <a:lnT w="12700" cap="flat" cmpd="sng" algn="ctr">
-                      <a:solidFill>
-                        <a:schemeClr val="tx1"/>
-                      </a:solidFill>
-                      <a:prstDash val="solid"/>
-                      <a:round/>
-                      <a:headEnd type="none" w="med" len="med"/>
-                      <a:tailEnd type="none" w="med" len="med"/>
-                    </a:lnT>
-                    <a:lnB w="12700" cap="flat" cmpd="sng" algn="ctr">
-                      <a:solidFill>
-                        <a:schemeClr val="tx1"/>
-                      </a:solidFill>
-                      <a:prstDash val="solid"/>
-                      <a:round/>
-                      <a:headEnd type="none" w="med" len="med"/>
-                      <a:tailEnd type="none" w="med" len="med"/>
-                    </a:lnB>
-                    <a:solidFill>
-                      <a:schemeClr val="bg1"/>
-                    </a:solidFill>
-                  </a:tcPr>
-                </a:tc>
-                <a:extLst>
-                  <a:ext uri="{0D108BD9-81ED-4DB2-BD59-A6C34878D82A}">
-                    <a16:rowId xmlns:a16="http://schemas.microsoft.com/office/drawing/2014/main" val="1765427849"/>
-                  </a:ext>
-                </a:extLst>
-              </a:tr>
-              <a:tr h="2001286">
-                <a:tc>
-                  <a:txBody>
-                    <a:bodyPr/>
-                    <a:lstStyle/>
-                    <a:p>
-                      <a:pPr algn="ctr" fontAlgn="ctr">
-                        <a:buNone/>
-                      </a:pPr>
-                      <a:r>
-                        <a:rPr lang="en-US" altLang="ko-KR" sz="1000" b="1" i="0" kern="1200" dirty="0">
-                          <a:ln>
-                            <a:solidFill>
-                              <a:srgbClr val="4472C4">
-                                <a:alpha val="0"/>
-                              </a:srgbClr>
-                            </a:solidFill>
-                          </a:ln>
-                          <a:solidFill>
-                            <a:srgbClr val="202946"/>
-                          </a:solidFill>
-                          <a:latin typeface="Pretendard Variable SemiBold" panose="02000003000000020004" pitchFamily="2" charset="-127"/>
-                          <a:ea typeface="Pretendard Variable SemiBold" panose="02000003000000020004" pitchFamily="2" charset="-127"/>
-                          <a:cs typeface="Pretendard Variable SemiBold" panose="02000003000000020004" pitchFamily="2" charset="-127"/>
-                        </a:rPr>
-                        <a:t>4</a:t>
-                      </a:r>
-                      <a:endParaRPr lang="en-US" sz="1000" b="1" i="0" kern="1200" dirty="0">
-                        <a:ln>
-                          <a:solidFill>
-                            <a:srgbClr val="4472C4">
-                              <a:alpha val="0"/>
-                            </a:srgbClr>
-                          </a:solidFill>
-                        </a:ln>
-                        <a:solidFill>
-                          <a:srgbClr val="202946"/>
-                        </a:solidFill>
-                        <a:latin typeface="Pretendard Variable SemiBold" panose="02000003000000020004" pitchFamily="2" charset="-127"/>
-                        <a:ea typeface="Pretendard Variable SemiBold" panose="02000003000000020004" pitchFamily="2" charset="-127"/>
-                        <a:cs typeface="Pretendard Variable SemiBold" panose="02000003000000020004" pitchFamily="2" charset="-127"/>
-                      </a:endParaRPr>
-                    </a:p>
-                  </a:txBody>
-                  <a:tcPr marL="4265" marR="4265" marT="4265" marB="0" anchor="ctr">
-                    <a:lnL w="12700" cap="flat" cmpd="sng" algn="ctr">
-                      <a:noFill/>
-                      <a:prstDash val="solid"/>
-                      <a:round/>
-                      <a:headEnd type="none" w="med" len="med"/>
-                      <a:tailEnd type="none" w="med" len="med"/>
-                    </a:lnL>
-                    <a:lnR w="12700" cap="flat" cmpd="sng" algn="ctr">
-                      <a:solidFill>
-                        <a:schemeClr val="tx1"/>
-                      </a:solidFill>
-                      <a:prstDash val="solid"/>
-                      <a:round/>
-                      <a:headEnd type="none" w="med" len="med"/>
-                      <a:tailEnd type="none" w="med" len="med"/>
-                    </a:lnR>
-                    <a:lnT w="12700" cap="flat" cmpd="sng" algn="ctr">
-                      <a:solidFill>
-                        <a:schemeClr val="tx1"/>
-                      </a:solidFill>
-                      <a:prstDash val="solid"/>
-                      <a:round/>
-                      <a:headEnd type="none" w="med" len="med"/>
-                      <a:tailEnd type="none" w="med" len="med"/>
-                    </a:lnT>
-                    <a:lnB w="12700" cap="flat" cmpd="sng" algn="ctr">
-                      <a:solidFill>
-                        <a:schemeClr val="tx1"/>
-                      </a:solidFill>
-                      <a:prstDash val="solid"/>
-                      <a:round/>
-                      <a:headEnd type="none" w="med" len="med"/>
-                      <a:tailEnd type="none" w="med" len="med"/>
-                    </a:lnB>
-                    <a:solidFill>
-                      <a:schemeClr val="bg1"/>
-                    </a:solidFill>
-                  </a:tcPr>
-                </a:tc>
-                <a:tc>
-                  <a:txBody>
-                    <a:bodyPr/>
-                    <a:lstStyle/>
-                    <a:p>
-                      <a:pPr algn="l" fontAlgn="ctr">
-                        <a:buNone/>
-                      </a:pPr>
-                      <a:r>
-                        <a:rPr lang="ko-KR" altLang="en-US" sz="1000" b="1" i="0" kern="1200" dirty="0">
-                          <a:ln>
-                            <a:solidFill>
-                              <a:srgbClr val="4472C4">
-                                <a:alpha val="0"/>
-                              </a:srgbClr>
-                            </a:solidFill>
-                          </a:ln>
-                          <a:solidFill>
-                            <a:srgbClr val="202946"/>
-                          </a:solidFill>
-                          <a:latin typeface="Pretendard Variable SemiBold" panose="02000003000000020004" pitchFamily="2" charset="-127"/>
-                          <a:ea typeface="Pretendard Variable SemiBold" panose="02000003000000020004" pitchFamily="2" charset="-127"/>
-                          <a:cs typeface="Pretendard Variable SemiBold" panose="02000003000000020004" pitchFamily="2" charset="-127"/>
-                        </a:rPr>
-                        <a:t> </a:t>
-                      </a:r>
-                      <a:r>
-                        <a:rPr lang="ko-KR" altLang="en-US" sz="1000" b="1" i="0" kern="1200" dirty="0" err="1">
-                          <a:ln>
-                            <a:solidFill>
-                              <a:srgbClr val="4472C4">
-                                <a:alpha val="0"/>
-                              </a:srgbClr>
-                            </a:solidFill>
-                          </a:ln>
-                          <a:solidFill>
-                            <a:srgbClr val="202946"/>
-                          </a:solidFill>
-                          <a:latin typeface="Pretendard Variable SemiBold" panose="02000003000000020004" pitchFamily="2" charset="-127"/>
-                          <a:ea typeface="Pretendard Variable SemiBold" panose="02000003000000020004" pitchFamily="2" charset="-127"/>
-                          <a:cs typeface="Pretendard Variable SemiBold" panose="02000003000000020004" pitchFamily="2" charset="-127"/>
-                        </a:rPr>
-                        <a:t>메인화면으로</a:t>
-                      </a:r>
-                      <a:r>
-                        <a:rPr lang="ko-KR" altLang="en-US" sz="1000" b="1" i="0" kern="1200" dirty="0">
-                          <a:ln>
-                            <a:solidFill>
-                              <a:srgbClr val="4472C4">
-                                <a:alpha val="0"/>
-                              </a:srgbClr>
-                            </a:solidFill>
-                          </a:ln>
-                          <a:solidFill>
-                            <a:srgbClr val="202946"/>
-                          </a:solidFill>
-                          <a:latin typeface="Pretendard Variable SemiBold" panose="02000003000000020004" pitchFamily="2" charset="-127"/>
-                          <a:ea typeface="Pretendard Variable SemiBold" panose="02000003000000020004" pitchFamily="2" charset="-127"/>
-                          <a:cs typeface="Pretendard Variable SemiBold" panose="02000003000000020004" pitchFamily="2" charset="-127"/>
-                        </a:rPr>
-                        <a:t> 돌아가기</a:t>
-                      </a:r>
-                      <a:endParaRPr lang="en-US" altLang="ko-KR" sz="1000" b="1" i="0" kern="1200" dirty="0">
-                        <a:ln>
-                          <a:solidFill>
-                            <a:srgbClr val="4472C4">
-                              <a:alpha val="0"/>
-                            </a:srgbClr>
-                          </a:solidFill>
-                        </a:ln>
-                        <a:solidFill>
-                          <a:srgbClr val="202946"/>
-                        </a:solidFill>
-                        <a:latin typeface="Pretendard Variable SemiBold" panose="02000003000000020004" pitchFamily="2" charset="-127"/>
-                        <a:ea typeface="Pretendard Variable SemiBold" panose="02000003000000020004" pitchFamily="2" charset="-127"/>
-                        <a:cs typeface="Pretendard Variable SemiBold" panose="02000003000000020004" pitchFamily="2" charset="-127"/>
-                      </a:endParaRPr>
-                    </a:p>
-                    <a:p>
-                      <a:pPr algn="l" fontAlgn="ctr">
-                        <a:buNone/>
-                      </a:pPr>
-                      <a:r>
-                        <a:rPr lang="ko-KR" altLang="en-US" sz="1000" b="1" i="0" kern="1200" dirty="0">
-                          <a:ln>
-                            <a:solidFill>
-                              <a:srgbClr val="4472C4">
-                                <a:alpha val="0"/>
-                              </a:srgbClr>
-                            </a:solidFill>
-                          </a:ln>
-                          <a:solidFill>
-                            <a:srgbClr val="202946"/>
-                          </a:solidFill>
-                          <a:latin typeface="Pretendard Variable SemiBold" panose="02000003000000020004" pitchFamily="2" charset="-127"/>
-                          <a:ea typeface="Pretendard Variable SemiBold" panose="02000003000000020004" pitchFamily="2" charset="-127"/>
-                          <a:cs typeface="Pretendard Variable SemiBold" panose="02000003000000020004" pitchFamily="2" charset="-127"/>
-                        </a:rPr>
-                        <a:t> </a:t>
-                      </a:r>
-                      <a:r>
-                        <a:rPr lang="en-US" altLang="ko-KR" sz="1000" b="1" i="0" kern="1200" dirty="0">
-                          <a:ln>
-                            <a:solidFill>
-                              <a:srgbClr val="4472C4">
-                                <a:alpha val="0"/>
-                              </a:srgbClr>
-                            </a:solidFill>
-                          </a:ln>
-                          <a:solidFill>
-                            <a:srgbClr val="202946"/>
-                          </a:solidFill>
-                          <a:latin typeface="Pretendard Variable SemiBold" panose="02000003000000020004" pitchFamily="2" charset="-127"/>
-                          <a:ea typeface="Pretendard Variable SemiBold" panose="02000003000000020004" pitchFamily="2" charset="-127"/>
-                          <a:cs typeface="Pretendard Variable SemiBold" panose="02000003000000020004" pitchFamily="2" charset="-127"/>
-                        </a:rPr>
-                        <a:t>-</a:t>
-                      </a:r>
-                      <a:r>
-                        <a:rPr lang="ko-KR" altLang="en-US" sz="1000" b="1" i="0" kern="1200" dirty="0">
-                          <a:ln>
-                            <a:solidFill>
-                              <a:srgbClr val="4472C4">
-                                <a:alpha val="0"/>
-                              </a:srgbClr>
-                            </a:solidFill>
-                          </a:ln>
-                          <a:solidFill>
-                            <a:srgbClr val="202946"/>
-                          </a:solidFill>
-                          <a:latin typeface="Pretendard Variable SemiBold" panose="02000003000000020004" pitchFamily="2" charset="-127"/>
-                          <a:ea typeface="Pretendard Variable SemiBold" panose="02000003000000020004" pitchFamily="2" charset="-127"/>
-                          <a:cs typeface="Pretendard Variable SemiBold" panose="02000003000000020004" pitchFamily="2" charset="-127"/>
-                        </a:rPr>
-                        <a:t> 완료 후 </a:t>
-                      </a:r>
-                      <a:r>
-                        <a:rPr lang="ko-KR" altLang="en-US" sz="1000" b="1" i="0" kern="1200" dirty="0" err="1">
-                          <a:ln>
-                            <a:solidFill>
-                              <a:srgbClr val="4472C4">
-                                <a:alpha val="0"/>
-                              </a:srgbClr>
-                            </a:solidFill>
-                          </a:ln>
-                          <a:solidFill>
-                            <a:srgbClr val="202946"/>
-                          </a:solidFill>
-                          <a:latin typeface="Pretendard Variable SemiBold" panose="02000003000000020004" pitchFamily="2" charset="-127"/>
-                          <a:ea typeface="Pretendard Variable SemiBold" panose="02000003000000020004" pitchFamily="2" charset="-127"/>
-                          <a:cs typeface="Pretendard Variable SemiBold" panose="02000003000000020004" pitchFamily="2" charset="-127"/>
-                        </a:rPr>
-                        <a:t>메인화면으로</a:t>
-                      </a:r>
-                      <a:r>
-                        <a:rPr lang="ko-KR" altLang="en-US" sz="1000" b="1" i="0" kern="1200" dirty="0">
-                          <a:ln>
-                            <a:solidFill>
-                              <a:srgbClr val="4472C4">
-                                <a:alpha val="0"/>
-                              </a:srgbClr>
-                            </a:solidFill>
-                          </a:ln>
-                          <a:solidFill>
-                            <a:srgbClr val="202946"/>
-                          </a:solidFill>
-                          <a:latin typeface="Pretendard Variable SemiBold" panose="02000003000000020004" pitchFamily="2" charset="-127"/>
-                          <a:ea typeface="Pretendard Variable SemiBold" panose="02000003000000020004" pitchFamily="2" charset="-127"/>
-                          <a:cs typeface="Pretendard Variable SemiBold" panose="02000003000000020004" pitchFamily="2" charset="-127"/>
-                        </a:rPr>
-                        <a:t> 돌아가는 버튼 노출</a:t>
-                      </a:r>
-                      <a:endParaRPr lang="en-US" altLang="ko-KR" sz="1000" b="1" i="0" kern="1200" dirty="0">
-                        <a:ln>
-                          <a:solidFill>
-                            <a:srgbClr val="4472C4">
-                              <a:alpha val="0"/>
-                            </a:srgbClr>
-                          </a:solidFill>
-                        </a:ln>
-                        <a:solidFill>
-                          <a:srgbClr val="202946"/>
-                        </a:solidFill>
-                        <a:latin typeface="Pretendard Variable SemiBold" panose="02000003000000020004" pitchFamily="2" charset="-127"/>
-                        <a:ea typeface="Pretendard Variable SemiBold" panose="02000003000000020004" pitchFamily="2" charset="-127"/>
-                        <a:cs typeface="Pretendard Variable SemiBold" panose="02000003000000020004" pitchFamily="2" charset="-127"/>
-                      </a:endParaRPr>
-                    </a:p>
-                  </a:txBody>
-                  <a:tcPr marL="4265" marR="4265" marT="4265" marB="0" anchor="ctr">
-                    <a:lnL w="12700" cap="flat" cmpd="sng" algn="ctr">
-                      <a:solidFill>
-                        <a:schemeClr val="tx1"/>
-                      </a:solidFill>
-                      <a:prstDash val="solid"/>
-                      <a:round/>
-                      <a:headEnd type="none" w="med" len="med"/>
-                      <a:tailEnd type="none" w="med" len="med"/>
-                    </a:lnL>
-                    <a:lnR w="12700" cap="flat" cmpd="sng" algn="ctr">
-                      <a:noFill/>
-                      <a:prstDash val="solid"/>
-                      <a:round/>
-                      <a:headEnd type="none" w="med" len="med"/>
-                      <a:tailEnd type="none" w="med" len="med"/>
-                    </a:lnR>
-                    <a:lnT w="12700" cap="flat" cmpd="sng" algn="ctr">
-                      <a:solidFill>
-                        <a:schemeClr val="tx1"/>
-                      </a:solidFill>
-                      <a:prstDash val="solid"/>
-                      <a:round/>
-                      <a:headEnd type="none" w="med" len="med"/>
-                      <a:tailEnd type="none" w="med" len="med"/>
-                    </a:lnT>
-                    <a:lnB w="12700" cap="flat" cmpd="sng" algn="ctr">
-                      <a:solidFill>
-                        <a:schemeClr val="tx1"/>
-                      </a:solidFill>
-                      <a:prstDash val="solid"/>
-                      <a:round/>
-                      <a:headEnd type="none" w="med" len="med"/>
-                      <a:tailEnd type="none" w="med" len="med"/>
-                    </a:lnB>
-                    <a:solidFill>
-                      <a:schemeClr val="bg1"/>
-                    </a:solidFill>
-                  </a:tcPr>
-                </a:tc>
-                <a:extLst>
-                  <a:ext uri="{0D108BD9-81ED-4DB2-BD59-A6C34878D82A}">
-                    <a16:rowId xmlns:a16="http://schemas.microsoft.com/office/drawing/2014/main" val="1920587223"/>
-                  </a:ext>
-                </a:extLst>
-              </a:tr>
-            </a:tbl>
-          </a:graphicData>
-        </a:graphic>
-      </p:graphicFrame>
-      <p:pic>
-        <p:nvPicPr>
-          <p:cNvPr id="3" name="그림 2">
-            <a:extLst>
-              <a:ext uri="{FF2B5EF4-FFF2-40B4-BE49-F238E27FC236}">
-                <a16:creationId xmlns:a16="http://schemas.microsoft.com/office/drawing/2014/main" id="{F7279AB5-0672-157E-0594-36B1E03AC9B8}"/>
-              </a:ext>
-            </a:extLst>
-          </p:cNvPr>
-          <p:cNvPicPr>
-            <a:picLocks noChangeAspect="1"/>
-          </p:cNvPicPr>
-          <p:nvPr/>
-        </p:nvPicPr>
-        <p:blipFill>
-          <a:blip r:embed="rId4"/>
-          <a:stretch>
-            <a:fillRect/>
-          </a:stretch>
-        </p:blipFill>
-        <p:spPr>
-          <a:xfrm>
-            <a:off x="375874" y="1503639"/>
-            <a:ext cx="7772400" cy="4221228"/>
-          </a:xfrm>
-          <a:prstGeom prst="rect">
-            <a:avLst/>
-          </a:prstGeom>
-        </p:spPr>
-      </p:pic>
-      <p:sp>
-        <p:nvSpPr>
-          <p:cNvPr id="6" name="직사각형 5">
-            <a:extLst>
-              <a:ext uri="{FF2B5EF4-FFF2-40B4-BE49-F238E27FC236}">
-                <a16:creationId xmlns:a16="http://schemas.microsoft.com/office/drawing/2014/main" id="{03F6EC14-C3D2-B367-DE4F-08C00D3B67EE}"/>
-              </a:ext>
-            </a:extLst>
-          </p:cNvPr>
-          <p:cNvSpPr/>
-          <p:nvPr/>
-        </p:nvSpPr>
-        <p:spPr>
-          <a:xfrm>
-            <a:off x="3763618" y="5473148"/>
-            <a:ext cx="821635" cy="225215"/>
+          <a:xfrm flipV="1">
+            <a:off x="3856383" y="5464366"/>
+            <a:ext cx="685800" cy="176269"/>
           </a:xfrm>
           <a:prstGeom prst="rect">
             <a:avLst/>
           </a:prstGeom>
           <a:solidFill>
-            <a:srgbClr val="1E3988"/>
+            <a:srgbClr val="1E3989"/>
           </a:solidFill>
           <a:ln>
             <a:noFill/>
@@ -19983,10 +17796,10 @@
       </p:sp>
       <p:sp>
         <p:nvSpPr>
-          <p:cNvPr id="7" name="TextBox 6">
+          <p:cNvPr id="9" name="TextBox 8">
             <a:extLst>
               <a:ext uri="{FF2B5EF4-FFF2-40B4-BE49-F238E27FC236}">
-                <a16:creationId xmlns:a16="http://schemas.microsoft.com/office/drawing/2014/main" id="{F4E80255-259E-7EF6-8BC4-16E2F3839950}"/>
+                <a16:creationId xmlns:a16="http://schemas.microsoft.com/office/drawing/2014/main" id="{FA580BBF-4D3B-6937-8A68-1CCFD52EE686}"/>
               </a:ext>
             </a:extLst>
           </p:cNvPr>
@@ -19995,8 +17808,8 @@
         </p:nvSpPr>
         <p:spPr>
           <a:xfrm>
-            <a:off x="3452716" y="5473076"/>
-            <a:ext cx="1331318" cy="230832"/>
+            <a:off x="3395577" y="5442852"/>
+            <a:ext cx="6108852" cy="230832"/>
           </a:xfrm>
           <a:prstGeom prst="rect">
             <a:avLst/>
@@ -20004,7 +17817,7 @@
           <a:noFill/>
         </p:spPr>
         <p:txBody>
-          <a:bodyPr wrap="square" rtlCol="0">
+          <a:bodyPr wrap="square">
             <a:spAutoFit/>
           </a:bodyPr>
           <a:lstStyle/>
@@ -20048,150 +17861,10 @@
           </a:p>
         </p:txBody>
       </p:sp>
-      <p:sp>
-        <p:nvSpPr>
-          <p:cNvPr id="8" name="타원 7">
-            <a:extLst>
-              <a:ext uri="{FF2B5EF4-FFF2-40B4-BE49-F238E27FC236}">
-                <a16:creationId xmlns:a16="http://schemas.microsoft.com/office/drawing/2014/main" id="{0318ED8F-AC4F-49F4-C904-03F1D4AEFBB5}"/>
-              </a:ext>
-            </a:extLst>
-          </p:cNvPr>
-          <p:cNvSpPr/>
-          <p:nvPr/>
-        </p:nvSpPr>
-        <p:spPr>
-          <a:xfrm>
-            <a:off x="90239" y="5343109"/>
-            <a:ext cx="322673" cy="322673"/>
-          </a:xfrm>
-          <a:prstGeom prst="ellipse">
-            <a:avLst/>
-          </a:prstGeom>
-          <a:solidFill>
-            <a:srgbClr val="FFC000"/>
-          </a:solidFill>
-          <a:ln>
-            <a:noFill/>
-          </a:ln>
-        </p:spPr>
-        <p:style>
-          <a:lnRef idx="2">
-            <a:schemeClr val="accent1">
-              <a:shade val="15000"/>
-            </a:schemeClr>
-          </a:lnRef>
-          <a:fillRef idx="1">
-            <a:schemeClr val="accent1"/>
-          </a:fillRef>
-          <a:effectRef idx="0">
-            <a:schemeClr val="accent1"/>
-          </a:effectRef>
-          <a:fontRef idx="minor">
-            <a:schemeClr val="lt1"/>
-          </a:fontRef>
-        </p:style>
-        <p:txBody>
-          <a:bodyPr rtlCol="0" anchor="ctr"/>
-          <a:lstStyle/>
-          <a:p>
-            <a:pPr algn="ctr"/>
-            <a:r>
-              <a:rPr lang="en-US" altLang="ko-KR" b="1" dirty="0">
-                <a:solidFill>
-                  <a:schemeClr val="bg1"/>
-                </a:solidFill>
-                <a:latin typeface="Pretendard Variable Black" panose="02000003000000020004" pitchFamily="2" charset="-127"/>
-                <a:ea typeface="Pretendard Variable Black" panose="02000003000000020004" pitchFamily="2" charset="-127"/>
-                <a:cs typeface="Pretendard Variable Black" panose="02000003000000020004" pitchFamily="2" charset="-127"/>
-              </a:rPr>
-              <a:t>4</a:t>
-            </a:r>
-            <a:endParaRPr lang="ko-KR" altLang="en-US" b="1" dirty="0">
-              <a:solidFill>
-                <a:schemeClr val="bg1"/>
-              </a:solidFill>
-              <a:latin typeface="Pretendard Variable Black" panose="02000003000000020004" pitchFamily="2" charset="-127"/>
-              <a:ea typeface="Pretendard Variable Black" panose="02000003000000020004" pitchFamily="2" charset="-127"/>
-              <a:cs typeface="Pretendard Variable Black" panose="02000003000000020004" pitchFamily="2" charset="-127"/>
-            </a:endParaRPr>
-          </a:p>
-        </p:txBody>
-      </p:sp>
-      <p:sp>
-        <p:nvSpPr>
-          <p:cNvPr id="17" name="타원 16">
-            <a:extLst>
-              <a:ext uri="{FF2B5EF4-FFF2-40B4-BE49-F238E27FC236}">
-                <a16:creationId xmlns:a16="http://schemas.microsoft.com/office/drawing/2014/main" id="{F80FFA4C-4694-39EB-85CD-AFA85F6495D8}"/>
-              </a:ext>
-            </a:extLst>
-          </p:cNvPr>
-          <p:cNvSpPr/>
-          <p:nvPr/>
-        </p:nvSpPr>
-        <p:spPr>
-          <a:xfrm>
-            <a:off x="90239" y="3375163"/>
-            <a:ext cx="322673" cy="322673"/>
-          </a:xfrm>
-          <a:prstGeom prst="ellipse">
-            <a:avLst/>
-          </a:prstGeom>
-          <a:solidFill>
-            <a:srgbClr val="FFC000"/>
-          </a:solidFill>
-          <a:ln>
-            <a:noFill/>
-          </a:ln>
-        </p:spPr>
-        <p:style>
-          <a:lnRef idx="2">
-            <a:schemeClr val="accent1">
-              <a:shade val="15000"/>
-            </a:schemeClr>
-          </a:lnRef>
-          <a:fillRef idx="1">
-            <a:schemeClr val="accent1"/>
-          </a:fillRef>
-          <a:effectRef idx="0">
-            <a:schemeClr val="accent1"/>
-          </a:effectRef>
-          <a:fontRef idx="minor">
-            <a:schemeClr val="lt1"/>
-          </a:fontRef>
-        </p:style>
-        <p:txBody>
-          <a:bodyPr rtlCol="0" anchor="ctr"/>
-          <a:lstStyle/>
-          <a:p>
-            <a:pPr algn="ctr"/>
-            <a:r>
-              <a:rPr lang="en-US" altLang="ko-KR" b="1" dirty="0">
-                <a:solidFill>
-                  <a:schemeClr val="bg1"/>
-                </a:solidFill>
-                <a:latin typeface="Pretendard Variable Black" panose="02000003000000020004" pitchFamily="2" charset="-127"/>
-                <a:ea typeface="Pretendard Variable Black" panose="02000003000000020004" pitchFamily="2" charset="-127"/>
-                <a:cs typeface="Pretendard Variable Black" panose="02000003000000020004" pitchFamily="2" charset="-127"/>
-              </a:rPr>
-              <a:t>3</a:t>
-            </a:r>
-            <a:endParaRPr lang="ko-KR" altLang="en-US" b="1" dirty="0">
-              <a:solidFill>
-                <a:schemeClr val="bg1"/>
-              </a:solidFill>
-              <a:latin typeface="Pretendard Variable Black" panose="02000003000000020004" pitchFamily="2" charset="-127"/>
-              <a:ea typeface="Pretendard Variable Black" panose="02000003000000020004" pitchFamily="2" charset="-127"/>
-              <a:cs typeface="Pretendard Variable Black" panose="02000003000000020004" pitchFamily="2" charset="-127"/>
-            </a:endParaRPr>
-          </a:p>
-        </p:txBody>
-      </p:sp>
     </p:spTree>
     <p:extLst>
       <p:ext uri="{BB962C8B-B14F-4D97-AF65-F5344CB8AC3E}">
-        <p14:creationId xmlns:p14="http://schemas.microsoft.com/office/powerpoint/2010/main" val="3730376000"/>
+        <p14:creationId xmlns:p14="http://schemas.microsoft.com/office/powerpoint/2010/main" val="349482868"/>
       </p:ext>
     </p:extLst>
   </p:cSld>
